--- a/springboot/ticketing/티켓팅 부하 테스트.pptx
+++ b/springboot/ticketing/티켓팅 부하 테스트.pptx
@@ -2,7 +2,7 @@
 <file path=ppt/presentation.xml><?xml version="1.0" encoding="utf-8"?>
 <p:presentation xmlns:a="http://schemas.openxmlformats.org/drawingml/2006/main" xmlns:r="http://schemas.openxmlformats.org/officeDocument/2006/relationships" xmlns:p="http://schemas.openxmlformats.org/presentationml/2006/main" saveSubsetFonts="1">
   <p:sldMasterIdLst>
-    <p:sldMasterId id="2147483660" r:id="rId1"/>
+    <p:sldMasterId id="2147483677" r:id="rId1"/>
   </p:sldMasterIdLst>
   <p:sldIdLst>
     <p:sldId id="256" r:id="rId2"/>
@@ -121,7 +121,7 @@
 </file>
 
 <file path=ppt/slideLayouts/slideLayout1.xml><?xml version="1.0" encoding="utf-8"?>
-<p:sldLayout xmlns:a="http://schemas.openxmlformats.org/drawingml/2006/main" xmlns:r="http://schemas.openxmlformats.org/officeDocument/2006/relationships" xmlns:p="http://schemas.openxmlformats.org/presentationml/2006/main" showMasterSp="0" type="title" preserve="1">
+<p:sldLayout xmlns:a="http://schemas.openxmlformats.org/drawingml/2006/main" xmlns:r="http://schemas.openxmlformats.org/officeDocument/2006/relationships" xmlns:p="http://schemas.openxmlformats.org/presentationml/2006/main" type="title" preserve="1">
   <p:cSld name="제목 슬라이드">
     <p:spTree>
       <p:nvGrpSpPr>
@@ -137,539 +137,9 @@
           <a:chExt cx="0" cy="0"/>
         </a:xfrm>
       </p:grpSpPr>
-      <p:grpSp>
-        <p:nvGrpSpPr>
-          <p:cNvPr id="7" name="Group 6"/>
-          <p:cNvGrpSpPr/>
-          <p:nvPr/>
-        </p:nvGrpSpPr>
-        <p:grpSpPr>
-          <a:xfrm>
-            <a:off x="0" y="-8467"/>
-            <a:ext cx="12192000" cy="6866467"/>
-            <a:chOff x="0" y="-8467"/>
-            <a:chExt cx="12192000" cy="6866467"/>
-          </a:xfrm>
-        </p:grpSpPr>
-        <p:cxnSp>
-          <p:nvCxnSpPr>
-            <p:cNvPr id="32" name="Straight Connector 31"/>
-            <p:cNvCxnSpPr/>
-            <p:nvPr/>
-          </p:nvCxnSpPr>
-          <p:spPr>
-            <a:xfrm>
-              <a:off x="9371012" y="0"/>
-              <a:ext cx="1219200" cy="6858000"/>
-            </a:xfrm>
-            <a:prstGeom prst="line">
-              <a:avLst/>
-            </a:prstGeom>
-            <a:ln w="9525">
-              <a:solidFill>
-                <a:schemeClr val="bg1">
-                  <a:lumMod val="75000"/>
-                </a:schemeClr>
-              </a:solidFill>
-            </a:ln>
-          </p:spPr>
-          <p:style>
-            <a:lnRef idx="2">
-              <a:schemeClr val="accent1"/>
-            </a:lnRef>
-            <a:fillRef idx="0">
-              <a:schemeClr val="accent1"/>
-            </a:fillRef>
-            <a:effectRef idx="1">
-              <a:schemeClr val="accent1"/>
-            </a:effectRef>
-            <a:fontRef idx="minor">
-              <a:schemeClr val="tx1"/>
-            </a:fontRef>
-          </p:style>
-        </p:cxnSp>
-        <p:cxnSp>
-          <p:nvCxnSpPr>
-            <p:cNvPr id="21" name="Straight Connector 20"/>
-            <p:cNvCxnSpPr/>
-            <p:nvPr/>
-          </p:nvCxnSpPr>
-          <p:spPr>
-            <a:xfrm flipH="1">
-              <a:off x="7425267" y="3681413"/>
-              <a:ext cx="4763558" cy="3176587"/>
-            </a:xfrm>
-            <a:prstGeom prst="line">
-              <a:avLst/>
-            </a:prstGeom>
-            <a:ln w="9525">
-              <a:solidFill>
-                <a:schemeClr val="bg1">
-                  <a:lumMod val="85000"/>
-                </a:schemeClr>
-              </a:solidFill>
-            </a:ln>
-          </p:spPr>
-          <p:style>
-            <a:lnRef idx="2">
-              <a:schemeClr val="accent1"/>
-            </a:lnRef>
-            <a:fillRef idx="0">
-              <a:schemeClr val="accent1"/>
-            </a:fillRef>
-            <a:effectRef idx="1">
-              <a:schemeClr val="accent1"/>
-            </a:effectRef>
-            <a:fontRef idx="minor">
-              <a:schemeClr val="tx1"/>
-            </a:fontRef>
-          </p:style>
-        </p:cxnSp>
-        <p:sp>
-          <p:nvSpPr>
-            <p:cNvPr id="24" name="Rectangle 23"/>
-            <p:cNvSpPr/>
-            <p:nvPr/>
-          </p:nvSpPr>
-          <p:spPr>
-            <a:xfrm>
-              <a:off x="9181476" y="-8467"/>
-              <a:ext cx="3007349" cy="6866467"/>
-            </a:xfrm>
-            <a:custGeom>
-              <a:avLst/>
-              <a:gdLst/>
-              <a:ahLst/>
-              <a:cxnLst/>
-              <a:rect l="l" t="t" r="r" b="b"/>
-              <a:pathLst>
-                <a:path w="3007349" h="6866467">
-                  <a:moveTo>
-                    <a:pt x="2045532" y="0"/>
-                  </a:moveTo>
-                  <a:lnTo>
-                    <a:pt x="3007349" y="0"/>
-                  </a:lnTo>
-                  <a:lnTo>
-                    <a:pt x="3007349" y="6866467"/>
-                  </a:lnTo>
-                  <a:lnTo>
-                    <a:pt x="0" y="6866467"/>
-                  </a:lnTo>
-                  <a:lnTo>
-                    <a:pt x="2045532" y="0"/>
-                  </a:lnTo>
-                  <a:close/>
-                </a:path>
-              </a:pathLst>
-            </a:custGeom>
-            <a:solidFill>
-              <a:schemeClr val="accent1">
-                <a:alpha val="30000"/>
-              </a:schemeClr>
-            </a:solidFill>
-            <a:ln>
-              <a:noFill/>
-            </a:ln>
-            <a:effectLst/>
-          </p:spPr>
-          <p:style>
-            <a:lnRef idx="1">
-              <a:schemeClr val="accent1"/>
-            </a:lnRef>
-            <a:fillRef idx="3">
-              <a:schemeClr val="accent1"/>
-            </a:fillRef>
-            <a:effectRef idx="2">
-              <a:schemeClr val="accent1"/>
-            </a:effectRef>
-            <a:fontRef idx="minor">
-              <a:schemeClr val="lt1"/>
-            </a:fontRef>
-          </p:style>
-        </p:sp>
-        <p:sp>
-          <p:nvSpPr>
-            <p:cNvPr id="26" name="Rectangle 25"/>
-            <p:cNvSpPr/>
-            <p:nvPr/>
-          </p:nvSpPr>
-          <p:spPr>
-            <a:xfrm>
-              <a:off x="9603442" y="-8467"/>
-              <a:ext cx="2588558" cy="6866467"/>
-            </a:xfrm>
-            <a:custGeom>
-              <a:avLst/>
-              <a:gdLst/>
-              <a:ahLst/>
-              <a:cxnLst/>
-              <a:rect l="l" t="t" r="r" b="b"/>
-              <a:pathLst>
-                <a:path w="2573311" h="6866467">
-                  <a:moveTo>
-                    <a:pt x="0" y="0"/>
-                  </a:moveTo>
-                  <a:lnTo>
-                    <a:pt x="2573311" y="0"/>
-                  </a:lnTo>
-                  <a:lnTo>
-                    <a:pt x="2573311" y="6866467"/>
-                  </a:lnTo>
-                  <a:lnTo>
-                    <a:pt x="1202336" y="6866467"/>
-                  </a:lnTo>
-                  <a:lnTo>
-                    <a:pt x="0" y="0"/>
-                  </a:lnTo>
-                  <a:close/>
-                </a:path>
-              </a:pathLst>
-            </a:custGeom>
-            <a:solidFill>
-              <a:schemeClr val="accent1">
-                <a:alpha val="20000"/>
-              </a:schemeClr>
-            </a:solidFill>
-            <a:ln>
-              <a:noFill/>
-            </a:ln>
-            <a:effectLst/>
-          </p:spPr>
-          <p:style>
-            <a:lnRef idx="1">
-              <a:schemeClr val="accent1"/>
-            </a:lnRef>
-            <a:fillRef idx="3">
-              <a:schemeClr val="accent1"/>
-            </a:fillRef>
-            <a:effectRef idx="2">
-              <a:schemeClr val="accent1"/>
-            </a:effectRef>
-            <a:fontRef idx="minor">
-              <a:schemeClr val="lt1"/>
-            </a:fontRef>
-          </p:style>
-        </p:sp>
-        <p:sp>
-          <p:nvSpPr>
-            <p:cNvPr id="27" name="Isosceles Triangle 26"/>
-            <p:cNvSpPr/>
-            <p:nvPr/>
-          </p:nvSpPr>
-          <p:spPr>
-            <a:xfrm>
-              <a:off x="8932333" y="3048000"/>
-              <a:ext cx="3259667" cy="3810000"/>
-            </a:xfrm>
-            <a:prstGeom prst="triangle">
-              <a:avLst>
-                <a:gd name="adj" fmla="val 100000"/>
-              </a:avLst>
-            </a:prstGeom>
-            <a:solidFill>
-              <a:schemeClr val="accent2">
-                <a:alpha val="72000"/>
-              </a:schemeClr>
-            </a:solidFill>
-            <a:ln>
-              <a:noFill/>
-            </a:ln>
-            <a:effectLst/>
-          </p:spPr>
-          <p:style>
-            <a:lnRef idx="1">
-              <a:schemeClr val="accent1"/>
-            </a:lnRef>
-            <a:fillRef idx="3">
-              <a:schemeClr val="accent1"/>
-            </a:fillRef>
-            <a:effectRef idx="2">
-              <a:schemeClr val="accent1"/>
-            </a:effectRef>
-            <a:fontRef idx="minor">
-              <a:schemeClr val="lt1"/>
-            </a:fontRef>
-          </p:style>
-        </p:sp>
-        <p:sp>
-          <p:nvSpPr>
-            <p:cNvPr id="28" name="Rectangle 27"/>
-            <p:cNvSpPr/>
-            <p:nvPr/>
-          </p:nvSpPr>
-          <p:spPr>
-            <a:xfrm>
-              <a:off x="9334500" y="-8467"/>
-              <a:ext cx="2854326" cy="6866467"/>
-            </a:xfrm>
-            <a:custGeom>
-              <a:avLst/>
-              <a:gdLst/>
-              <a:ahLst/>
-              <a:cxnLst/>
-              <a:rect l="l" t="t" r="r" b="b"/>
-              <a:pathLst>
-                <a:path w="2858013" h="6866467">
-                  <a:moveTo>
-                    <a:pt x="0" y="0"/>
-                  </a:moveTo>
-                  <a:lnTo>
-                    <a:pt x="2858013" y="0"/>
-                  </a:lnTo>
-                  <a:lnTo>
-                    <a:pt x="2858013" y="6866467"/>
-                  </a:lnTo>
-                  <a:lnTo>
-                    <a:pt x="2473942" y="6866467"/>
-                  </a:lnTo>
-                  <a:lnTo>
-                    <a:pt x="0" y="0"/>
-                  </a:lnTo>
-                  <a:close/>
-                </a:path>
-              </a:pathLst>
-            </a:custGeom>
-            <a:solidFill>
-              <a:schemeClr val="accent2">
-                <a:lumMod val="75000"/>
-                <a:alpha val="70000"/>
-              </a:schemeClr>
-            </a:solidFill>
-            <a:ln>
-              <a:noFill/>
-            </a:ln>
-            <a:effectLst/>
-          </p:spPr>
-          <p:style>
-            <a:lnRef idx="1">
-              <a:schemeClr val="accent1"/>
-            </a:lnRef>
-            <a:fillRef idx="3">
-              <a:schemeClr val="accent1"/>
-            </a:fillRef>
-            <a:effectRef idx="2">
-              <a:schemeClr val="accent1"/>
-            </a:effectRef>
-            <a:fontRef idx="minor">
-              <a:schemeClr val="lt1"/>
-            </a:fontRef>
-          </p:style>
-        </p:sp>
-        <p:sp>
-          <p:nvSpPr>
-            <p:cNvPr id="29" name="Rectangle 28"/>
-            <p:cNvSpPr/>
-            <p:nvPr/>
-          </p:nvSpPr>
-          <p:spPr>
-            <a:xfrm>
-              <a:off x="10898730" y="-8467"/>
-              <a:ext cx="1290094" cy="6866467"/>
-            </a:xfrm>
-            <a:custGeom>
-              <a:avLst/>
-              <a:gdLst/>
-              <a:ahLst/>
-              <a:cxnLst/>
-              <a:rect l="l" t="t" r="r" b="b"/>
-              <a:pathLst>
-                <a:path w="1290094" h="6858000">
-                  <a:moveTo>
-                    <a:pt x="1019735" y="0"/>
-                  </a:moveTo>
-                  <a:lnTo>
-                    <a:pt x="1290094" y="0"/>
-                  </a:lnTo>
-                  <a:lnTo>
-                    <a:pt x="1290094" y="6858000"/>
-                  </a:lnTo>
-                  <a:lnTo>
-                    <a:pt x="0" y="6858000"/>
-                  </a:lnTo>
-                  <a:lnTo>
-                    <a:pt x="1019735" y="0"/>
-                  </a:lnTo>
-                  <a:close/>
-                </a:path>
-              </a:pathLst>
-            </a:custGeom>
-            <a:solidFill>
-              <a:schemeClr val="accent1">
-                <a:lumMod val="60000"/>
-                <a:lumOff val="40000"/>
-                <a:alpha val="70000"/>
-              </a:schemeClr>
-            </a:solidFill>
-            <a:ln>
-              <a:noFill/>
-            </a:ln>
-            <a:effectLst/>
-          </p:spPr>
-          <p:style>
-            <a:lnRef idx="1">
-              <a:schemeClr val="accent1"/>
-            </a:lnRef>
-            <a:fillRef idx="3">
-              <a:schemeClr val="accent1"/>
-            </a:fillRef>
-            <a:effectRef idx="2">
-              <a:schemeClr val="accent1"/>
-            </a:effectRef>
-            <a:fontRef idx="minor">
-              <a:schemeClr val="lt1"/>
-            </a:fontRef>
-          </p:style>
-        </p:sp>
-        <p:sp>
-          <p:nvSpPr>
-            <p:cNvPr id="30" name="Rectangle 29"/>
-            <p:cNvSpPr/>
-            <p:nvPr/>
-          </p:nvSpPr>
-          <p:spPr>
-            <a:xfrm>
-              <a:off x="10938999" y="-8467"/>
-              <a:ext cx="1249825" cy="6866467"/>
-            </a:xfrm>
-            <a:custGeom>
-              <a:avLst/>
-              <a:gdLst/>
-              <a:ahLst/>
-              <a:cxnLst/>
-              <a:rect l="l" t="t" r="r" b="b"/>
-              <a:pathLst>
-                <a:path w="1249825" h="6858000">
-                  <a:moveTo>
-                    <a:pt x="0" y="0"/>
-                  </a:moveTo>
-                  <a:lnTo>
-                    <a:pt x="1249825" y="0"/>
-                  </a:lnTo>
-                  <a:lnTo>
-                    <a:pt x="1249825" y="6858000"/>
-                  </a:lnTo>
-                  <a:lnTo>
-                    <a:pt x="1109382" y="6858000"/>
-                  </a:lnTo>
-                  <a:lnTo>
-                    <a:pt x="0" y="0"/>
-                  </a:lnTo>
-                  <a:close/>
-                </a:path>
-              </a:pathLst>
-            </a:custGeom>
-            <a:solidFill>
-              <a:schemeClr val="accent1">
-                <a:alpha val="65000"/>
-              </a:schemeClr>
-            </a:solidFill>
-            <a:ln>
-              <a:noFill/>
-            </a:ln>
-            <a:effectLst/>
-          </p:spPr>
-          <p:style>
-            <a:lnRef idx="1">
-              <a:schemeClr val="accent1"/>
-            </a:lnRef>
-            <a:fillRef idx="3">
-              <a:schemeClr val="accent1"/>
-            </a:fillRef>
-            <a:effectRef idx="2">
-              <a:schemeClr val="accent1"/>
-            </a:effectRef>
-            <a:fontRef idx="minor">
-              <a:schemeClr val="lt1"/>
-            </a:fontRef>
-          </p:style>
-        </p:sp>
-        <p:sp>
-          <p:nvSpPr>
-            <p:cNvPr id="31" name="Isosceles Triangle 30"/>
-            <p:cNvSpPr/>
-            <p:nvPr/>
-          </p:nvSpPr>
-          <p:spPr>
-            <a:xfrm>
-              <a:off x="10371666" y="3589867"/>
-              <a:ext cx="1817159" cy="3268133"/>
-            </a:xfrm>
-            <a:prstGeom prst="triangle">
-              <a:avLst>
-                <a:gd name="adj" fmla="val 100000"/>
-              </a:avLst>
-            </a:prstGeom>
-            <a:solidFill>
-              <a:schemeClr val="accent1">
-                <a:alpha val="80000"/>
-              </a:schemeClr>
-            </a:solidFill>
-            <a:ln>
-              <a:noFill/>
-            </a:ln>
-            <a:effectLst/>
-          </p:spPr>
-          <p:style>
-            <a:lnRef idx="1">
-              <a:schemeClr val="accent1"/>
-            </a:lnRef>
-            <a:fillRef idx="3">
-              <a:schemeClr val="accent1"/>
-            </a:fillRef>
-            <a:effectRef idx="2">
-              <a:schemeClr val="accent1"/>
-            </a:effectRef>
-            <a:fontRef idx="minor">
-              <a:schemeClr val="lt1"/>
-            </a:fontRef>
-          </p:style>
-        </p:sp>
-        <p:sp>
-          <p:nvSpPr>
-            <p:cNvPr id="19" name="Isosceles Triangle 18"/>
-            <p:cNvSpPr/>
-            <p:nvPr/>
-          </p:nvSpPr>
-          <p:spPr>
-            <a:xfrm rot="10800000">
-              <a:off x="0" y="0"/>
-              <a:ext cx="842596" cy="5666154"/>
-            </a:xfrm>
-            <a:prstGeom prst="triangle">
-              <a:avLst>
-                <a:gd name="adj" fmla="val 100000"/>
-              </a:avLst>
-            </a:prstGeom>
-            <a:solidFill>
-              <a:schemeClr val="accent1">
-                <a:alpha val="85000"/>
-              </a:schemeClr>
-            </a:solidFill>
-            <a:ln>
-              <a:noFill/>
-            </a:ln>
-            <a:effectLst/>
-          </p:spPr>
-          <p:style>
-            <a:lnRef idx="1">
-              <a:schemeClr val="accent1"/>
-            </a:lnRef>
-            <a:fillRef idx="3">
-              <a:schemeClr val="accent1"/>
-            </a:fillRef>
-            <a:effectRef idx="2">
-              <a:schemeClr val="accent1"/>
-            </a:effectRef>
-            <a:fontRef idx="minor">
-              <a:schemeClr val="lt1"/>
-            </a:fontRef>
-          </p:style>
-        </p:sp>
-      </p:grpSp>
-      <p:sp>
-        <p:nvSpPr>
-          <p:cNvPr id="2" name="Title 1"/>
+      <p:sp>
+        <p:nvSpPr>
+          <p:cNvPr id="2" name="제목 1"/>
           <p:cNvSpPr>
             <a:spLocks noGrp="1"/>
           </p:cNvSpPr>
@@ -679,21 +149,15 @@
         </p:nvSpPr>
         <p:spPr>
           <a:xfrm>
-            <a:off x="1507067" y="2404534"/>
-            <a:ext cx="7766936" cy="1646302"/>
-          </a:xfrm>
-        </p:spPr>
-        <p:txBody>
-          <a:bodyPr anchor="b">
-            <a:noAutofit/>
-          </a:bodyPr>
+            <a:off x="1524000" y="1122363"/>
+            <a:ext cx="9144000" cy="2387600"/>
+          </a:xfrm>
+        </p:spPr>
+        <p:txBody>
+          <a:bodyPr anchor="b"/>
           <a:lstStyle>
-            <a:lvl1pPr algn="r">
-              <a:defRPr sz="5400">
-                <a:solidFill>
-                  <a:schemeClr val="accent1"/>
-                </a:solidFill>
-              </a:defRPr>
+            <a:lvl1pPr algn="ctr">
+              <a:defRPr sz="6000"/>
             </a:lvl1pPr>
           </a:lstStyle>
           <a:p>
@@ -701,13 +165,13 @@
               <a:rPr lang="ko-KR" altLang="en-US" smtClean="0"/>
               <a:t>마스터 제목 스타일 편집</a:t>
             </a:r>
-            <a:endParaRPr lang="en-US" dirty="0"/>
-          </a:p>
-        </p:txBody>
-      </p:sp>
-      <p:sp>
-        <p:nvSpPr>
-          <p:cNvPr id="3" name="Subtitle 2"/>
+            <a:endParaRPr lang="ko-KR" altLang="en-US"/>
+          </a:p>
+        </p:txBody>
+      </p:sp>
+      <p:sp>
+        <p:nvSpPr>
+          <p:cNvPr id="3" name="부제목 2"/>
           <p:cNvSpPr>
             <a:spLocks noGrp="1"/>
           </p:cNvSpPr>
@@ -717,103 +181,48 @@
         </p:nvSpPr>
         <p:spPr>
           <a:xfrm>
-            <a:off x="1507067" y="4050833"/>
-            <a:ext cx="7766936" cy="1096899"/>
-          </a:xfrm>
-        </p:spPr>
-        <p:txBody>
-          <a:bodyPr anchor="t"/>
+            <a:off x="1524000" y="3602038"/>
+            <a:ext cx="9144000" cy="1655762"/>
+          </a:xfrm>
+        </p:spPr>
+        <p:txBody>
+          <a:bodyPr/>
           <a:lstStyle>
-            <a:lvl1pPr marL="0" indent="0" algn="r">
-              <a:buNone/>
-              <a:defRPr>
-                <a:solidFill>
-                  <a:schemeClr val="tx1">
-                    <a:lumMod val="50000"/>
-                    <a:lumOff val="50000"/>
-                  </a:schemeClr>
-                </a:solidFill>
-              </a:defRPr>
+            <a:lvl1pPr marL="0" indent="0" algn="ctr">
+              <a:buNone/>
+              <a:defRPr sz="2400"/>
             </a:lvl1pPr>
             <a:lvl2pPr marL="457200" indent="0" algn="ctr">
               <a:buNone/>
-              <a:defRPr>
-                <a:solidFill>
-                  <a:schemeClr val="tx1">
-                    <a:tint val="75000"/>
-                  </a:schemeClr>
-                </a:solidFill>
-              </a:defRPr>
+              <a:defRPr sz="2000"/>
             </a:lvl2pPr>
             <a:lvl3pPr marL="914400" indent="0" algn="ctr">
               <a:buNone/>
-              <a:defRPr>
-                <a:solidFill>
-                  <a:schemeClr val="tx1">
-                    <a:tint val="75000"/>
-                  </a:schemeClr>
-                </a:solidFill>
-              </a:defRPr>
+              <a:defRPr sz="1800"/>
             </a:lvl3pPr>
             <a:lvl4pPr marL="1371600" indent="0" algn="ctr">
               <a:buNone/>
-              <a:defRPr>
-                <a:solidFill>
-                  <a:schemeClr val="tx1">
-                    <a:tint val="75000"/>
-                  </a:schemeClr>
-                </a:solidFill>
-              </a:defRPr>
+              <a:defRPr sz="1600"/>
             </a:lvl4pPr>
             <a:lvl5pPr marL="1828800" indent="0" algn="ctr">
               <a:buNone/>
-              <a:defRPr>
-                <a:solidFill>
-                  <a:schemeClr val="tx1">
-                    <a:tint val="75000"/>
-                  </a:schemeClr>
-                </a:solidFill>
-              </a:defRPr>
+              <a:defRPr sz="1600"/>
             </a:lvl5pPr>
             <a:lvl6pPr marL="2286000" indent="0" algn="ctr">
               <a:buNone/>
-              <a:defRPr>
-                <a:solidFill>
-                  <a:schemeClr val="tx1">
-                    <a:tint val="75000"/>
-                  </a:schemeClr>
-                </a:solidFill>
-              </a:defRPr>
+              <a:defRPr sz="1600"/>
             </a:lvl6pPr>
             <a:lvl7pPr marL="2743200" indent="0" algn="ctr">
               <a:buNone/>
-              <a:defRPr>
-                <a:solidFill>
-                  <a:schemeClr val="tx1">
-                    <a:tint val="75000"/>
-                  </a:schemeClr>
-                </a:solidFill>
-              </a:defRPr>
+              <a:defRPr sz="1600"/>
             </a:lvl7pPr>
             <a:lvl8pPr marL="3200400" indent="0" algn="ctr">
               <a:buNone/>
-              <a:defRPr>
-                <a:solidFill>
-                  <a:schemeClr val="tx1">
-                    <a:tint val="75000"/>
-                  </a:schemeClr>
-                </a:solidFill>
-              </a:defRPr>
+              <a:defRPr sz="1600"/>
             </a:lvl8pPr>
             <a:lvl9pPr marL="3657600" indent="0" algn="ctr">
               <a:buNone/>
-              <a:defRPr>
-                <a:solidFill>
-                  <a:schemeClr val="tx1">
-                    <a:tint val="75000"/>
-                  </a:schemeClr>
-                </a:solidFill>
-              </a:defRPr>
+              <a:defRPr sz="1600"/>
             </a:lvl9pPr>
           </a:lstStyle>
           <a:p>
@@ -821,13 +230,13 @@
               <a:rPr lang="ko-KR" altLang="en-US" smtClean="0"/>
               <a:t>마스터 부제목 스타일 편집</a:t>
             </a:r>
-            <a:endParaRPr lang="en-US" dirty="0"/>
-          </a:p>
-        </p:txBody>
-      </p:sp>
-      <p:sp>
-        <p:nvSpPr>
-          <p:cNvPr id="4" name="Date Placeholder 3"/>
+            <a:endParaRPr lang="ko-KR" altLang="en-US"/>
+          </a:p>
+        </p:txBody>
+      </p:sp>
+      <p:sp>
+        <p:nvSpPr>
+          <p:cNvPr id="4" name="날짜 개체 틀 3"/>
           <p:cNvSpPr>
             <a:spLocks noGrp="1"/>
           </p:cNvSpPr>
@@ -850,7 +259,7 @@
       </p:sp>
       <p:sp>
         <p:nvSpPr>
-          <p:cNvPr id="5" name="Footer Placeholder 4"/>
+          <p:cNvPr id="5" name="바닥글 개체 틀 4"/>
           <p:cNvSpPr>
             <a:spLocks noGrp="1"/>
           </p:cNvSpPr>
@@ -869,7 +278,7 @@
       </p:sp>
       <p:sp>
         <p:nvSpPr>
-          <p:cNvPr id="6" name="Slide Number Placeholder 5"/>
+          <p:cNvPr id="6" name="슬라이드 번호 개체 틀 5"/>
           <p:cNvSpPr>
             <a:spLocks noGrp="1"/>
           </p:cNvSpPr>
@@ -893,7 +302,7 @@
     </p:spTree>
     <p:extLst>
       <p:ext uri="{BB962C8B-B14F-4D97-AF65-F5344CB8AC3E}">
-        <p14:creationId xmlns:p14="http://schemas.microsoft.com/office/powerpoint/2010/main" val="3619516713"/>
+        <p14:creationId xmlns:p14="http://schemas.microsoft.com/office/powerpoint/2010/main" val="348473088"/>
       </p:ext>
     </p:extLst>
   </p:cSld>
@@ -904,1619 +313,6 @@
 </file>
 
 <file path=ppt/slideLayouts/slideLayout10.xml><?xml version="1.0" encoding="utf-8"?>
-<p:sldLayout xmlns:a="http://schemas.openxmlformats.org/drawingml/2006/main" xmlns:r="http://schemas.openxmlformats.org/officeDocument/2006/relationships" xmlns:p="http://schemas.openxmlformats.org/presentationml/2006/main" preserve="1">
-  <p:cSld name="제목 및 캡션">
-    <p:spTree>
-      <p:nvGrpSpPr>
-        <p:cNvPr id="1" name=""/>
-        <p:cNvGrpSpPr/>
-        <p:nvPr/>
-      </p:nvGrpSpPr>
-      <p:grpSpPr>
-        <a:xfrm>
-          <a:off x="0" y="0"/>
-          <a:ext cx="0" cy="0"/>
-          <a:chOff x="0" y="0"/>
-          <a:chExt cx="0" cy="0"/>
-        </a:xfrm>
-      </p:grpSpPr>
-      <p:sp>
-        <p:nvSpPr>
-          <p:cNvPr id="2" name="Title 1"/>
-          <p:cNvSpPr>
-            <a:spLocks noGrp="1"/>
-          </p:cNvSpPr>
-          <p:nvPr>
-            <p:ph type="title"/>
-          </p:nvPr>
-        </p:nvSpPr>
-        <p:spPr>
-          <a:xfrm>
-            <a:off x="677335" y="609600"/>
-            <a:ext cx="8596668" cy="3403600"/>
-          </a:xfrm>
-        </p:spPr>
-        <p:txBody>
-          <a:bodyPr anchor="ctr">
-            <a:normAutofit/>
-          </a:bodyPr>
-          <a:lstStyle>
-            <a:lvl1pPr algn="l">
-              <a:defRPr sz="4400" b="0" cap="none"/>
-            </a:lvl1pPr>
-          </a:lstStyle>
-          <a:p>
-            <a:r>
-              <a:rPr lang="ko-KR" altLang="en-US" smtClean="0"/>
-              <a:t>마스터 제목 스타일 편집</a:t>
-            </a:r>
-            <a:endParaRPr lang="en-US" dirty="0"/>
-          </a:p>
-        </p:txBody>
-      </p:sp>
-      <p:sp>
-        <p:nvSpPr>
-          <p:cNvPr id="3" name="Text Placeholder 2"/>
-          <p:cNvSpPr>
-            <a:spLocks noGrp="1"/>
-          </p:cNvSpPr>
-          <p:nvPr>
-            <p:ph type="body" idx="1"/>
-          </p:nvPr>
-        </p:nvSpPr>
-        <p:spPr>
-          <a:xfrm>
-            <a:off x="677335" y="4470400"/>
-            <a:ext cx="8596668" cy="1570962"/>
-          </a:xfrm>
-        </p:spPr>
-        <p:txBody>
-          <a:bodyPr anchor="ctr">
-            <a:normAutofit/>
-          </a:bodyPr>
-          <a:lstStyle>
-            <a:lvl1pPr marL="0" indent="0" algn="l">
-              <a:buNone/>
-              <a:defRPr sz="1800">
-                <a:solidFill>
-                  <a:schemeClr val="tx1">
-                    <a:lumMod val="75000"/>
-                    <a:lumOff val="25000"/>
-                  </a:schemeClr>
-                </a:solidFill>
-              </a:defRPr>
-            </a:lvl1pPr>
-            <a:lvl2pPr marL="457200" indent="0">
-              <a:buNone/>
-              <a:defRPr sz="1800">
-                <a:solidFill>
-                  <a:schemeClr val="tx1">
-                    <a:tint val="75000"/>
-                  </a:schemeClr>
-                </a:solidFill>
-              </a:defRPr>
-            </a:lvl2pPr>
-            <a:lvl3pPr marL="914400" indent="0">
-              <a:buNone/>
-              <a:defRPr sz="1600">
-                <a:solidFill>
-                  <a:schemeClr val="tx1">
-                    <a:tint val="75000"/>
-                  </a:schemeClr>
-                </a:solidFill>
-              </a:defRPr>
-            </a:lvl3pPr>
-            <a:lvl4pPr marL="1371600" indent="0">
-              <a:buNone/>
-              <a:defRPr sz="1400">
-                <a:solidFill>
-                  <a:schemeClr val="tx1">
-                    <a:tint val="75000"/>
-                  </a:schemeClr>
-                </a:solidFill>
-              </a:defRPr>
-            </a:lvl4pPr>
-            <a:lvl5pPr marL="1828800" indent="0">
-              <a:buNone/>
-              <a:defRPr sz="1400">
-                <a:solidFill>
-                  <a:schemeClr val="tx1">
-                    <a:tint val="75000"/>
-                  </a:schemeClr>
-                </a:solidFill>
-              </a:defRPr>
-            </a:lvl5pPr>
-            <a:lvl6pPr marL="2286000" indent="0">
-              <a:buNone/>
-              <a:defRPr sz="1400">
-                <a:solidFill>
-                  <a:schemeClr val="tx1">
-                    <a:tint val="75000"/>
-                  </a:schemeClr>
-                </a:solidFill>
-              </a:defRPr>
-            </a:lvl6pPr>
-            <a:lvl7pPr marL="2743200" indent="0">
-              <a:buNone/>
-              <a:defRPr sz="1400">
-                <a:solidFill>
-                  <a:schemeClr val="tx1">
-                    <a:tint val="75000"/>
-                  </a:schemeClr>
-                </a:solidFill>
-              </a:defRPr>
-            </a:lvl7pPr>
-            <a:lvl8pPr marL="3200400" indent="0">
-              <a:buNone/>
-              <a:defRPr sz="1400">
-                <a:solidFill>
-                  <a:schemeClr val="tx1">
-                    <a:tint val="75000"/>
-                  </a:schemeClr>
-                </a:solidFill>
-              </a:defRPr>
-            </a:lvl8pPr>
-            <a:lvl9pPr marL="3657600" indent="0">
-              <a:buNone/>
-              <a:defRPr sz="1400">
-                <a:solidFill>
-                  <a:schemeClr val="tx1">
-                    <a:tint val="75000"/>
-                  </a:schemeClr>
-                </a:solidFill>
-              </a:defRPr>
-            </a:lvl9pPr>
-          </a:lstStyle>
-          <a:p>
-            <a:pPr lvl="0"/>
-            <a:r>
-              <a:rPr lang="ko-KR" altLang="en-US" smtClean="0"/>
-              <a:t>마스터 텍스트 스타일을 편집합니다</a:t>
-            </a:r>
-          </a:p>
-        </p:txBody>
-      </p:sp>
-      <p:sp>
-        <p:nvSpPr>
-          <p:cNvPr id="4" name="Date Placeholder 3"/>
-          <p:cNvSpPr>
-            <a:spLocks noGrp="1"/>
-          </p:cNvSpPr>
-          <p:nvPr>
-            <p:ph type="dt" sz="half" idx="10"/>
-          </p:nvPr>
-        </p:nvSpPr>
-        <p:spPr/>
-        <p:txBody>
-          <a:bodyPr/>
-          <a:lstStyle/>
-          <a:p>
-            <a:fld id="{60F77B50-EE59-40FB-9928-DE460C8D4B9F}" type="datetimeFigureOut">
-              <a:rPr lang="ko-KR" altLang="en-US" smtClean="0"/>
-              <a:t>2026-09-19</a:t>
-            </a:fld>
-            <a:endParaRPr lang="ko-KR" altLang="en-US"/>
-          </a:p>
-        </p:txBody>
-      </p:sp>
-      <p:sp>
-        <p:nvSpPr>
-          <p:cNvPr id="5" name="Footer Placeholder 4"/>
-          <p:cNvSpPr>
-            <a:spLocks noGrp="1"/>
-          </p:cNvSpPr>
-          <p:nvPr>
-            <p:ph type="ftr" sz="quarter" idx="11"/>
-          </p:nvPr>
-        </p:nvSpPr>
-        <p:spPr/>
-        <p:txBody>
-          <a:bodyPr/>
-          <a:lstStyle/>
-          <a:p>
-            <a:endParaRPr lang="ko-KR" altLang="en-US"/>
-          </a:p>
-        </p:txBody>
-      </p:sp>
-      <p:sp>
-        <p:nvSpPr>
-          <p:cNvPr id="6" name="Slide Number Placeholder 5"/>
-          <p:cNvSpPr>
-            <a:spLocks noGrp="1"/>
-          </p:cNvSpPr>
-          <p:nvPr>
-            <p:ph type="sldNum" sz="quarter" idx="12"/>
-          </p:nvPr>
-        </p:nvSpPr>
-        <p:spPr/>
-        <p:txBody>
-          <a:bodyPr/>
-          <a:lstStyle/>
-          <a:p>
-            <a:fld id="{0BA6EA0F-63D8-43B8-9C35-B866FC7A579A}" type="slidenum">
-              <a:rPr lang="ko-KR" altLang="en-US" smtClean="0"/>
-              <a:t>‹#›</a:t>
-            </a:fld>
-            <a:endParaRPr lang="ko-KR" altLang="en-US"/>
-          </a:p>
-        </p:txBody>
-      </p:sp>
-    </p:spTree>
-    <p:extLst>
-      <p:ext uri="{BB962C8B-B14F-4D97-AF65-F5344CB8AC3E}">
-        <p14:creationId xmlns:p14="http://schemas.microsoft.com/office/powerpoint/2010/main" val="2708456705"/>
-      </p:ext>
-    </p:extLst>
-  </p:cSld>
-  <p:clrMapOvr>
-    <a:masterClrMapping/>
-  </p:clrMapOvr>
-</p:sldLayout>
-</file>
-
-<file path=ppt/slideLayouts/slideLayout11.xml><?xml version="1.0" encoding="utf-8"?>
-<p:sldLayout xmlns:a="http://schemas.openxmlformats.org/drawingml/2006/main" xmlns:r="http://schemas.openxmlformats.org/officeDocument/2006/relationships" xmlns:p="http://schemas.openxmlformats.org/presentationml/2006/main" preserve="1">
-  <p:cSld name="캡션 있는 인용문">
-    <p:spTree>
-      <p:nvGrpSpPr>
-        <p:cNvPr id="1" name=""/>
-        <p:cNvGrpSpPr/>
-        <p:nvPr/>
-      </p:nvGrpSpPr>
-      <p:grpSpPr>
-        <a:xfrm>
-          <a:off x="0" y="0"/>
-          <a:ext cx="0" cy="0"/>
-          <a:chOff x="0" y="0"/>
-          <a:chExt cx="0" cy="0"/>
-        </a:xfrm>
-      </p:grpSpPr>
-      <p:sp>
-        <p:nvSpPr>
-          <p:cNvPr id="2" name="Title 1"/>
-          <p:cNvSpPr>
-            <a:spLocks noGrp="1"/>
-          </p:cNvSpPr>
-          <p:nvPr>
-            <p:ph type="title"/>
-          </p:nvPr>
-        </p:nvSpPr>
-        <p:spPr>
-          <a:xfrm>
-            <a:off x="931334" y="609600"/>
-            <a:ext cx="8094134" cy="3022600"/>
-          </a:xfrm>
-        </p:spPr>
-        <p:txBody>
-          <a:bodyPr anchor="ctr">
-            <a:normAutofit/>
-          </a:bodyPr>
-          <a:lstStyle>
-            <a:lvl1pPr algn="l">
-              <a:defRPr sz="4400" b="0" cap="none"/>
-            </a:lvl1pPr>
-          </a:lstStyle>
-          <a:p>
-            <a:r>
-              <a:rPr lang="ko-KR" altLang="en-US" smtClean="0"/>
-              <a:t>마스터 제목 스타일 편집</a:t>
-            </a:r>
-            <a:endParaRPr lang="en-US" dirty="0"/>
-          </a:p>
-        </p:txBody>
-      </p:sp>
-      <p:sp>
-        <p:nvSpPr>
-          <p:cNvPr id="23" name="Text Placeholder 9"/>
-          <p:cNvSpPr>
-            <a:spLocks noGrp="1"/>
-          </p:cNvSpPr>
-          <p:nvPr>
-            <p:ph type="body" sz="quarter" idx="13"/>
-          </p:nvPr>
-        </p:nvSpPr>
-        <p:spPr>
-          <a:xfrm>
-            <a:off x="1366139" y="3632200"/>
-            <a:ext cx="7224524" cy="381000"/>
-          </a:xfrm>
-        </p:spPr>
-        <p:txBody>
-          <a:bodyPr anchor="ctr">
-            <a:noAutofit/>
-          </a:bodyPr>
-          <a:lstStyle>
-            <a:lvl1pPr marL="0" indent="0">
-              <a:buFontTx/>
-              <a:buNone/>
-              <a:defRPr sz="1600">
-                <a:solidFill>
-                  <a:schemeClr val="tx1">
-                    <a:lumMod val="50000"/>
-                    <a:lumOff val="50000"/>
-                  </a:schemeClr>
-                </a:solidFill>
-              </a:defRPr>
-            </a:lvl1pPr>
-            <a:lvl2pPr marL="457200" indent="0">
-              <a:buFontTx/>
-              <a:buNone/>
-              <a:defRPr/>
-            </a:lvl2pPr>
-            <a:lvl3pPr marL="914400" indent="0">
-              <a:buFontTx/>
-              <a:buNone/>
-              <a:defRPr/>
-            </a:lvl3pPr>
-            <a:lvl4pPr marL="1371600" indent="0">
-              <a:buFontTx/>
-              <a:buNone/>
-              <a:defRPr/>
-            </a:lvl4pPr>
-            <a:lvl5pPr marL="1828800" indent="0">
-              <a:buFontTx/>
-              <a:buNone/>
-              <a:defRPr/>
-            </a:lvl5pPr>
-          </a:lstStyle>
-          <a:p>
-            <a:pPr lvl="0"/>
-            <a:r>
-              <a:rPr lang="ko-KR" altLang="en-US" smtClean="0"/>
-              <a:t>마스터 텍스트 스타일을 편집합니다</a:t>
-            </a:r>
-          </a:p>
-        </p:txBody>
-      </p:sp>
-      <p:sp>
-        <p:nvSpPr>
-          <p:cNvPr id="3" name="Text Placeholder 2"/>
-          <p:cNvSpPr>
-            <a:spLocks noGrp="1"/>
-          </p:cNvSpPr>
-          <p:nvPr>
-            <p:ph type="body" idx="1"/>
-          </p:nvPr>
-        </p:nvSpPr>
-        <p:spPr>
-          <a:xfrm>
-            <a:off x="677335" y="4470400"/>
-            <a:ext cx="8596668" cy="1570962"/>
-          </a:xfrm>
-        </p:spPr>
-        <p:txBody>
-          <a:bodyPr anchor="ctr">
-            <a:normAutofit/>
-          </a:bodyPr>
-          <a:lstStyle>
-            <a:lvl1pPr marL="0" indent="0" algn="l">
-              <a:buNone/>
-              <a:defRPr sz="1800">
-                <a:solidFill>
-                  <a:schemeClr val="tx1">
-                    <a:lumMod val="75000"/>
-                    <a:lumOff val="25000"/>
-                  </a:schemeClr>
-                </a:solidFill>
-              </a:defRPr>
-            </a:lvl1pPr>
-            <a:lvl2pPr marL="457200" indent="0">
-              <a:buNone/>
-              <a:defRPr sz="1800">
-                <a:solidFill>
-                  <a:schemeClr val="tx1">
-                    <a:tint val="75000"/>
-                  </a:schemeClr>
-                </a:solidFill>
-              </a:defRPr>
-            </a:lvl2pPr>
-            <a:lvl3pPr marL="914400" indent="0">
-              <a:buNone/>
-              <a:defRPr sz="1600">
-                <a:solidFill>
-                  <a:schemeClr val="tx1">
-                    <a:tint val="75000"/>
-                  </a:schemeClr>
-                </a:solidFill>
-              </a:defRPr>
-            </a:lvl3pPr>
-            <a:lvl4pPr marL="1371600" indent="0">
-              <a:buNone/>
-              <a:defRPr sz="1400">
-                <a:solidFill>
-                  <a:schemeClr val="tx1">
-                    <a:tint val="75000"/>
-                  </a:schemeClr>
-                </a:solidFill>
-              </a:defRPr>
-            </a:lvl4pPr>
-            <a:lvl5pPr marL="1828800" indent="0">
-              <a:buNone/>
-              <a:defRPr sz="1400">
-                <a:solidFill>
-                  <a:schemeClr val="tx1">
-                    <a:tint val="75000"/>
-                  </a:schemeClr>
-                </a:solidFill>
-              </a:defRPr>
-            </a:lvl5pPr>
-            <a:lvl6pPr marL="2286000" indent="0">
-              <a:buNone/>
-              <a:defRPr sz="1400">
-                <a:solidFill>
-                  <a:schemeClr val="tx1">
-                    <a:tint val="75000"/>
-                  </a:schemeClr>
-                </a:solidFill>
-              </a:defRPr>
-            </a:lvl6pPr>
-            <a:lvl7pPr marL="2743200" indent="0">
-              <a:buNone/>
-              <a:defRPr sz="1400">
-                <a:solidFill>
-                  <a:schemeClr val="tx1">
-                    <a:tint val="75000"/>
-                  </a:schemeClr>
-                </a:solidFill>
-              </a:defRPr>
-            </a:lvl7pPr>
-            <a:lvl8pPr marL="3200400" indent="0">
-              <a:buNone/>
-              <a:defRPr sz="1400">
-                <a:solidFill>
-                  <a:schemeClr val="tx1">
-                    <a:tint val="75000"/>
-                  </a:schemeClr>
-                </a:solidFill>
-              </a:defRPr>
-            </a:lvl8pPr>
-            <a:lvl9pPr marL="3657600" indent="0">
-              <a:buNone/>
-              <a:defRPr sz="1400">
-                <a:solidFill>
-                  <a:schemeClr val="tx1">
-                    <a:tint val="75000"/>
-                  </a:schemeClr>
-                </a:solidFill>
-              </a:defRPr>
-            </a:lvl9pPr>
-          </a:lstStyle>
-          <a:p>
-            <a:pPr lvl="0"/>
-            <a:r>
-              <a:rPr lang="ko-KR" altLang="en-US" smtClean="0"/>
-              <a:t>마스터 텍스트 스타일을 편집합니다</a:t>
-            </a:r>
-          </a:p>
-        </p:txBody>
-      </p:sp>
-      <p:sp>
-        <p:nvSpPr>
-          <p:cNvPr id="4" name="Date Placeholder 3"/>
-          <p:cNvSpPr>
-            <a:spLocks noGrp="1"/>
-          </p:cNvSpPr>
-          <p:nvPr>
-            <p:ph type="dt" sz="half" idx="10"/>
-          </p:nvPr>
-        </p:nvSpPr>
-        <p:spPr/>
-        <p:txBody>
-          <a:bodyPr/>
-          <a:lstStyle/>
-          <a:p>
-            <a:fld id="{60F77B50-EE59-40FB-9928-DE460C8D4B9F}" type="datetimeFigureOut">
-              <a:rPr lang="ko-KR" altLang="en-US" smtClean="0"/>
-              <a:t>2026-09-19</a:t>
-            </a:fld>
-            <a:endParaRPr lang="ko-KR" altLang="en-US"/>
-          </a:p>
-        </p:txBody>
-      </p:sp>
-      <p:sp>
-        <p:nvSpPr>
-          <p:cNvPr id="5" name="Footer Placeholder 4"/>
-          <p:cNvSpPr>
-            <a:spLocks noGrp="1"/>
-          </p:cNvSpPr>
-          <p:nvPr>
-            <p:ph type="ftr" sz="quarter" idx="11"/>
-          </p:nvPr>
-        </p:nvSpPr>
-        <p:spPr/>
-        <p:txBody>
-          <a:bodyPr/>
-          <a:lstStyle/>
-          <a:p>
-            <a:endParaRPr lang="ko-KR" altLang="en-US"/>
-          </a:p>
-        </p:txBody>
-      </p:sp>
-      <p:sp>
-        <p:nvSpPr>
-          <p:cNvPr id="6" name="Slide Number Placeholder 5"/>
-          <p:cNvSpPr>
-            <a:spLocks noGrp="1"/>
-          </p:cNvSpPr>
-          <p:nvPr>
-            <p:ph type="sldNum" sz="quarter" idx="12"/>
-          </p:nvPr>
-        </p:nvSpPr>
-        <p:spPr/>
-        <p:txBody>
-          <a:bodyPr/>
-          <a:lstStyle/>
-          <a:p>
-            <a:fld id="{0BA6EA0F-63D8-43B8-9C35-B866FC7A579A}" type="slidenum">
-              <a:rPr lang="ko-KR" altLang="en-US" smtClean="0"/>
-              <a:t>‹#›</a:t>
-            </a:fld>
-            <a:endParaRPr lang="ko-KR" altLang="en-US"/>
-          </a:p>
-        </p:txBody>
-      </p:sp>
-      <p:sp>
-        <p:nvSpPr>
-          <p:cNvPr id="20" name="TextBox 19"/>
-          <p:cNvSpPr txBox="1"/>
-          <p:nvPr/>
-        </p:nvSpPr>
-        <p:spPr>
-          <a:xfrm>
-            <a:off x="541870" y="790378"/>
-            <a:ext cx="609600" cy="584776"/>
-          </a:xfrm>
-          <a:prstGeom prst="rect">
-            <a:avLst/>
-          </a:prstGeom>
-        </p:spPr>
-        <p:txBody>
-          <a:bodyPr vert="horz" lIns="91440" tIns="45720" rIns="91440" bIns="45720" rtlCol="0" anchor="ctr">
-            <a:noAutofit/>
-          </a:bodyPr>
-          <a:lstStyle/>
-          <a:p>
-            <a:pPr lvl="0"/>
-            <a:r>
-              <a:rPr lang="en-US" sz="8000" baseline="0" dirty="0">
-                <a:ln w="3175" cmpd="sng">
-                  <a:noFill/>
-                </a:ln>
-                <a:solidFill>
-                  <a:schemeClr val="accent1">
-                    <a:lumMod val="60000"/>
-                    <a:lumOff val="40000"/>
-                  </a:schemeClr>
-                </a:solidFill>
-                <a:effectLst/>
-                <a:latin typeface="Arial"/>
-              </a:rPr>
-              <a:t>“</a:t>
-            </a:r>
-          </a:p>
-        </p:txBody>
-      </p:sp>
-      <p:sp>
-        <p:nvSpPr>
-          <p:cNvPr id="22" name="TextBox 21"/>
-          <p:cNvSpPr txBox="1"/>
-          <p:nvPr/>
-        </p:nvSpPr>
-        <p:spPr>
-          <a:xfrm>
-            <a:off x="8893011" y="2886556"/>
-            <a:ext cx="609600" cy="584776"/>
-          </a:xfrm>
-          <a:prstGeom prst="rect">
-            <a:avLst/>
-          </a:prstGeom>
-        </p:spPr>
-        <p:txBody>
-          <a:bodyPr vert="horz" lIns="91440" tIns="45720" rIns="91440" bIns="45720" rtlCol="0" anchor="ctr">
-            <a:noAutofit/>
-          </a:bodyPr>
-          <a:lstStyle/>
-          <a:p>
-            <a:pPr lvl="0"/>
-            <a:r>
-              <a:rPr lang="en-US" sz="8000" baseline="0" dirty="0">
-                <a:ln w="3175" cmpd="sng">
-                  <a:noFill/>
-                </a:ln>
-                <a:solidFill>
-                  <a:schemeClr val="accent1">
-                    <a:lumMod val="60000"/>
-                    <a:lumOff val="40000"/>
-                  </a:schemeClr>
-                </a:solidFill>
-                <a:latin typeface="Arial"/>
-              </a:rPr>
-              <a:t>”</a:t>
-            </a:r>
-            <a:endParaRPr lang="en-US" dirty="0">
-              <a:solidFill>
-                <a:schemeClr val="accent1">
-                  <a:lumMod val="60000"/>
-                  <a:lumOff val="40000"/>
-                </a:schemeClr>
-              </a:solidFill>
-              <a:latin typeface="Arial"/>
-            </a:endParaRPr>
-          </a:p>
-        </p:txBody>
-      </p:sp>
-    </p:spTree>
-    <p:extLst>
-      <p:ext uri="{BB962C8B-B14F-4D97-AF65-F5344CB8AC3E}">
-        <p14:creationId xmlns:p14="http://schemas.microsoft.com/office/powerpoint/2010/main" val="3497958357"/>
-      </p:ext>
-    </p:extLst>
-  </p:cSld>
-  <p:clrMapOvr>
-    <a:masterClrMapping/>
-  </p:clrMapOvr>
-</p:sldLayout>
-</file>
-
-<file path=ppt/slideLayouts/slideLayout12.xml><?xml version="1.0" encoding="utf-8"?>
-<p:sldLayout xmlns:a="http://schemas.openxmlformats.org/drawingml/2006/main" xmlns:r="http://schemas.openxmlformats.org/officeDocument/2006/relationships" xmlns:p="http://schemas.openxmlformats.org/presentationml/2006/main" preserve="1">
-  <p:cSld name="명함">
-    <p:spTree>
-      <p:nvGrpSpPr>
-        <p:cNvPr id="1" name=""/>
-        <p:cNvGrpSpPr/>
-        <p:nvPr/>
-      </p:nvGrpSpPr>
-      <p:grpSpPr>
-        <a:xfrm>
-          <a:off x="0" y="0"/>
-          <a:ext cx="0" cy="0"/>
-          <a:chOff x="0" y="0"/>
-          <a:chExt cx="0" cy="0"/>
-        </a:xfrm>
-      </p:grpSpPr>
-      <p:sp>
-        <p:nvSpPr>
-          <p:cNvPr id="2" name="Title 1"/>
-          <p:cNvSpPr>
-            <a:spLocks noGrp="1"/>
-          </p:cNvSpPr>
-          <p:nvPr>
-            <p:ph type="title"/>
-          </p:nvPr>
-        </p:nvSpPr>
-        <p:spPr>
-          <a:xfrm>
-            <a:off x="677335" y="1931988"/>
-            <a:ext cx="8596668" cy="2595460"/>
-          </a:xfrm>
-        </p:spPr>
-        <p:txBody>
-          <a:bodyPr anchor="b">
-            <a:normAutofit/>
-          </a:bodyPr>
-          <a:lstStyle>
-            <a:lvl1pPr algn="l">
-              <a:defRPr sz="4400" b="0" cap="none"/>
-            </a:lvl1pPr>
-          </a:lstStyle>
-          <a:p>
-            <a:r>
-              <a:rPr lang="ko-KR" altLang="en-US" smtClean="0"/>
-              <a:t>마스터 제목 스타일 편집</a:t>
-            </a:r>
-            <a:endParaRPr lang="en-US" dirty="0"/>
-          </a:p>
-        </p:txBody>
-      </p:sp>
-      <p:sp>
-        <p:nvSpPr>
-          <p:cNvPr id="3" name="Text Placeholder 2"/>
-          <p:cNvSpPr>
-            <a:spLocks noGrp="1"/>
-          </p:cNvSpPr>
-          <p:nvPr>
-            <p:ph type="body" idx="1"/>
-          </p:nvPr>
-        </p:nvSpPr>
-        <p:spPr>
-          <a:xfrm>
-            <a:off x="677335" y="4527448"/>
-            <a:ext cx="8596668" cy="1513914"/>
-          </a:xfrm>
-        </p:spPr>
-        <p:txBody>
-          <a:bodyPr anchor="t">
-            <a:normAutofit/>
-          </a:bodyPr>
-          <a:lstStyle>
-            <a:lvl1pPr marL="0" indent="0" algn="l">
-              <a:buNone/>
-              <a:defRPr sz="1800">
-                <a:solidFill>
-                  <a:schemeClr val="tx1">
-                    <a:lumMod val="75000"/>
-                    <a:lumOff val="25000"/>
-                  </a:schemeClr>
-                </a:solidFill>
-              </a:defRPr>
-            </a:lvl1pPr>
-            <a:lvl2pPr marL="457200" indent="0">
-              <a:buNone/>
-              <a:defRPr sz="1800">
-                <a:solidFill>
-                  <a:schemeClr val="tx1">
-                    <a:tint val="75000"/>
-                  </a:schemeClr>
-                </a:solidFill>
-              </a:defRPr>
-            </a:lvl2pPr>
-            <a:lvl3pPr marL="914400" indent="0">
-              <a:buNone/>
-              <a:defRPr sz="1600">
-                <a:solidFill>
-                  <a:schemeClr val="tx1">
-                    <a:tint val="75000"/>
-                  </a:schemeClr>
-                </a:solidFill>
-              </a:defRPr>
-            </a:lvl3pPr>
-            <a:lvl4pPr marL="1371600" indent="0">
-              <a:buNone/>
-              <a:defRPr sz="1400">
-                <a:solidFill>
-                  <a:schemeClr val="tx1">
-                    <a:tint val="75000"/>
-                  </a:schemeClr>
-                </a:solidFill>
-              </a:defRPr>
-            </a:lvl4pPr>
-            <a:lvl5pPr marL="1828800" indent="0">
-              <a:buNone/>
-              <a:defRPr sz="1400">
-                <a:solidFill>
-                  <a:schemeClr val="tx1">
-                    <a:tint val="75000"/>
-                  </a:schemeClr>
-                </a:solidFill>
-              </a:defRPr>
-            </a:lvl5pPr>
-            <a:lvl6pPr marL="2286000" indent="0">
-              <a:buNone/>
-              <a:defRPr sz="1400">
-                <a:solidFill>
-                  <a:schemeClr val="tx1">
-                    <a:tint val="75000"/>
-                  </a:schemeClr>
-                </a:solidFill>
-              </a:defRPr>
-            </a:lvl6pPr>
-            <a:lvl7pPr marL="2743200" indent="0">
-              <a:buNone/>
-              <a:defRPr sz="1400">
-                <a:solidFill>
-                  <a:schemeClr val="tx1">
-                    <a:tint val="75000"/>
-                  </a:schemeClr>
-                </a:solidFill>
-              </a:defRPr>
-            </a:lvl7pPr>
-            <a:lvl8pPr marL="3200400" indent="0">
-              <a:buNone/>
-              <a:defRPr sz="1400">
-                <a:solidFill>
-                  <a:schemeClr val="tx1">
-                    <a:tint val="75000"/>
-                  </a:schemeClr>
-                </a:solidFill>
-              </a:defRPr>
-            </a:lvl8pPr>
-            <a:lvl9pPr marL="3657600" indent="0">
-              <a:buNone/>
-              <a:defRPr sz="1400">
-                <a:solidFill>
-                  <a:schemeClr val="tx1">
-                    <a:tint val="75000"/>
-                  </a:schemeClr>
-                </a:solidFill>
-              </a:defRPr>
-            </a:lvl9pPr>
-          </a:lstStyle>
-          <a:p>
-            <a:pPr lvl="0"/>
-            <a:r>
-              <a:rPr lang="ko-KR" altLang="en-US" smtClean="0"/>
-              <a:t>마스터 텍스트 스타일을 편집합니다</a:t>
-            </a:r>
-          </a:p>
-        </p:txBody>
-      </p:sp>
-      <p:sp>
-        <p:nvSpPr>
-          <p:cNvPr id="4" name="Date Placeholder 3"/>
-          <p:cNvSpPr>
-            <a:spLocks noGrp="1"/>
-          </p:cNvSpPr>
-          <p:nvPr>
-            <p:ph type="dt" sz="half" idx="10"/>
-          </p:nvPr>
-        </p:nvSpPr>
-        <p:spPr/>
-        <p:txBody>
-          <a:bodyPr/>
-          <a:lstStyle/>
-          <a:p>
-            <a:fld id="{60F77B50-EE59-40FB-9928-DE460C8D4B9F}" type="datetimeFigureOut">
-              <a:rPr lang="ko-KR" altLang="en-US" smtClean="0"/>
-              <a:t>2026-09-19</a:t>
-            </a:fld>
-            <a:endParaRPr lang="ko-KR" altLang="en-US"/>
-          </a:p>
-        </p:txBody>
-      </p:sp>
-      <p:sp>
-        <p:nvSpPr>
-          <p:cNvPr id="5" name="Footer Placeholder 4"/>
-          <p:cNvSpPr>
-            <a:spLocks noGrp="1"/>
-          </p:cNvSpPr>
-          <p:nvPr>
-            <p:ph type="ftr" sz="quarter" idx="11"/>
-          </p:nvPr>
-        </p:nvSpPr>
-        <p:spPr/>
-        <p:txBody>
-          <a:bodyPr/>
-          <a:lstStyle/>
-          <a:p>
-            <a:endParaRPr lang="ko-KR" altLang="en-US"/>
-          </a:p>
-        </p:txBody>
-      </p:sp>
-      <p:sp>
-        <p:nvSpPr>
-          <p:cNvPr id="6" name="Slide Number Placeholder 5"/>
-          <p:cNvSpPr>
-            <a:spLocks noGrp="1"/>
-          </p:cNvSpPr>
-          <p:nvPr>
-            <p:ph type="sldNum" sz="quarter" idx="12"/>
-          </p:nvPr>
-        </p:nvSpPr>
-        <p:spPr/>
-        <p:txBody>
-          <a:bodyPr/>
-          <a:lstStyle/>
-          <a:p>
-            <a:fld id="{0BA6EA0F-63D8-43B8-9C35-B866FC7A579A}" type="slidenum">
-              <a:rPr lang="ko-KR" altLang="en-US" smtClean="0"/>
-              <a:t>‹#›</a:t>
-            </a:fld>
-            <a:endParaRPr lang="ko-KR" altLang="en-US"/>
-          </a:p>
-        </p:txBody>
-      </p:sp>
-    </p:spTree>
-    <p:extLst>
-      <p:ext uri="{BB962C8B-B14F-4D97-AF65-F5344CB8AC3E}">
-        <p14:creationId xmlns:p14="http://schemas.microsoft.com/office/powerpoint/2010/main" val="3072404835"/>
-      </p:ext>
-    </p:extLst>
-  </p:cSld>
-  <p:clrMapOvr>
-    <a:masterClrMapping/>
-  </p:clrMapOvr>
-</p:sldLayout>
-</file>
-
-<file path=ppt/slideLayouts/slideLayout13.xml><?xml version="1.0" encoding="utf-8"?>
-<p:sldLayout xmlns:a="http://schemas.openxmlformats.org/drawingml/2006/main" xmlns:r="http://schemas.openxmlformats.org/officeDocument/2006/relationships" xmlns:p="http://schemas.openxmlformats.org/presentationml/2006/main" preserve="1">
-  <p:cSld name="인용문 있는 명함">
-    <p:spTree>
-      <p:nvGrpSpPr>
-        <p:cNvPr id="1" name=""/>
-        <p:cNvGrpSpPr/>
-        <p:nvPr/>
-      </p:nvGrpSpPr>
-      <p:grpSpPr>
-        <a:xfrm>
-          <a:off x="0" y="0"/>
-          <a:ext cx="0" cy="0"/>
-          <a:chOff x="0" y="0"/>
-          <a:chExt cx="0" cy="0"/>
-        </a:xfrm>
-      </p:grpSpPr>
-      <p:sp>
-        <p:nvSpPr>
-          <p:cNvPr id="2" name="Title 1"/>
-          <p:cNvSpPr>
-            <a:spLocks noGrp="1"/>
-          </p:cNvSpPr>
-          <p:nvPr>
-            <p:ph type="title"/>
-          </p:nvPr>
-        </p:nvSpPr>
-        <p:spPr>
-          <a:xfrm>
-            <a:off x="931334" y="609600"/>
-            <a:ext cx="8094134" cy="3022600"/>
-          </a:xfrm>
-        </p:spPr>
-        <p:txBody>
-          <a:bodyPr anchor="ctr">
-            <a:normAutofit/>
-          </a:bodyPr>
-          <a:lstStyle>
-            <a:lvl1pPr algn="l">
-              <a:defRPr sz="4400" b="0" cap="none"/>
-            </a:lvl1pPr>
-          </a:lstStyle>
-          <a:p>
-            <a:r>
-              <a:rPr lang="ko-KR" altLang="en-US" smtClean="0"/>
-              <a:t>마스터 제목 스타일 편집</a:t>
-            </a:r>
-            <a:endParaRPr lang="en-US" dirty="0"/>
-          </a:p>
-        </p:txBody>
-      </p:sp>
-      <p:sp>
-        <p:nvSpPr>
-          <p:cNvPr id="23" name="Text Placeholder 9"/>
-          <p:cNvSpPr>
-            <a:spLocks noGrp="1"/>
-          </p:cNvSpPr>
-          <p:nvPr>
-            <p:ph type="body" sz="quarter" idx="13"/>
-          </p:nvPr>
-        </p:nvSpPr>
-        <p:spPr>
-          <a:xfrm>
-            <a:off x="677332" y="4013200"/>
-            <a:ext cx="8596669" cy="514248"/>
-          </a:xfrm>
-        </p:spPr>
-        <p:txBody>
-          <a:bodyPr anchor="b">
-            <a:noAutofit/>
-          </a:bodyPr>
-          <a:lstStyle>
-            <a:lvl1pPr marL="0" indent="0">
-              <a:buFontTx/>
-              <a:buNone/>
-              <a:defRPr sz="2400">
-                <a:solidFill>
-                  <a:schemeClr val="tx1">
-                    <a:lumMod val="75000"/>
-                    <a:lumOff val="25000"/>
-                  </a:schemeClr>
-                </a:solidFill>
-              </a:defRPr>
-            </a:lvl1pPr>
-            <a:lvl2pPr marL="457200" indent="0">
-              <a:buFontTx/>
-              <a:buNone/>
-              <a:defRPr/>
-            </a:lvl2pPr>
-            <a:lvl3pPr marL="914400" indent="0">
-              <a:buFontTx/>
-              <a:buNone/>
-              <a:defRPr/>
-            </a:lvl3pPr>
-            <a:lvl4pPr marL="1371600" indent="0">
-              <a:buFontTx/>
-              <a:buNone/>
-              <a:defRPr/>
-            </a:lvl4pPr>
-            <a:lvl5pPr marL="1828800" indent="0">
-              <a:buFontTx/>
-              <a:buNone/>
-              <a:defRPr/>
-            </a:lvl5pPr>
-          </a:lstStyle>
-          <a:p>
-            <a:pPr lvl="0"/>
-            <a:r>
-              <a:rPr lang="ko-KR" altLang="en-US" smtClean="0"/>
-              <a:t>마스터 텍스트 스타일을 편집합니다</a:t>
-            </a:r>
-          </a:p>
-        </p:txBody>
-      </p:sp>
-      <p:sp>
-        <p:nvSpPr>
-          <p:cNvPr id="3" name="Text Placeholder 2"/>
-          <p:cNvSpPr>
-            <a:spLocks noGrp="1"/>
-          </p:cNvSpPr>
-          <p:nvPr>
-            <p:ph type="body" idx="1"/>
-          </p:nvPr>
-        </p:nvSpPr>
-        <p:spPr>
-          <a:xfrm>
-            <a:off x="677335" y="4527448"/>
-            <a:ext cx="8596668" cy="1513914"/>
-          </a:xfrm>
-        </p:spPr>
-        <p:txBody>
-          <a:bodyPr anchor="t">
-            <a:normAutofit/>
-          </a:bodyPr>
-          <a:lstStyle>
-            <a:lvl1pPr marL="0" indent="0" algn="l">
-              <a:buNone/>
-              <a:defRPr sz="1800">
-                <a:solidFill>
-                  <a:schemeClr val="tx1">
-                    <a:lumMod val="50000"/>
-                    <a:lumOff val="50000"/>
-                  </a:schemeClr>
-                </a:solidFill>
-              </a:defRPr>
-            </a:lvl1pPr>
-            <a:lvl2pPr marL="457200" indent="0">
-              <a:buNone/>
-              <a:defRPr sz="1800">
-                <a:solidFill>
-                  <a:schemeClr val="tx1">
-                    <a:tint val="75000"/>
-                  </a:schemeClr>
-                </a:solidFill>
-              </a:defRPr>
-            </a:lvl2pPr>
-            <a:lvl3pPr marL="914400" indent="0">
-              <a:buNone/>
-              <a:defRPr sz="1600">
-                <a:solidFill>
-                  <a:schemeClr val="tx1">
-                    <a:tint val="75000"/>
-                  </a:schemeClr>
-                </a:solidFill>
-              </a:defRPr>
-            </a:lvl3pPr>
-            <a:lvl4pPr marL="1371600" indent="0">
-              <a:buNone/>
-              <a:defRPr sz="1400">
-                <a:solidFill>
-                  <a:schemeClr val="tx1">
-                    <a:tint val="75000"/>
-                  </a:schemeClr>
-                </a:solidFill>
-              </a:defRPr>
-            </a:lvl4pPr>
-            <a:lvl5pPr marL="1828800" indent="0">
-              <a:buNone/>
-              <a:defRPr sz="1400">
-                <a:solidFill>
-                  <a:schemeClr val="tx1">
-                    <a:tint val="75000"/>
-                  </a:schemeClr>
-                </a:solidFill>
-              </a:defRPr>
-            </a:lvl5pPr>
-            <a:lvl6pPr marL="2286000" indent="0">
-              <a:buNone/>
-              <a:defRPr sz="1400">
-                <a:solidFill>
-                  <a:schemeClr val="tx1">
-                    <a:tint val="75000"/>
-                  </a:schemeClr>
-                </a:solidFill>
-              </a:defRPr>
-            </a:lvl6pPr>
-            <a:lvl7pPr marL="2743200" indent="0">
-              <a:buNone/>
-              <a:defRPr sz="1400">
-                <a:solidFill>
-                  <a:schemeClr val="tx1">
-                    <a:tint val="75000"/>
-                  </a:schemeClr>
-                </a:solidFill>
-              </a:defRPr>
-            </a:lvl7pPr>
-            <a:lvl8pPr marL="3200400" indent="0">
-              <a:buNone/>
-              <a:defRPr sz="1400">
-                <a:solidFill>
-                  <a:schemeClr val="tx1">
-                    <a:tint val="75000"/>
-                  </a:schemeClr>
-                </a:solidFill>
-              </a:defRPr>
-            </a:lvl8pPr>
-            <a:lvl9pPr marL="3657600" indent="0">
-              <a:buNone/>
-              <a:defRPr sz="1400">
-                <a:solidFill>
-                  <a:schemeClr val="tx1">
-                    <a:tint val="75000"/>
-                  </a:schemeClr>
-                </a:solidFill>
-              </a:defRPr>
-            </a:lvl9pPr>
-          </a:lstStyle>
-          <a:p>
-            <a:pPr lvl="0"/>
-            <a:r>
-              <a:rPr lang="ko-KR" altLang="en-US" smtClean="0"/>
-              <a:t>마스터 텍스트 스타일을 편집합니다</a:t>
-            </a:r>
-          </a:p>
-        </p:txBody>
-      </p:sp>
-      <p:sp>
-        <p:nvSpPr>
-          <p:cNvPr id="4" name="Date Placeholder 3"/>
-          <p:cNvSpPr>
-            <a:spLocks noGrp="1"/>
-          </p:cNvSpPr>
-          <p:nvPr>
-            <p:ph type="dt" sz="half" idx="10"/>
-          </p:nvPr>
-        </p:nvSpPr>
-        <p:spPr/>
-        <p:txBody>
-          <a:bodyPr/>
-          <a:lstStyle/>
-          <a:p>
-            <a:fld id="{60F77B50-EE59-40FB-9928-DE460C8D4B9F}" type="datetimeFigureOut">
-              <a:rPr lang="ko-KR" altLang="en-US" smtClean="0"/>
-              <a:t>2026-09-19</a:t>
-            </a:fld>
-            <a:endParaRPr lang="ko-KR" altLang="en-US"/>
-          </a:p>
-        </p:txBody>
-      </p:sp>
-      <p:sp>
-        <p:nvSpPr>
-          <p:cNvPr id="5" name="Footer Placeholder 4"/>
-          <p:cNvSpPr>
-            <a:spLocks noGrp="1"/>
-          </p:cNvSpPr>
-          <p:nvPr>
-            <p:ph type="ftr" sz="quarter" idx="11"/>
-          </p:nvPr>
-        </p:nvSpPr>
-        <p:spPr/>
-        <p:txBody>
-          <a:bodyPr/>
-          <a:lstStyle/>
-          <a:p>
-            <a:endParaRPr lang="ko-KR" altLang="en-US"/>
-          </a:p>
-        </p:txBody>
-      </p:sp>
-      <p:sp>
-        <p:nvSpPr>
-          <p:cNvPr id="6" name="Slide Number Placeholder 5"/>
-          <p:cNvSpPr>
-            <a:spLocks noGrp="1"/>
-          </p:cNvSpPr>
-          <p:nvPr>
-            <p:ph type="sldNum" sz="quarter" idx="12"/>
-          </p:nvPr>
-        </p:nvSpPr>
-        <p:spPr/>
-        <p:txBody>
-          <a:bodyPr/>
-          <a:lstStyle/>
-          <a:p>
-            <a:fld id="{0BA6EA0F-63D8-43B8-9C35-B866FC7A579A}" type="slidenum">
-              <a:rPr lang="ko-KR" altLang="en-US" smtClean="0"/>
-              <a:t>‹#›</a:t>
-            </a:fld>
-            <a:endParaRPr lang="ko-KR" altLang="en-US"/>
-          </a:p>
-        </p:txBody>
-      </p:sp>
-      <p:sp>
-        <p:nvSpPr>
-          <p:cNvPr id="24" name="TextBox 23"/>
-          <p:cNvSpPr txBox="1"/>
-          <p:nvPr/>
-        </p:nvSpPr>
-        <p:spPr>
-          <a:xfrm>
-            <a:off x="541870" y="790378"/>
-            <a:ext cx="609600" cy="584776"/>
-          </a:xfrm>
-          <a:prstGeom prst="rect">
-            <a:avLst/>
-          </a:prstGeom>
-        </p:spPr>
-        <p:txBody>
-          <a:bodyPr vert="horz" lIns="91440" tIns="45720" rIns="91440" bIns="45720" rtlCol="0" anchor="ctr">
-            <a:noAutofit/>
-          </a:bodyPr>
-          <a:lstStyle/>
-          <a:p>
-            <a:pPr lvl="0"/>
-            <a:r>
-              <a:rPr lang="en-US" sz="8000" baseline="0" dirty="0">
-                <a:ln w="3175" cmpd="sng">
-                  <a:noFill/>
-                </a:ln>
-                <a:solidFill>
-                  <a:schemeClr val="accent1">
-                    <a:lumMod val="60000"/>
-                    <a:lumOff val="40000"/>
-                  </a:schemeClr>
-                </a:solidFill>
-                <a:effectLst/>
-                <a:latin typeface="Arial"/>
-              </a:rPr>
-              <a:t>“</a:t>
-            </a:r>
-          </a:p>
-        </p:txBody>
-      </p:sp>
-      <p:sp>
-        <p:nvSpPr>
-          <p:cNvPr id="25" name="TextBox 24"/>
-          <p:cNvSpPr txBox="1"/>
-          <p:nvPr/>
-        </p:nvSpPr>
-        <p:spPr>
-          <a:xfrm>
-            <a:off x="8893011" y="2886556"/>
-            <a:ext cx="609600" cy="584776"/>
-          </a:xfrm>
-          <a:prstGeom prst="rect">
-            <a:avLst/>
-          </a:prstGeom>
-        </p:spPr>
-        <p:txBody>
-          <a:bodyPr vert="horz" lIns="91440" tIns="45720" rIns="91440" bIns="45720" rtlCol="0" anchor="ctr">
-            <a:noAutofit/>
-          </a:bodyPr>
-          <a:lstStyle/>
-          <a:p>
-            <a:pPr lvl="0"/>
-            <a:r>
-              <a:rPr lang="en-US" sz="8000" baseline="0" dirty="0">
-                <a:ln w="3175" cmpd="sng">
-                  <a:noFill/>
-                </a:ln>
-                <a:solidFill>
-                  <a:schemeClr val="accent1">
-                    <a:lumMod val="60000"/>
-                    <a:lumOff val="40000"/>
-                  </a:schemeClr>
-                </a:solidFill>
-                <a:effectLst/>
-                <a:latin typeface="Arial"/>
-              </a:rPr>
-              <a:t>”</a:t>
-            </a:r>
-          </a:p>
-        </p:txBody>
-      </p:sp>
-    </p:spTree>
-    <p:extLst>
-      <p:ext uri="{BB962C8B-B14F-4D97-AF65-F5344CB8AC3E}">
-        <p14:creationId xmlns:p14="http://schemas.microsoft.com/office/powerpoint/2010/main" val="2925433116"/>
-      </p:ext>
-    </p:extLst>
-  </p:cSld>
-  <p:clrMapOvr>
-    <a:masterClrMapping/>
-  </p:clrMapOvr>
-</p:sldLayout>
-</file>
-
-<file path=ppt/slideLayouts/slideLayout14.xml><?xml version="1.0" encoding="utf-8"?>
-<p:sldLayout xmlns:a="http://schemas.openxmlformats.org/drawingml/2006/main" xmlns:r="http://schemas.openxmlformats.org/officeDocument/2006/relationships" xmlns:p="http://schemas.openxmlformats.org/presentationml/2006/main" preserve="1">
-  <p:cSld name="참 또는 거짓">
-    <p:spTree>
-      <p:nvGrpSpPr>
-        <p:cNvPr id="1" name=""/>
-        <p:cNvGrpSpPr/>
-        <p:nvPr/>
-      </p:nvGrpSpPr>
-      <p:grpSpPr>
-        <a:xfrm>
-          <a:off x="0" y="0"/>
-          <a:ext cx="0" cy="0"/>
-          <a:chOff x="0" y="0"/>
-          <a:chExt cx="0" cy="0"/>
-        </a:xfrm>
-      </p:grpSpPr>
-      <p:sp>
-        <p:nvSpPr>
-          <p:cNvPr id="2" name="Title 1"/>
-          <p:cNvSpPr>
-            <a:spLocks noGrp="1"/>
-          </p:cNvSpPr>
-          <p:nvPr>
-            <p:ph type="title"/>
-          </p:nvPr>
-        </p:nvSpPr>
-        <p:spPr>
-          <a:xfrm>
-            <a:off x="685799" y="609600"/>
-            <a:ext cx="8588203" cy="3022600"/>
-          </a:xfrm>
-        </p:spPr>
-        <p:txBody>
-          <a:bodyPr anchor="ctr">
-            <a:normAutofit/>
-          </a:bodyPr>
-          <a:lstStyle>
-            <a:lvl1pPr algn="l">
-              <a:defRPr sz="4400" b="0" cap="none"/>
-            </a:lvl1pPr>
-          </a:lstStyle>
-          <a:p>
-            <a:r>
-              <a:rPr lang="ko-KR" altLang="en-US" smtClean="0"/>
-              <a:t>마스터 제목 스타일 편집</a:t>
-            </a:r>
-            <a:endParaRPr lang="en-US" dirty="0"/>
-          </a:p>
-        </p:txBody>
-      </p:sp>
-      <p:sp>
-        <p:nvSpPr>
-          <p:cNvPr id="23" name="Text Placeholder 9"/>
-          <p:cNvSpPr>
-            <a:spLocks noGrp="1"/>
-          </p:cNvSpPr>
-          <p:nvPr>
-            <p:ph type="body" sz="quarter" idx="13"/>
-          </p:nvPr>
-        </p:nvSpPr>
-        <p:spPr>
-          <a:xfrm>
-            <a:off x="677332" y="4013200"/>
-            <a:ext cx="8596669" cy="514248"/>
-          </a:xfrm>
-        </p:spPr>
-        <p:txBody>
-          <a:bodyPr anchor="b">
-            <a:noAutofit/>
-          </a:bodyPr>
-          <a:lstStyle>
-            <a:lvl1pPr marL="0" indent="0">
-              <a:buFontTx/>
-              <a:buNone/>
-              <a:defRPr sz="2400">
-                <a:solidFill>
-                  <a:schemeClr val="accent1"/>
-                </a:solidFill>
-              </a:defRPr>
-            </a:lvl1pPr>
-            <a:lvl2pPr marL="457200" indent="0">
-              <a:buFontTx/>
-              <a:buNone/>
-              <a:defRPr/>
-            </a:lvl2pPr>
-            <a:lvl3pPr marL="914400" indent="0">
-              <a:buFontTx/>
-              <a:buNone/>
-              <a:defRPr/>
-            </a:lvl3pPr>
-            <a:lvl4pPr marL="1371600" indent="0">
-              <a:buFontTx/>
-              <a:buNone/>
-              <a:defRPr/>
-            </a:lvl4pPr>
-            <a:lvl5pPr marL="1828800" indent="0">
-              <a:buFontTx/>
-              <a:buNone/>
-              <a:defRPr/>
-            </a:lvl5pPr>
-          </a:lstStyle>
-          <a:p>
-            <a:pPr lvl="0"/>
-            <a:r>
-              <a:rPr lang="ko-KR" altLang="en-US" smtClean="0"/>
-              <a:t>마스터 텍스트 스타일을 편집합니다</a:t>
-            </a:r>
-          </a:p>
-        </p:txBody>
-      </p:sp>
-      <p:sp>
-        <p:nvSpPr>
-          <p:cNvPr id="3" name="Text Placeholder 2"/>
-          <p:cNvSpPr>
-            <a:spLocks noGrp="1"/>
-          </p:cNvSpPr>
-          <p:nvPr>
-            <p:ph type="body" idx="1"/>
-          </p:nvPr>
-        </p:nvSpPr>
-        <p:spPr>
-          <a:xfrm>
-            <a:off x="677335" y="4527448"/>
-            <a:ext cx="8596668" cy="1513914"/>
-          </a:xfrm>
-        </p:spPr>
-        <p:txBody>
-          <a:bodyPr anchor="t">
-            <a:normAutofit/>
-          </a:bodyPr>
-          <a:lstStyle>
-            <a:lvl1pPr marL="0" indent="0" algn="l">
-              <a:buNone/>
-              <a:defRPr sz="1800">
-                <a:solidFill>
-                  <a:schemeClr val="tx1">
-                    <a:lumMod val="50000"/>
-                    <a:lumOff val="50000"/>
-                  </a:schemeClr>
-                </a:solidFill>
-              </a:defRPr>
-            </a:lvl1pPr>
-            <a:lvl2pPr marL="457200" indent="0">
-              <a:buNone/>
-              <a:defRPr sz="1800">
-                <a:solidFill>
-                  <a:schemeClr val="tx1">
-                    <a:tint val="75000"/>
-                  </a:schemeClr>
-                </a:solidFill>
-              </a:defRPr>
-            </a:lvl2pPr>
-            <a:lvl3pPr marL="914400" indent="0">
-              <a:buNone/>
-              <a:defRPr sz="1600">
-                <a:solidFill>
-                  <a:schemeClr val="tx1">
-                    <a:tint val="75000"/>
-                  </a:schemeClr>
-                </a:solidFill>
-              </a:defRPr>
-            </a:lvl3pPr>
-            <a:lvl4pPr marL="1371600" indent="0">
-              <a:buNone/>
-              <a:defRPr sz="1400">
-                <a:solidFill>
-                  <a:schemeClr val="tx1">
-                    <a:tint val="75000"/>
-                  </a:schemeClr>
-                </a:solidFill>
-              </a:defRPr>
-            </a:lvl4pPr>
-            <a:lvl5pPr marL="1828800" indent="0">
-              <a:buNone/>
-              <a:defRPr sz="1400">
-                <a:solidFill>
-                  <a:schemeClr val="tx1">
-                    <a:tint val="75000"/>
-                  </a:schemeClr>
-                </a:solidFill>
-              </a:defRPr>
-            </a:lvl5pPr>
-            <a:lvl6pPr marL="2286000" indent="0">
-              <a:buNone/>
-              <a:defRPr sz="1400">
-                <a:solidFill>
-                  <a:schemeClr val="tx1">
-                    <a:tint val="75000"/>
-                  </a:schemeClr>
-                </a:solidFill>
-              </a:defRPr>
-            </a:lvl6pPr>
-            <a:lvl7pPr marL="2743200" indent="0">
-              <a:buNone/>
-              <a:defRPr sz="1400">
-                <a:solidFill>
-                  <a:schemeClr val="tx1">
-                    <a:tint val="75000"/>
-                  </a:schemeClr>
-                </a:solidFill>
-              </a:defRPr>
-            </a:lvl7pPr>
-            <a:lvl8pPr marL="3200400" indent="0">
-              <a:buNone/>
-              <a:defRPr sz="1400">
-                <a:solidFill>
-                  <a:schemeClr val="tx1">
-                    <a:tint val="75000"/>
-                  </a:schemeClr>
-                </a:solidFill>
-              </a:defRPr>
-            </a:lvl8pPr>
-            <a:lvl9pPr marL="3657600" indent="0">
-              <a:buNone/>
-              <a:defRPr sz="1400">
-                <a:solidFill>
-                  <a:schemeClr val="tx1">
-                    <a:tint val="75000"/>
-                  </a:schemeClr>
-                </a:solidFill>
-              </a:defRPr>
-            </a:lvl9pPr>
-          </a:lstStyle>
-          <a:p>
-            <a:pPr lvl="0"/>
-            <a:r>
-              <a:rPr lang="ko-KR" altLang="en-US" smtClean="0"/>
-              <a:t>마스터 텍스트 스타일을 편집합니다</a:t>
-            </a:r>
-          </a:p>
-        </p:txBody>
-      </p:sp>
-      <p:sp>
-        <p:nvSpPr>
-          <p:cNvPr id="4" name="Date Placeholder 3"/>
-          <p:cNvSpPr>
-            <a:spLocks noGrp="1"/>
-          </p:cNvSpPr>
-          <p:nvPr>
-            <p:ph type="dt" sz="half" idx="10"/>
-          </p:nvPr>
-        </p:nvSpPr>
-        <p:spPr/>
-        <p:txBody>
-          <a:bodyPr/>
-          <a:lstStyle/>
-          <a:p>
-            <a:fld id="{60F77B50-EE59-40FB-9928-DE460C8D4B9F}" type="datetimeFigureOut">
-              <a:rPr lang="ko-KR" altLang="en-US" smtClean="0"/>
-              <a:t>2026-09-19</a:t>
-            </a:fld>
-            <a:endParaRPr lang="ko-KR" altLang="en-US"/>
-          </a:p>
-        </p:txBody>
-      </p:sp>
-      <p:sp>
-        <p:nvSpPr>
-          <p:cNvPr id="5" name="Footer Placeholder 4"/>
-          <p:cNvSpPr>
-            <a:spLocks noGrp="1"/>
-          </p:cNvSpPr>
-          <p:nvPr>
-            <p:ph type="ftr" sz="quarter" idx="11"/>
-          </p:nvPr>
-        </p:nvSpPr>
-        <p:spPr/>
-        <p:txBody>
-          <a:bodyPr/>
-          <a:lstStyle/>
-          <a:p>
-            <a:endParaRPr lang="ko-KR" altLang="en-US"/>
-          </a:p>
-        </p:txBody>
-      </p:sp>
-      <p:sp>
-        <p:nvSpPr>
-          <p:cNvPr id="6" name="Slide Number Placeholder 5"/>
-          <p:cNvSpPr>
-            <a:spLocks noGrp="1"/>
-          </p:cNvSpPr>
-          <p:nvPr>
-            <p:ph type="sldNum" sz="quarter" idx="12"/>
-          </p:nvPr>
-        </p:nvSpPr>
-        <p:spPr/>
-        <p:txBody>
-          <a:bodyPr/>
-          <a:lstStyle/>
-          <a:p>
-            <a:fld id="{0BA6EA0F-63D8-43B8-9C35-B866FC7A579A}" type="slidenum">
-              <a:rPr lang="ko-KR" altLang="en-US" smtClean="0"/>
-              <a:t>‹#›</a:t>
-            </a:fld>
-            <a:endParaRPr lang="ko-KR" altLang="en-US"/>
-          </a:p>
-        </p:txBody>
-      </p:sp>
-    </p:spTree>
-    <p:extLst>
-      <p:ext uri="{BB962C8B-B14F-4D97-AF65-F5344CB8AC3E}">
-        <p14:creationId xmlns:p14="http://schemas.microsoft.com/office/powerpoint/2010/main" val="4001435822"/>
-      </p:ext>
-    </p:extLst>
-  </p:cSld>
-  <p:clrMapOvr>
-    <a:masterClrMapping/>
-  </p:clrMapOvr>
-</p:sldLayout>
-</file>
-
-<file path=ppt/slideLayouts/slideLayout15.xml><?xml version="1.0" encoding="utf-8"?>
 <p:sldLayout xmlns:a="http://schemas.openxmlformats.org/drawingml/2006/main" xmlns:r="http://schemas.openxmlformats.org/officeDocument/2006/relationships" xmlns:p="http://schemas.openxmlformats.org/presentationml/2006/main" type="vertTx" preserve="1">
   <p:cSld name="제목 및 세로 텍스트">
     <p:spTree>
@@ -2535,7 +331,7 @@
       </p:grpSpPr>
       <p:sp>
         <p:nvSpPr>
-          <p:cNvPr id="2" name="Title 1"/>
+          <p:cNvPr id="2" name="제목 1"/>
           <p:cNvSpPr>
             <a:spLocks noGrp="1"/>
           </p:cNvSpPr>
@@ -2552,13 +348,13 @@
               <a:rPr lang="ko-KR" altLang="en-US" smtClean="0"/>
               <a:t>마스터 제목 스타일 편집</a:t>
             </a:r>
-            <a:endParaRPr lang="en-US" dirty="0"/>
-          </a:p>
-        </p:txBody>
-      </p:sp>
-      <p:sp>
-        <p:nvSpPr>
-          <p:cNvPr id="3" name="Vertical Text Placeholder 2"/>
+            <a:endParaRPr lang="ko-KR" altLang="en-US"/>
+          </a:p>
+        </p:txBody>
+      </p:sp>
+      <p:sp>
+        <p:nvSpPr>
+          <p:cNvPr id="3" name="세로 텍스트 개체 틀 2"/>
           <p:cNvSpPr>
             <a:spLocks noGrp="1"/>
           </p:cNvSpPr>
@@ -2604,13 +400,13 @@
               <a:rPr lang="ko-KR" altLang="en-US" smtClean="0"/>
               <a:t>다섯째 수준</a:t>
             </a:r>
-            <a:endParaRPr lang="en-US" dirty="0"/>
-          </a:p>
-        </p:txBody>
-      </p:sp>
-      <p:sp>
-        <p:nvSpPr>
-          <p:cNvPr id="4" name="Date Placeholder 3"/>
+            <a:endParaRPr lang="ko-KR" altLang="en-US"/>
+          </a:p>
+        </p:txBody>
+      </p:sp>
+      <p:sp>
+        <p:nvSpPr>
+          <p:cNvPr id="4" name="날짜 개체 틀 3"/>
           <p:cNvSpPr>
             <a:spLocks noGrp="1"/>
           </p:cNvSpPr>
@@ -2633,7 +429,7 @@
       </p:sp>
       <p:sp>
         <p:nvSpPr>
-          <p:cNvPr id="5" name="Footer Placeholder 4"/>
+          <p:cNvPr id="5" name="바닥글 개체 틀 4"/>
           <p:cNvSpPr>
             <a:spLocks noGrp="1"/>
           </p:cNvSpPr>
@@ -2652,7 +448,7 @@
       </p:sp>
       <p:sp>
         <p:nvSpPr>
-          <p:cNvPr id="6" name="Slide Number Placeholder 5"/>
+          <p:cNvPr id="6" name="슬라이드 번호 개체 틀 5"/>
           <p:cNvSpPr>
             <a:spLocks noGrp="1"/>
           </p:cNvSpPr>
@@ -2676,7 +472,7 @@
     </p:spTree>
     <p:extLst>
       <p:ext uri="{BB962C8B-B14F-4D97-AF65-F5344CB8AC3E}">
-        <p14:creationId xmlns:p14="http://schemas.microsoft.com/office/powerpoint/2010/main" val="3505594116"/>
+        <p14:creationId xmlns:p14="http://schemas.microsoft.com/office/powerpoint/2010/main" val="2901031551"/>
       </p:ext>
     </p:extLst>
   </p:cSld>
@@ -2686,7 +482,7 @@
 </p:sldLayout>
 </file>
 
-<file path=ppt/slideLayouts/slideLayout16.xml><?xml version="1.0" encoding="utf-8"?>
+<file path=ppt/slideLayouts/slideLayout11.xml><?xml version="1.0" encoding="utf-8"?>
 <p:sldLayout xmlns:a="http://schemas.openxmlformats.org/drawingml/2006/main" xmlns:r="http://schemas.openxmlformats.org/officeDocument/2006/relationships" xmlns:p="http://schemas.openxmlformats.org/presentationml/2006/main" type="vertTitleAndTx" preserve="1">
   <p:cSld name="세로 제목 및 텍스트">
     <p:spTree>
@@ -2705,7 +501,7 @@
       </p:grpSpPr>
       <p:sp>
         <p:nvSpPr>
-          <p:cNvPr id="2" name="Vertical Title 1"/>
+          <p:cNvPr id="2" name="세로 제목 1"/>
           <p:cNvSpPr>
             <a:spLocks noGrp="1"/>
           </p:cNvSpPr>
@@ -2715,25 +511,25 @@
         </p:nvSpPr>
         <p:spPr>
           <a:xfrm>
-            <a:off x="7967673" y="609599"/>
-            <a:ext cx="1304743" cy="5251451"/>
-          </a:xfrm>
-        </p:spPr>
-        <p:txBody>
-          <a:bodyPr vert="eaVert" anchor="ctr"/>
+            <a:off x="8724900" y="365125"/>
+            <a:ext cx="2628900" cy="5811838"/>
+          </a:xfrm>
+        </p:spPr>
+        <p:txBody>
+          <a:bodyPr vert="eaVert"/>
           <a:lstStyle/>
           <a:p>
             <a:r>
               <a:rPr lang="ko-KR" altLang="en-US" smtClean="0"/>
               <a:t>마스터 제목 스타일 편집</a:t>
             </a:r>
-            <a:endParaRPr lang="en-US" dirty="0"/>
-          </a:p>
-        </p:txBody>
-      </p:sp>
-      <p:sp>
-        <p:nvSpPr>
-          <p:cNvPr id="3" name="Vertical Text Placeholder 2"/>
+            <a:endParaRPr lang="ko-KR" altLang="en-US"/>
+          </a:p>
+        </p:txBody>
+      </p:sp>
+      <p:sp>
+        <p:nvSpPr>
+          <p:cNvPr id="3" name="세로 텍스트 개체 틀 2"/>
           <p:cNvSpPr>
             <a:spLocks noGrp="1"/>
           </p:cNvSpPr>
@@ -2743,8 +539,8 @@
         </p:nvSpPr>
         <p:spPr>
           <a:xfrm>
-            <a:off x="677335" y="609600"/>
-            <a:ext cx="7060150" cy="5251450"/>
+            <a:off x="838200" y="365125"/>
+            <a:ext cx="7734300" cy="5811838"/>
           </a:xfrm>
         </p:spPr>
         <p:txBody>
@@ -2784,13 +580,13 @@
               <a:rPr lang="ko-KR" altLang="en-US" smtClean="0"/>
               <a:t>다섯째 수준</a:t>
             </a:r>
-            <a:endParaRPr lang="en-US" dirty="0"/>
-          </a:p>
-        </p:txBody>
-      </p:sp>
-      <p:sp>
-        <p:nvSpPr>
-          <p:cNvPr id="4" name="Date Placeholder 3"/>
+            <a:endParaRPr lang="ko-KR" altLang="en-US"/>
+          </a:p>
+        </p:txBody>
+      </p:sp>
+      <p:sp>
+        <p:nvSpPr>
+          <p:cNvPr id="4" name="날짜 개체 틀 3"/>
           <p:cNvSpPr>
             <a:spLocks noGrp="1"/>
           </p:cNvSpPr>
@@ -2813,7 +609,7 @@
       </p:sp>
       <p:sp>
         <p:nvSpPr>
-          <p:cNvPr id="5" name="Footer Placeholder 4"/>
+          <p:cNvPr id="5" name="바닥글 개체 틀 4"/>
           <p:cNvSpPr>
             <a:spLocks noGrp="1"/>
           </p:cNvSpPr>
@@ -2832,7 +628,7 @@
       </p:sp>
       <p:sp>
         <p:nvSpPr>
-          <p:cNvPr id="6" name="Slide Number Placeholder 5"/>
+          <p:cNvPr id="6" name="슬라이드 번호 개체 틀 5"/>
           <p:cNvSpPr>
             <a:spLocks noGrp="1"/>
           </p:cNvSpPr>
@@ -2856,7 +652,7 @@
     </p:spTree>
     <p:extLst>
       <p:ext uri="{BB962C8B-B14F-4D97-AF65-F5344CB8AC3E}">
-        <p14:creationId xmlns:p14="http://schemas.microsoft.com/office/powerpoint/2010/main" val="2692375970"/>
+        <p14:creationId xmlns:p14="http://schemas.microsoft.com/office/powerpoint/2010/main" val="3018611511"/>
       </p:ext>
     </p:extLst>
   </p:cSld>
@@ -2885,7 +681,7 @@
       </p:grpSpPr>
       <p:sp>
         <p:nvSpPr>
-          <p:cNvPr id="2" name="Title 1"/>
+          <p:cNvPr id="2" name="제목 1"/>
           <p:cNvSpPr>
             <a:spLocks noGrp="1"/>
           </p:cNvSpPr>
@@ -2895,26 +691,20 @@
         </p:nvSpPr>
         <p:spPr/>
         <p:txBody>
-          <a:bodyPr>
-            <a:normAutofit/>
-          </a:bodyPr>
-          <a:lstStyle>
-            <a:lvl1pPr>
-              <a:defRPr sz="3600"/>
-            </a:lvl1pPr>
-          </a:lstStyle>
+          <a:bodyPr/>
+          <a:lstStyle/>
           <a:p>
             <a:r>
               <a:rPr lang="ko-KR" altLang="en-US" smtClean="0"/>
               <a:t>마스터 제목 스타일 편집</a:t>
             </a:r>
-            <a:endParaRPr lang="en-US" dirty="0"/>
-          </a:p>
-        </p:txBody>
-      </p:sp>
-      <p:sp>
-        <p:nvSpPr>
-          <p:cNvPr id="3" name="Content Placeholder 2"/>
+            <a:endParaRPr lang="ko-KR" altLang="en-US"/>
+          </a:p>
+        </p:txBody>
+      </p:sp>
+      <p:sp>
+        <p:nvSpPr>
+          <p:cNvPr id="3" name="내용 개체 틀 2"/>
           <p:cNvSpPr>
             <a:spLocks noGrp="1"/>
           </p:cNvSpPr>
@@ -2960,13 +750,13 @@
               <a:rPr lang="ko-KR" altLang="en-US" smtClean="0"/>
               <a:t>다섯째 수준</a:t>
             </a:r>
-            <a:endParaRPr lang="en-US" dirty="0"/>
-          </a:p>
-        </p:txBody>
-      </p:sp>
-      <p:sp>
-        <p:nvSpPr>
-          <p:cNvPr id="4" name="Date Placeholder 3"/>
+            <a:endParaRPr lang="ko-KR" altLang="en-US"/>
+          </a:p>
+        </p:txBody>
+      </p:sp>
+      <p:sp>
+        <p:nvSpPr>
+          <p:cNvPr id="4" name="날짜 개체 틀 3"/>
           <p:cNvSpPr>
             <a:spLocks noGrp="1"/>
           </p:cNvSpPr>
@@ -2989,7 +779,7 @@
       </p:sp>
       <p:sp>
         <p:nvSpPr>
-          <p:cNvPr id="5" name="Footer Placeholder 4"/>
+          <p:cNvPr id="5" name="바닥글 개체 틀 4"/>
           <p:cNvSpPr>
             <a:spLocks noGrp="1"/>
           </p:cNvSpPr>
@@ -3008,7 +798,7 @@
       </p:sp>
       <p:sp>
         <p:nvSpPr>
-          <p:cNvPr id="6" name="Slide Number Placeholder 5"/>
+          <p:cNvPr id="6" name="슬라이드 번호 개체 틀 5"/>
           <p:cNvSpPr>
             <a:spLocks noGrp="1"/>
           </p:cNvSpPr>
@@ -3032,7 +822,7 @@
     </p:spTree>
     <p:extLst>
       <p:ext uri="{BB962C8B-B14F-4D97-AF65-F5344CB8AC3E}">
-        <p14:creationId xmlns:p14="http://schemas.microsoft.com/office/powerpoint/2010/main" val="1167738419"/>
+        <p14:creationId xmlns:p14="http://schemas.microsoft.com/office/powerpoint/2010/main" val="2338503870"/>
       </p:ext>
     </p:extLst>
   </p:cSld>
@@ -3061,7 +851,7 @@
       </p:grpSpPr>
       <p:sp>
         <p:nvSpPr>
-          <p:cNvPr id="2" name="Title 1"/>
+          <p:cNvPr id="2" name="제목 1"/>
           <p:cNvSpPr>
             <a:spLocks noGrp="1"/>
           </p:cNvSpPr>
@@ -3071,15 +861,15 @@
         </p:nvSpPr>
         <p:spPr>
           <a:xfrm>
-            <a:off x="677335" y="2700867"/>
-            <a:ext cx="8596668" cy="1826581"/>
+            <a:off x="831850" y="1709738"/>
+            <a:ext cx="10515600" cy="2852737"/>
           </a:xfrm>
         </p:spPr>
         <p:txBody>
           <a:bodyPr anchor="b"/>
           <a:lstStyle>
-            <a:lvl1pPr algn="l">
-              <a:defRPr sz="4000" b="0" cap="none"/>
+            <a:lvl1pPr>
+              <a:defRPr sz="6000"/>
             </a:lvl1pPr>
           </a:lstStyle>
           <a:p>
@@ -3087,13 +877,13 @@
               <a:rPr lang="ko-KR" altLang="en-US" smtClean="0"/>
               <a:t>마스터 제목 스타일 편집</a:t>
             </a:r>
-            <a:endParaRPr lang="en-US" dirty="0"/>
-          </a:p>
-        </p:txBody>
-      </p:sp>
-      <p:sp>
-        <p:nvSpPr>
-          <p:cNvPr id="3" name="Text Placeholder 2"/>
+            <a:endParaRPr lang="ko-KR" altLang="en-US"/>
+          </a:p>
+        </p:txBody>
+      </p:sp>
+      <p:sp>
+        <p:nvSpPr>
+          <p:cNvPr id="3" name="텍스트 개체 틀 2"/>
           <p:cNvSpPr>
             <a:spLocks noGrp="1"/>
           </p:cNvSpPr>
@@ -3103,27 +893,26 @@
         </p:nvSpPr>
         <p:spPr>
           <a:xfrm>
-            <a:off x="677335" y="4527448"/>
-            <a:ext cx="8596668" cy="860400"/>
-          </a:xfrm>
-        </p:spPr>
-        <p:txBody>
-          <a:bodyPr anchor="t"/>
+            <a:off x="831850" y="4589463"/>
+            <a:ext cx="10515600" cy="1500187"/>
+          </a:xfrm>
+        </p:spPr>
+        <p:txBody>
+          <a:bodyPr/>
           <a:lstStyle>
-            <a:lvl1pPr marL="0" indent="0" algn="l">
-              <a:buNone/>
-              <a:defRPr sz="2000">
+            <a:lvl1pPr marL="0" indent="0">
+              <a:buNone/>
+              <a:defRPr sz="2400">
                 <a:solidFill>
                   <a:schemeClr val="tx1">
-                    <a:lumMod val="50000"/>
-                    <a:lumOff val="50000"/>
+                    <a:tint val="75000"/>
                   </a:schemeClr>
                 </a:solidFill>
               </a:defRPr>
             </a:lvl1pPr>
             <a:lvl2pPr marL="457200" indent="0">
               <a:buNone/>
-              <a:defRPr sz="1800">
+              <a:defRPr sz="2000">
                 <a:solidFill>
                   <a:schemeClr val="tx1">
                     <a:tint val="75000"/>
@@ -3133,7 +922,7 @@
             </a:lvl2pPr>
             <a:lvl3pPr marL="914400" indent="0">
               <a:buNone/>
-              <a:defRPr sz="1600">
+              <a:defRPr sz="1800">
                 <a:solidFill>
                   <a:schemeClr val="tx1">
                     <a:tint val="75000"/>
@@ -3143,7 +932,7 @@
             </a:lvl3pPr>
             <a:lvl4pPr marL="1371600" indent="0">
               <a:buNone/>
-              <a:defRPr sz="1400">
+              <a:defRPr sz="1600">
                 <a:solidFill>
                   <a:schemeClr val="tx1">
                     <a:tint val="75000"/>
@@ -3153,7 +942,7 @@
             </a:lvl4pPr>
             <a:lvl5pPr marL="1828800" indent="0">
               <a:buNone/>
-              <a:defRPr sz="1400">
+              <a:defRPr sz="1600">
                 <a:solidFill>
                   <a:schemeClr val="tx1">
                     <a:tint val="75000"/>
@@ -3163,7 +952,7 @@
             </a:lvl5pPr>
             <a:lvl6pPr marL="2286000" indent="0">
               <a:buNone/>
-              <a:defRPr sz="1400">
+              <a:defRPr sz="1600">
                 <a:solidFill>
                   <a:schemeClr val="tx1">
                     <a:tint val="75000"/>
@@ -3173,7 +962,7 @@
             </a:lvl6pPr>
             <a:lvl7pPr marL="2743200" indent="0">
               <a:buNone/>
-              <a:defRPr sz="1400">
+              <a:defRPr sz="1600">
                 <a:solidFill>
                   <a:schemeClr val="tx1">
                     <a:tint val="75000"/>
@@ -3183,7 +972,7 @@
             </a:lvl7pPr>
             <a:lvl8pPr marL="3200400" indent="0">
               <a:buNone/>
-              <a:defRPr sz="1400">
+              <a:defRPr sz="1600">
                 <a:solidFill>
                   <a:schemeClr val="tx1">
                     <a:tint val="75000"/>
@@ -3193,7 +982,7 @@
             </a:lvl8pPr>
             <a:lvl9pPr marL="3657600" indent="0">
               <a:buNone/>
-              <a:defRPr sz="1400">
+              <a:defRPr sz="1600">
                 <a:solidFill>
                   <a:schemeClr val="tx1">
                     <a:tint val="75000"/>
@@ -3213,7 +1002,7 @@
       </p:sp>
       <p:sp>
         <p:nvSpPr>
-          <p:cNvPr id="4" name="Date Placeholder 3"/>
+          <p:cNvPr id="4" name="날짜 개체 틀 3"/>
           <p:cNvSpPr>
             <a:spLocks noGrp="1"/>
           </p:cNvSpPr>
@@ -3236,7 +1025,7 @@
       </p:sp>
       <p:sp>
         <p:nvSpPr>
-          <p:cNvPr id="5" name="Footer Placeholder 4"/>
+          <p:cNvPr id="5" name="바닥글 개체 틀 4"/>
           <p:cNvSpPr>
             <a:spLocks noGrp="1"/>
           </p:cNvSpPr>
@@ -3255,7 +1044,7 @@
       </p:sp>
       <p:sp>
         <p:nvSpPr>
-          <p:cNvPr id="6" name="Slide Number Placeholder 5"/>
+          <p:cNvPr id="6" name="슬라이드 번호 개체 틀 5"/>
           <p:cNvSpPr>
             <a:spLocks noGrp="1"/>
           </p:cNvSpPr>
@@ -3279,7 +1068,7 @@
     </p:spTree>
     <p:extLst>
       <p:ext uri="{BB962C8B-B14F-4D97-AF65-F5344CB8AC3E}">
-        <p14:creationId xmlns:p14="http://schemas.microsoft.com/office/powerpoint/2010/main" val="836392549"/>
+        <p14:creationId xmlns:p14="http://schemas.microsoft.com/office/powerpoint/2010/main" val="1243430202"/>
       </p:ext>
     </p:extLst>
   </p:cSld>
@@ -3308,7 +1097,7 @@
       </p:grpSpPr>
       <p:sp>
         <p:nvSpPr>
-          <p:cNvPr id="2" name="Title 1"/>
+          <p:cNvPr id="2" name="제목 1"/>
           <p:cNvSpPr>
             <a:spLocks noGrp="1"/>
           </p:cNvSpPr>
@@ -3325,13 +1114,13 @@
               <a:rPr lang="ko-KR" altLang="en-US" smtClean="0"/>
               <a:t>마스터 제목 스타일 편집</a:t>
             </a:r>
-            <a:endParaRPr lang="en-US" dirty="0"/>
-          </a:p>
-        </p:txBody>
-      </p:sp>
-      <p:sp>
-        <p:nvSpPr>
-          <p:cNvPr id="3" name="Content Placeholder 2"/>
+            <a:endParaRPr lang="ko-KR" altLang="en-US"/>
+          </a:p>
+        </p:txBody>
+      </p:sp>
+      <p:sp>
+        <p:nvSpPr>
+          <p:cNvPr id="3" name="내용 개체 틀 2"/>
           <p:cNvSpPr>
             <a:spLocks noGrp="1"/>
           </p:cNvSpPr>
@@ -3341,8 +1130,8 @@
         </p:nvSpPr>
         <p:spPr>
           <a:xfrm>
-            <a:off x="677334" y="2160589"/>
-            <a:ext cx="4184035" cy="3880772"/>
+            <a:off x="838200" y="1825625"/>
+            <a:ext cx="5181600" cy="4351338"/>
           </a:xfrm>
         </p:spPr>
         <p:txBody>
@@ -3382,13 +1171,13 @@
               <a:rPr lang="ko-KR" altLang="en-US" smtClean="0"/>
               <a:t>다섯째 수준</a:t>
             </a:r>
-            <a:endParaRPr lang="en-US" dirty="0"/>
-          </a:p>
-        </p:txBody>
-      </p:sp>
-      <p:sp>
-        <p:nvSpPr>
-          <p:cNvPr id="4" name="Content Placeholder 3"/>
+            <a:endParaRPr lang="ko-KR" altLang="en-US"/>
+          </a:p>
+        </p:txBody>
+      </p:sp>
+      <p:sp>
+        <p:nvSpPr>
+          <p:cNvPr id="4" name="내용 개체 틀 3"/>
           <p:cNvSpPr>
             <a:spLocks noGrp="1"/>
           </p:cNvSpPr>
@@ -3398,8 +1187,8 @@
         </p:nvSpPr>
         <p:spPr>
           <a:xfrm>
-            <a:off x="5089970" y="2160589"/>
-            <a:ext cx="4184034" cy="3880773"/>
+            <a:off x="6172200" y="1825625"/>
+            <a:ext cx="5181600" cy="4351338"/>
           </a:xfrm>
         </p:spPr>
         <p:txBody>
@@ -3439,13 +1228,13 @@
               <a:rPr lang="ko-KR" altLang="en-US" smtClean="0"/>
               <a:t>다섯째 수준</a:t>
             </a:r>
-            <a:endParaRPr lang="en-US" dirty="0"/>
-          </a:p>
-        </p:txBody>
-      </p:sp>
-      <p:sp>
-        <p:nvSpPr>
-          <p:cNvPr id="5" name="Date Placeholder 4"/>
+            <a:endParaRPr lang="ko-KR" altLang="en-US"/>
+          </a:p>
+        </p:txBody>
+      </p:sp>
+      <p:sp>
+        <p:nvSpPr>
+          <p:cNvPr id="5" name="날짜 개체 틀 4"/>
           <p:cNvSpPr>
             <a:spLocks noGrp="1"/>
           </p:cNvSpPr>
@@ -3468,7 +1257,7 @@
       </p:sp>
       <p:sp>
         <p:nvSpPr>
-          <p:cNvPr id="6" name="Footer Placeholder 5"/>
+          <p:cNvPr id="6" name="바닥글 개체 틀 5"/>
           <p:cNvSpPr>
             <a:spLocks noGrp="1"/>
           </p:cNvSpPr>
@@ -3487,7 +1276,7 @@
       </p:sp>
       <p:sp>
         <p:nvSpPr>
-          <p:cNvPr id="7" name="Slide Number Placeholder 6"/>
+          <p:cNvPr id="7" name="슬라이드 번호 개체 틀 6"/>
           <p:cNvSpPr>
             <a:spLocks noGrp="1"/>
           </p:cNvSpPr>
@@ -3511,7 +1300,7 @@
     </p:spTree>
     <p:extLst>
       <p:ext uri="{BB962C8B-B14F-4D97-AF65-F5344CB8AC3E}">
-        <p14:creationId xmlns:p14="http://schemas.microsoft.com/office/powerpoint/2010/main" val="2998828591"/>
+        <p14:creationId xmlns:p14="http://schemas.microsoft.com/office/powerpoint/2010/main" val="643571960"/>
       </p:ext>
     </p:extLst>
   </p:cSld>
@@ -3540,7 +1329,7 @@
       </p:grpSpPr>
       <p:sp>
         <p:nvSpPr>
-          <p:cNvPr id="2" name="Title 1"/>
+          <p:cNvPr id="2" name="제목 1"/>
           <p:cNvSpPr>
             <a:spLocks noGrp="1"/>
           </p:cNvSpPr>
@@ -3548,26 +1337,27 @@
             <p:ph type="title"/>
           </p:nvPr>
         </p:nvSpPr>
-        <p:spPr/>
-        <p:txBody>
-          <a:bodyPr/>
-          <a:lstStyle>
-            <a:lvl1pPr>
-              <a:defRPr/>
-            </a:lvl1pPr>
-          </a:lstStyle>
+        <p:spPr>
+          <a:xfrm>
+            <a:off x="839788" y="365125"/>
+            <a:ext cx="10515600" cy="1325563"/>
+          </a:xfrm>
+        </p:spPr>
+        <p:txBody>
+          <a:bodyPr/>
+          <a:lstStyle/>
           <a:p>
             <a:r>
               <a:rPr lang="ko-KR" altLang="en-US" smtClean="0"/>
               <a:t>마스터 제목 스타일 편집</a:t>
             </a:r>
-            <a:endParaRPr lang="en-US" dirty="0"/>
-          </a:p>
-        </p:txBody>
-      </p:sp>
-      <p:sp>
-        <p:nvSpPr>
-          <p:cNvPr id="3" name="Text Placeholder 2"/>
+            <a:endParaRPr lang="ko-KR" altLang="en-US"/>
+          </a:p>
+        </p:txBody>
+      </p:sp>
+      <p:sp>
+        <p:nvSpPr>
+          <p:cNvPr id="3" name="텍스트 개체 틀 2"/>
           <p:cNvSpPr>
             <a:spLocks noGrp="1"/>
           </p:cNvSpPr>
@@ -3577,18 +1367,16 @@
         </p:nvSpPr>
         <p:spPr>
           <a:xfrm>
-            <a:off x="675745" y="2160983"/>
-            <a:ext cx="4185623" cy="576262"/>
-          </a:xfrm>
-        </p:spPr>
-        <p:txBody>
-          <a:bodyPr anchor="b">
-            <a:noAutofit/>
-          </a:bodyPr>
+            <a:off x="839788" y="1681163"/>
+            <a:ext cx="5157787" cy="823912"/>
+          </a:xfrm>
+        </p:spPr>
+        <p:txBody>
+          <a:bodyPr anchor="b"/>
           <a:lstStyle>
             <a:lvl1pPr marL="0" indent="0">
               <a:buNone/>
-              <a:defRPr sz="2400" b="0"/>
+              <a:defRPr sz="2400" b="1"/>
             </a:lvl1pPr>
             <a:lvl2pPr marL="457200" indent="0">
               <a:buNone/>
@@ -3634,7 +1422,7 @@
       </p:sp>
       <p:sp>
         <p:nvSpPr>
-          <p:cNvPr id="4" name="Content Placeholder 3"/>
+          <p:cNvPr id="4" name="내용 개체 틀 3"/>
           <p:cNvSpPr>
             <a:spLocks noGrp="1"/>
           </p:cNvSpPr>
@@ -3644,14 +1432,12 @@
         </p:nvSpPr>
         <p:spPr>
           <a:xfrm>
-            <a:off x="675745" y="2737245"/>
-            <a:ext cx="4185623" cy="3304117"/>
-          </a:xfrm>
-        </p:spPr>
-        <p:txBody>
-          <a:bodyPr>
-            <a:normAutofit/>
-          </a:bodyPr>
+            <a:off x="839788" y="2505075"/>
+            <a:ext cx="5157787" cy="3684588"/>
+          </a:xfrm>
+        </p:spPr>
+        <p:txBody>
+          <a:bodyPr/>
           <a:lstStyle/>
           <a:p>
             <a:pPr lvl="0"/>
@@ -3687,13 +1473,13 @@
               <a:rPr lang="ko-KR" altLang="en-US" smtClean="0"/>
               <a:t>다섯째 수준</a:t>
             </a:r>
-            <a:endParaRPr lang="en-US" dirty="0"/>
-          </a:p>
-        </p:txBody>
-      </p:sp>
-      <p:sp>
-        <p:nvSpPr>
-          <p:cNvPr id="5" name="Text Placeholder 4"/>
+            <a:endParaRPr lang="ko-KR" altLang="en-US"/>
+          </a:p>
+        </p:txBody>
+      </p:sp>
+      <p:sp>
+        <p:nvSpPr>
+          <p:cNvPr id="5" name="텍스트 개체 틀 4"/>
           <p:cNvSpPr>
             <a:spLocks noGrp="1"/>
           </p:cNvSpPr>
@@ -3703,18 +1489,16 @@
         </p:nvSpPr>
         <p:spPr>
           <a:xfrm>
-            <a:off x="5088383" y="2160983"/>
-            <a:ext cx="4185618" cy="576262"/>
-          </a:xfrm>
-        </p:spPr>
-        <p:txBody>
-          <a:bodyPr anchor="b">
-            <a:noAutofit/>
-          </a:bodyPr>
+            <a:off x="6172200" y="1681163"/>
+            <a:ext cx="5183188" cy="823912"/>
+          </a:xfrm>
+        </p:spPr>
+        <p:txBody>
+          <a:bodyPr anchor="b"/>
           <a:lstStyle>
             <a:lvl1pPr marL="0" indent="0">
               <a:buNone/>
-              <a:defRPr sz="2400" b="0"/>
+              <a:defRPr sz="2400" b="1"/>
             </a:lvl1pPr>
             <a:lvl2pPr marL="457200" indent="0">
               <a:buNone/>
@@ -3760,7 +1544,7 @@
       </p:sp>
       <p:sp>
         <p:nvSpPr>
-          <p:cNvPr id="6" name="Content Placeholder 5"/>
+          <p:cNvPr id="6" name="내용 개체 틀 5"/>
           <p:cNvSpPr>
             <a:spLocks noGrp="1"/>
           </p:cNvSpPr>
@@ -3770,14 +1554,12 @@
         </p:nvSpPr>
         <p:spPr>
           <a:xfrm>
-            <a:off x="5088384" y="2737245"/>
-            <a:ext cx="4185617" cy="3304117"/>
-          </a:xfrm>
-        </p:spPr>
-        <p:txBody>
-          <a:bodyPr>
-            <a:normAutofit/>
-          </a:bodyPr>
+            <a:off x="6172200" y="2505075"/>
+            <a:ext cx="5183188" cy="3684588"/>
+          </a:xfrm>
+        </p:spPr>
+        <p:txBody>
+          <a:bodyPr/>
           <a:lstStyle/>
           <a:p>
             <a:pPr lvl="0"/>
@@ -3813,13 +1595,13 @@
               <a:rPr lang="ko-KR" altLang="en-US" smtClean="0"/>
               <a:t>다섯째 수준</a:t>
             </a:r>
-            <a:endParaRPr lang="en-US" dirty="0"/>
-          </a:p>
-        </p:txBody>
-      </p:sp>
-      <p:sp>
-        <p:nvSpPr>
-          <p:cNvPr id="7" name="Date Placeholder 6"/>
+            <a:endParaRPr lang="ko-KR" altLang="en-US"/>
+          </a:p>
+        </p:txBody>
+      </p:sp>
+      <p:sp>
+        <p:nvSpPr>
+          <p:cNvPr id="7" name="날짜 개체 틀 6"/>
           <p:cNvSpPr>
             <a:spLocks noGrp="1"/>
           </p:cNvSpPr>
@@ -3842,7 +1624,7 @@
       </p:sp>
       <p:sp>
         <p:nvSpPr>
-          <p:cNvPr id="8" name="Footer Placeholder 7"/>
+          <p:cNvPr id="8" name="바닥글 개체 틀 7"/>
           <p:cNvSpPr>
             <a:spLocks noGrp="1"/>
           </p:cNvSpPr>
@@ -3861,7 +1643,7 @@
       </p:sp>
       <p:sp>
         <p:nvSpPr>
-          <p:cNvPr id="9" name="Slide Number Placeholder 8"/>
+          <p:cNvPr id="9" name="슬라이드 번호 개체 틀 8"/>
           <p:cNvSpPr>
             <a:spLocks noGrp="1"/>
           </p:cNvSpPr>
@@ -3885,7 +1667,7 @@
     </p:spTree>
     <p:extLst>
       <p:ext uri="{BB962C8B-B14F-4D97-AF65-F5344CB8AC3E}">
-        <p14:creationId xmlns:p14="http://schemas.microsoft.com/office/powerpoint/2010/main" val="1582941375"/>
+        <p14:creationId xmlns:p14="http://schemas.microsoft.com/office/powerpoint/2010/main" val="152947670"/>
       </p:ext>
     </p:extLst>
   </p:cSld>
@@ -3914,7 +1696,7 @@
       </p:grpSpPr>
       <p:sp>
         <p:nvSpPr>
-          <p:cNvPr id="2" name="Title 1"/>
+          <p:cNvPr id="2" name="제목 1"/>
           <p:cNvSpPr>
             <a:spLocks noGrp="1"/>
           </p:cNvSpPr>
@@ -3922,12 +1704,7 @@
             <p:ph type="title"/>
           </p:nvPr>
         </p:nvSpPr>
-        <p:spPr>
-          <a:xfrm>
-            <a:off x="677334" y="609600"/>
-            <a:ext cx="8596668" cy="1320800"/>
-          </a:xfrm>
-        </p:spPr>
+        <p:spPr/>
         <p:txBody>
           <a:bodyPr/>
           <a:lstStyle/>
@@ -3936,13 +1713,13 @@
               <a:rPr lang="ko-KR" altLang="en-US" smtClean="0"/>
               <a:t>마스터 제목 스타일 편집</a:t>
             </a:r>
-            <a:endParaRPr lang="en-US" dirty="0"/>
-          </a:p>
-        </p:txBody>
-      </p:sp>
-      <p:sp>
-        <p:nvSpPr>
-          <p:cNvPr id="3" name="Date Placeholder 2"/>
+            <a:endParaRPr lang="ko-KR" altLang="en-US"/>
+          </a:p>
+        </p:txBody>
+      </p:sp>
+      <p:sp>
+        <p:nvSpPr>
+          <p:cNvPr id="3" name="날짜 개체 틀 2"/>
           <p:cNvSpPr>
             <a:spLocks noGrp="1"/>
           </p:cNvSpPr>
@@ -3965,7 +1742,7 @@
       </p:sp>
       <p:sp>
         <p:nvSpPr>
-          <p:cNvPr id="4" name="Footer Placeholder 3"/>
+          <p:cNvPr id="4" name="바닥글 개체 틀 3"/>
           <p:cNvSpPr>
             <a:spLocks noGrp="1"/>
           </p:cNvSpPr>
@@ -3984,7 +1761,7 @@
       </p:sp>
       <p:sp>
         <p:nvSpPr>
-          <p:cNvPr id="5" name="Slide Number Placeholder 4"/>
+          <p:cNvPr id="5" name="슬라이드 번호 개체 틀 4"/>
           <p:cNvSpPr>
             <a:spLocks noGrp="1"/>
           </p:cNvSpPr>
@@ -4008,7 +1785,7 @@
     </p:spTree>
     <p:extLst>
       <p:ext uri="{BB962C8B-B14F-4D97-AF65-F5344CB8AC3E}">
-        <p14:creationId xmlns:p14="http://schemas.microsoft.com/office/powerpoint/2010/main" val="3836978747"/>
+        <p14:creationId xmlns:p14="http://schemas.microsoft.com/office/powerpoint/2010/main" val="1462895476"/>
       </p:ext>
     </p:extLst>
   </p:cSld>
@@ -4037,7 +1814,7 @@
       </p:grpSpPr>
       <p:sp>
         <p:nvSpPr>
-          <p:cNvPr id="2" name="Date Placeholder 1"/>
+          <p:cNvPr id="2" name="날짜 개체 틀 1"/>
           <p:cNvSpPr>
             <a:spLocks noGrp="1"/>
           </p:cNvSpPr>
@@ -4060,7 +1837,7 @@
       </p:sp>
       <p:sp>
         <p:nvSpPr>
-          <p:cNvPr id="3" name="Footer Placeholder 2"/>
+          <p:cNvPr id="3" name="바닥글 개체 틀 2"/>
           <p:cNvSpPr>
             <a:spLocks noGrp="1"/>
           </p:cNvSpPr>
@@ -4079,7 +1856,7 @@
       </p:sp>
       <p:sp>
         <p:nvSpPr>
-          <p:cNvPr id="4" name="Slide Number Placeholder 3"/>
+          <p:cNvPr id="4" name="슬라이드 번호 개체 틀 3"/>
           <p:cNvSpPr>
             <a:spLocks noGrp="1"/>
           </p:cNvSpPr>
@@ -4103,7 +1880,7 @@
     </p:spTree>
     <p:extLst>
       <p:ext uri="{BB962C8B-B14F-4D97-AF65-F5344CB8AC3E}">
-        <p14:creationId xmlns:p14="http://schemas.microsoft.com/office/powerpoint/2010/main" val="2226921263"/>
+        <p14:creationId xmlns:p14="http://schemas.microsoft.com/office/powerpoint/2010/main" val="464659876"/>
       </p:ext>
     </p:extLst>
   </p:cSld>
@@ -4132,7 +1909,7 @@
       </p:grpSpPr>
       <p:sp>
         <p:nvSpPr>
-          <p:cNvPr id="2" name="Title 1"/>
+          <p:cNvPr id="2" name="제목 1"/>
           <p:cNvSpPr>
             <a:spLocks noGrp="1"/>
           </p:cNvSpPr>
@@ -4142,17 +1919,15 @@
         </p:nvSpPr>
         <p:spPr>
           <a:xfrm>
-            <a:off x="677334" y="1498604"/>
-            <a:ext cx="3854528" cy="1278466"/>
-          </a:xfrm>
-        </p:spPr>
-        <p:txBody>
-          <a:bodyPr anchor="b">
-            <a:normAutofit/>
-          </a:bodyPr>
+            <a:off x="839788" y="457200"/>
+            <a:ext cx="3932237" cy="1600200"/>
+          </a:xfrm>
+        </p:spPr>
+        <p:txBody>
+          <a:bodyPr anchor="b"/>
           <a:lstStyle>
             <a:lvl1pPr>
-              <a:defRPr sz="2000"/>
+              <a:defRPr sz="3200"/>
             </a:lvl1pPr>
           </a:lstStyle>
           <a:p>
@@ -4160,13 +1935,13 @@
               <a:rPr lang="ko-KR" altLang="en-US" smtClean="0"/>
               <a:t>마스터 제목 스타일 편집</a:t>
             </a:r>
-            <a:endParaRPr lang="en-US" dirty="0"/>
-          </a:p>
-        </p:txBody>
-      </p:sp>
-      <p:sp>
-        <p:nvSpPr>
-          <p:cNvPr id="3" name="Content Placeholder 2"/>
+            <a:endParaRPr lang="ko-KR" altLang="en-US"/>
+          </a:p>
+        </p:txBody>
+      </p:sp>
+      <p:sp>
+        <p:nvSpPr>
+          <p:cNvPr id="3" name="내용 개체 틀 2"/>
           <p:cNvSpPr>
             <a:spLocks noGrp="1"/>
           </p:cNvSpPr>
@@ -4176,15 +1951,41 @@
         </p:nvSpPr>
         <p:spPr>
           <a:xfrm>
-            <a:off x="4760461" y="514924"/>
-            <a:ext cx="4513541" cy="5526437"/>
-          </a:xfrm>
-        </p:spPr>
-        <p:txBody>
-          <a:bodyPr>
-            <a:normAutofit/>
-          </a:bodyPr>
-          <a:lstStyle/>
+            <a:off x="5183188" y="987425"/>
+            <a:ext cx="6172200" cy="4873625"/>
+          </a:xfrm>
+        </p:spPr>
+        <p:txBody>
+          <a:bodyPr/>
+          <a:lstStyle>
+            <a:lvl1pPr>
+              <a:defRPr sz="3200"/>
+            </a:lvl1pPr>
+            <a:lvl2pPr>
+              <a:defRPr sz="2800"/>
+            </a:lvl2pPr>
+            <a:lvl3pPr>
+              <a:defRPr sz="2400"/>
+            </a:lvl3pPr>
+            <a:lvl4pPr>
+              <a:defRPr sz="2000"/>
+            </a:lvl4pPr>
+            <a:lvl5pPr>
+              <a:defRPr sz="2000"/>
+            </a:lvl5pPr>
+            <a:lvl6pPr>
+              <a:defRPr sz="2000"/>
+            </a:lvl6pPr>
+            <a:lvl7pPr>
+              <a:defRPr sz="2000"/>
+            </a:lvl7pPr>
+            <a:lvl8pPr>
+              <a:defRPr sz="2000"/>
+            </a:lvl8pPr>
+            <a:lvl9pPr>
+              <a:defRPr sz="2000"/>
+            </a:lvl9pPr>
+          </a:lstStyle>
           <a:p>
             <a:pPr lvl="0"/>
             <a:r>
@@ -4219,13 +2020,13 @@
               <a:rPr lang="ko-KR" altLang="en-US" smtClean="0"/>
               <a:t>다섯째 수준</a:t>
             </a:r>
-            <a:endParaRPr lang="en-US" dirty="0"/>
-          </a:p>
-        </p:txBody>
-      </p:sp>
-      <p:sp>
-        <p:nvSpPr>
-          <p:cNvPr id="4" name="Text Placeholder 3"/>
+            <a:endParaRPr lang="ko-KR" altLang="en-US"/>
+          </a:p>
+        </p:txBody>
+      </p:sp>
+      <p:sp>
+        <p:nvSpPr>
+          <p:cNvPr id="4" name="텍스트 개체 틀 3"/>
           <p:cNvSpPr>
             <a:spLocks noGrp="1"/>
           </p:cNvSpPr>
@@ -4235,48 +2036,46 @@
         </p:nvSpPr>
         <p:spPr>
           <a:xfrm>
-            <a:off x="677334" y="2777069"/>
-            <a:ext cx="3854528" cy="2584449"/>
-          </a:xfrm>
-        </p:spPr>
-        <p:txBody>
-          <a:bodyPr>
-            <a:normAutofit/>
-          </a:bodyPr>
+            <a:off x="839788" y="2057400"/>
+            <a:ext cx="3932237" cy="3811588"/>
+          </a:xfrm>
+        </p:spPr>
+        <p:txBody>
+          <a:bodyPr/>
           <a:lstStyle>
             <a:lvl1pPr marL="0" indent="0">
               <a:buNone/>
-              <a:defRPr sz="1400"/>
+              <a:defRPr sz="1600"/>
             </a:lvl1pPr>
-            <a:lvl2pPr marL="457063" indent="0">
+            <a:lvl2pPr marL="457200" indent="0">
               <a:buNone/>
               <a:defRPr sz="1400"/>
             </a:lvl2pPr>
-            <a:lvl3pPr marL="914126" indent="0">
+            <a:lvl3pPr marL="914400" indent="0">
               <a:buNone/>
               <a:defRPr sz="1200"/>
             </a:lvl3pPr>
-            <a:lvl4pPr marL="1371189" indent="0">
+            <a:lvl4pPr marL="1371600" indent="0">
               <a:buNone/>
               <a:defRPr sz="1000"/>
             </a:lvl4pPr>
-            <a:lvl5pPr marL="1828251" indent="0">
+            <a:lvl5pPr marL="1828800" indent="0">
               <a:buNone/>
               <a:defRPr sz="1000"/>
             </a:lvl5pPr>
-            <a:lvl6pPr marL="2285314" indent="0">
+            <a:lvl6pPr marL="2286000" indent="0">
               <a:buNone/>
               <a:defRPr sz="1000"/>
             </a:lvl6pPr>
-            <a:lvl7pPr marL="2742377" indent="0">
+            <a:lvl7pPr marL="2743200" indent="0">
               <a:buNone/>
               <a:defRPr sz="1000"/>
             </a:lvl7pPr>
-            <a:lvl8pPr marL="3199440" indent="0">
+            <a:lvl8pPr marL="3200400" indent="0">
               <a:buNone/>
               <a:defRPr sz="1000"/>
             </a:lvl8pPr>
-            <a:lvl9pPr marL="3656503" indent="0">
+            <a:lvl9pPr marL="3657600" indent="0">
               <a:buNone/>
               <a:defRPr sz="1000"/>
             </a:lvl9pPr>
@@ -4292,7 +2091,7 @@
       </p:sp>
       <p:sp>
         <p:nvSpPr>
-          <p:cNvPr id="5" name="Date Placeholder 4"/>
+          <p:cNvPr id="5" name="날짜 개체 틀 4"/>
           <p:cNvSpPr>
             <a:spLocks noGrp="1"/>
           </p:cNvSpPr>
@@ -4315,7 +2114,7 @@
       </p:sp>
       <p:sp>
         <p:nvSpPr>
-          <p:cNvPr id="6" name="Footer Placeholder 5"/>
+          <p:cNvPr id="6" name="바닥글 개체 틀 5"/>
           <p:cNvSpPr>
             <a:spLocks noGrp="1"/>
           </p:cNvSpPr>
@@ -4334,7 +2133,7 @@
       </p:sp>
       <p:sp>
         <p:nvSpPr>
-          <p:cNvPr id="7" name="Slide Number Placeholder 6"/>
+          <p:cNvPr id="7" name="슬라이드 번호 개체 틀 6"/>
           <p:cNvSpPr>
             <a:spLocks noGrp="1"/>
           </p:cNvSpPr>
@@ -4358,7 +2157,7 @@
     </p:spTree>
     <p:extLst>
       <p:ext uri="{BB962C8B-B14F-4D97-AF65-F5344CB8AC3E}">
-        <p14:creationId xmlns:p14="http://schemas.microsoft.com/office/powerpoint/2010/main" val="885721561"/>
+        <p14:creationId xmlns:p14="http://schemas.microsoft.com/office/powerpoint/2010/main" val="786322600"/>
       </p:ext>
     </p:extLst>
   </p:cSld>
@@ -4387,7 +2186,7 @@
       </p:grpSpPr>
       <p:sp>
         <p:nvSpPr>
-          <p:cNvPr id="2" name="Title 1"/>
+          <p:cNvPr id="2" name="제목 1"/>
           <p:cNvSpPr>
             <a:spLocks noGrp="1"/>
           </p:cNvSpPr>
@@ -4397,17 +2196,15 @@
         </p:nvSpPr>
         <p:spPr>
           <a:xfrm>
-            <a:off x="677334" y="4800600"/>
-            <a:ext cx="8596667" cy="566738"/>
-          </a:xfrm>
-        </p:spPr>
-        <p:txBody>
-          <a:bodyPr anchor="b">
-            <a:normAutofit/>
-          </a:bodyPr>
+            <a:off x="839788" y="457200"/>
+            <a:ext cx="3932237" cy="1600200"/>
+          </a:xfrm>
+        </p:spPr>
+        <p:txBody>
+          <a:bodyPr anchor="b"/>
           <a:lstStyle>
-            <a:lvl1pPr algn="l">
-              <a:defRPr sz="2400" b="0"/>
+            <a:lvl1pPr>
+              <a:defRPr sz="3200"/>
             </a:lvl1pPr>
           </a:lstStyle>
           <a:p>
@@ -4415,15 +2212,15 @@
               <a:rPr lang="ko-KR" altLang="en-US" smtClean="0"/>
               <a:t>마스터 제목 스타일 편집</a:t>
             </a:r>
-            <a:endParaRPr lang="en-US" dirty="0"/>
-          </a:p>
-        </p:txBody>
-      </p:sp>
-      <p:sp>
-        <p:nvSpPr>
-          <p:cNvPr id="3" name="Picture Placeholder 2"/>
-          <p:cNvSpPr>
-            <a:spLocks noGrp="1" noChangeAspect="1"/>
+            <a:endParaRPr lang="ko-KR" altLang="en-US"/>
+          </a:p>
+        </p:txBody>
+      </p:sp>
+      <p:sp>
+        <p:nvSpPr>
+          <p:cNvPr id="3" name="그림 개체 틀 2"/>
+          <p:cNvSpPr>
+            <a:spLocks noGrp="1"/>
           </p:cNvSpPr>
           <p:nvPr>
             <p:ph type="pic" idx="1"/>
@@ -4431,120 +2228,112 @@
         </p:nvSpPr>
         <p:spPr>
           <a:xfrm>
-            <a:off x="677334" y="609600"/>
-            <a:ext cx="8596668" cy="3845718"/>
-          </a:xfrm>
-        </p:spPr>
-        <p:txBody>
-          <a:bodyPr anchor="t">
-            <a:normAutofit/>
-          </a:bodyPr>
+            <a:off x="5183188" y="987425"/>
+            <a:ext cx="6172200" cy="4873625"/>
+          </a:xfrm>
+        </p:spPr>
+        <p:txBody>
+          <a:bodyPr/>
           <a:lstStyle>
-            <a:lvl1pPr marL="0" indent="0" algn="ctr">
+            <a:lvl1pPr marL="0" indent="0">
+              <a:buNone/>
+              <a:defRPr sz="3200"/>
+            </a:lvl1pPr>
+            <a:lvl2pPr marL="457200" indent="0">
+              <a:buNone/>
+              <a:defRPr sz="2800"/>
+            </a:lvl2pPr>
+            <a:lvl3pPr marL="914400" indent="0">
+              <a:buNone/>
+              <a:defRPr sz="2400"/>
+            </a:lvl3pPr>
+            <a:lvl4pPr marL="1371600" indent="0">
+              <a:buNone/>
+              <a:defRPr sz="2000"/>
+            </a:lvl4pPr>
+            <a:lvl5pPr marL="1828800" indent="0">
+              <a:buNone/>
+              <a:defRPr sz="2000"/>
+            </a:lvl5pPr>
+            <a:lvl6pPr marL="2286000" indent="0">
+              <a:buNone/>
+              <a:defRPr sz="2000"/>
+            </a:lvl6pPr>
+            <a:lvl7pPr marL="2743200" indent="0">
+              <a:buNone/>
+              <a:defRPr sz="2000"/>
+            </a:lvl7pPr>
+            <a:lvl8pPr marL="3200400" indent="0">
+              <a:buNone/>
+              <a:defRPr sz="2000"/>
+            </a:lvl8pPr>
+            <a:lvl9pPr marL="3657600" indent="0">
+              <a:buNone/>
+              <a:defRPr sz="2000"/>
+            </a:lvl9pPr>
+          </a:lstStyle>
+          <a:p>
+            <a:endParaRPr lang="ko-KR" altLang="en-US"/>
+          </a:p>
+        </p:txBody>
+      </p:sp>
+      <p:sp>
+        <p:nvSpPr>
+          <p:cNvPr id="4" name="텍스트 개체 틀 3"/>
+          <p:cNvSpPr>
+            <a:spLocks noGrp="1"/>
+          </p:cNvSpPr>
+          <p:nvPr>
+            <p:ph type="body" sz="half" idx="2"/>
+          </p:nvPr>
+        </p:nvSpPr>
+        <p:spPr>
+          <a:xfrm>
+            <a:off x="839788" y="2057400"/>
+            <a:ext cx="3932237" cy="3811588"/>
+          </a:xfrm>
+        </p:spPr>
+        <p:txBody>
+          <a:bodyPr/>
+          <a:lstStyle>
+            <a:lvl1pPr marL="0" indent="0">
               <a:buNone/>
               <a:defRPr sz="1600"/>
             </a:lvl1pPr>
             <a:lvl2pPr marL="457200" indent="0">
               <a:buNone/>
-              <a:defRPr sz="1600"/>
+              <a:defRPr sz="1400"/>
             </a:lvl2pPr>
             <a:lvl3pPr marL="914400" indent="0">
               <a:buNone/>
-              <a:defRPr sz="1600"/>
+              <a:defRPr sz="1200"/>
             </a:lvl3pPr>
             <a:lvl4pPr marL="1371600" indent="0">
               <a:buNone/>
-              <a:defRPr sz="1600"/>
+              <a:defRPr sz="1000"/>
             </a:lvl4pPr>
             <a:lvl5pPr marL="1828800" indent="0">
               <a:buNone/>
-              <a:defRPr sz="1600"/>
+              <a:defRPr sz="1000"/>
             </a:lvl5pPr>
             <a:lvl6pPr marL="2286000" indent="0">
               <a:buNone/>
-              <a:defRPr sz="1600"/>
+              <a:defRPr sz="1000"/>
             </a:lvl6pPr>
             <a:lvl7pPr marL="2743200" indent="0">
               <a:buNone/>
-              <a:defRPr sz="1600"/>
+              <a:defRPr sz="1000"/>
             </a:lvl7pPr>
             <a:lvl8pPr marL="3200400" indent="0">
               <a:buNone/>
-              <a:defRPr sz="1600"/>
+              <a:defRPr sz="1000"/>
             </a:lvl8pPr>
             <a:lvl9pPr marL="3657600" indent="0">
               <a:buNone/>
-              <a:defRPr sz="1600"/>
+              <a:defRPr sz="1000"/>
             </a:lvl9pPr>
           </a:lstStyle>
           <a:p>
-            <a:r>
-              <a:rPr lang="ko-KR" altLang="en-US" smtClean="0"/>
-              <a:t>그림을 추가하려면 아이콘을 클릭하십시오</a:t>
-            </a:r>
-            <a:endParaRPr lang="en-US" dirty="0"/>
-          </a:p>
-        </p:txBody>
-      </p:sp>
-      <p:sp>
-        <p:nvSpPr>
-          <p:cNvPr id="4" name="Text Placeholder 3"/>
-          <p:cNvSpPr>
-            <a:spLocks noGrp="1"/>
-          </p:cNvSpPr>
-          <p:nvPr>
-            <p:ph type="body" sz="half" idx="2"/>
-          </p:nvPr>
-        </p:nvSpPr>
-        <p:spPr>
-          <a:xfrm>
-            <a:off x="677334" y="5367338"/>
-            <a:ext cx="8596667" cy="674024"/>
-          </a:xfrm>
-        </p:spPr>
-        <p:txBody>
-          <a:bodyPr>
-            <a:normAutofit/>
-          </a:bodyPr>
-          <a:lstStyle>
-            <a:lvl1pPr marL="0" indent="0">
-              <a:buNone/>
-              <a:defRPr sz="1200"/>
-            </a:lvl1pPr>
-            <a:lvl2pPr marL="457200" indent="0">
-              <a:buNone/>
-              <a:defRPr sz="1200"/>
-            </a:lvl2pPr>
-            <a:lvl3pPr marL="914400" indent="0">
-              <a:buNone/>
-              <a:defRPr sz="1000"/>
-            </a:lvl3pPr>
-            <a:lvl4pPr marL="1371600" indent="0">
-              <a:buNone/>
-              <a:defRPr sz="900"/>
-            </a:lvl4pPr>
-            <a:lvl5pPr marL="1828800" indent="0">
-              <a:buNone/>
-              <a:defRPr sz="900"/>
-            </a:lvl5pPr>
-            <a:lvl6pPr marL="2286000" indent="0">
-              <a:buNone/>
-              <a:defRPr sz="900"/>
-            </a:lvl6pPr>
-            <a:lvl7pPr marL="2743200" indent="0">
-              <a:buNone/>
-              <a:defRPr sz="900"/>
-            </a:lvl7pPr>
-            <a:lvl8pPr marL="3200400" indent="0">
-              <a:buNone/>
-              <a:defRPr sz="900"/>
-            </a:lvl8pPr>
-            <a:lvl9pPr marL="3657600" indent="0">
-              <a:buNone/>
-              <a:defRPr sz="900"/>
-            </a:lvl9pPr>
-          </a:lstStyle>
-          <a:p>
             <a:pPr lvl="0"/>
             <a:r>
               <a:rPr lang="ko-KR" altLang="en-US" smtClean="0"/>
@@ -4555,7 +2344,7 @@
       </p:sp>
       <p:sp>
         <p:nvSpPr>
-          <p:cNvPr id="5" name="Date Placeholder 4"/>
+          <p:cNvPr id="5" name="날짜 개체 틀 4"/>
           <p:cNvSpPr>
             <a:spLocks noGrp="1"/>
           </p:cNvSpPr>
@@ -4578,7 +2367,7 @@
       </p:sp>
       <p:sp>
         <p:nvSpPr>
-          <p:cNvPr id="6" name="Footer Placeholder 5"/>
+          <p:cNvPr id="6" name="바닥글 개체 틀 5"/>
           <p:cNvSpPr>
             <a:spLocks noGrp="1"/>
           </p:cNvSpPr>
@@ -4597,7 +2386,7 @@
       </p:sp>
       <p:sp>
         <p:nvSpPr>
-          <p:cNvPr id="7" name="Slide Number Placeholder 6"/>
+          <p:cNvPr id="7" name="슬라이드 번호 개체 틀 6"/>
           <p:cNvSpPr>
             <a:spLocks noGrp="1"/>
           </p:cNvSpPr>
@@ -4621,7 +2410,7 @@
     </p:spTree>
     <p:extLst>
       <p:ext uri="{BB962C8B-B14F-4D97-AF65-F5344CB8AC3E}">
-        <p14:creationId xmlns:p14="http://schemas.microsoft.com/office/powerpoint/2010/main" val="2630525842"/>
+        <p14:creationId xmlns:p14="http://schemas.microsoft.com/office/powerpoint/2010/main" val="3531502792"/>
       </p:ext>
     </p:extLst>
   </p:cSld>
@@ -4653,539 +2442,9 @@
           <a:chExt cx="0" cy="0"/>
         </a:xfrm>
       </p:grpSpPr>
-      <p:grpSp>
-        <p:nvGrpSpPr>
-          <p:cNvPr id="7" name="Group 6"/>
-          <p:cNvGrpSpPr/>
-          <p:nvPr/>
-        </p:nvGrpSpPr>
-        <p:grpSpPr>
-          <a:xfrm>
-            <a:off x="0" y="-8467"/>
-            <a:ext cx="12192000" cy="6866467"/>
-            <a:chOff x="0" y="-8467"/>
-            <a:chExt cx="12192000" cy="6866467"/>
-          </a:xfrm>
-        </p:grpSpPr>
-        <p:cxnSp>
-          <p:nvCxnSpPr>
-            <p:cNvPr id="20" name="Straight Connector 19"/>
-            <p:cNvCxnSpPr/>
-            <p:nvPr/>
-          </p:nvCxnSpPr>
-          <p:spPr>
-            <a:xfrm>
-              <a:off x="9371012" y="0"/>
-              <a:ext cx="1219200" cy="6858000"/>
-            </a:xfrm>
-            <a:prstGeom prst="line">
-              <a:avLst/>
-            </a:prstGeom>
-            <a:ln w="9525">
-              <a:solidFill>
-                <a:schemeClr val="bg1">
-                  <a:lumMod val="75000"/>
-                </a:schemeClr>
-              </a:solidFill>
-            </a:ln>
-          </p:spPr>
-          <p:style>
-            <a:lnRef idx="2">
-              <a:schemeClr val="accent1"/>
-            </a:lnRef>
-            <a:fillRef idx="0">
-              <a:schemeClr val="accent1"/>
-            </a:fillRef>
-            <a:effectRef idx="1">
-              <a:schemeClr val="accent1"/>
-            </a:effectRef>
-            <a:fontRef idx="minor">
-              <a:schemeClr val="tx1"/>
-            </a:fontRef>
-          </p:style>
-        </p:cxnSp>
-        <p:cxnSp>
-          <p:nvCxnSpPr>
-            <p:cNvPr id="21" name="Straight Connector 20"/>
-            <p:cNvCxnSpPr/>
-            <p:nvPr/>
-          </p:nvCxnSpPr>
-          <p:spPr>
-            <a:xfrm flipH="1">
-              <a:off x="7425267" y="3681413"/>
-              <a:ext cx="4763558" cy="3176587"/>
-            </a:xfrm>
-            <a:prstGeom prst="line">
-              <a:avLst/>
-            </a:prstGeom>
-            <a:ln w="9525">
-              <a:solidFill>
-                <a:schemeClr val="bg1">
-                  <a:lumMod val="85000"/>
-                </a:schemeClr>
-              </a:solidFill>
-            </a:ln>
-          </p:spPr>
-          <p:style>
-            <a:lnRef idx="2">
-              <a:schemeClr val="accent1"/>
-            </a:lnRef>
-            <a:fillRef idx="0">
-              <a:schemeClr val="accent1"/>
-            </a:fillRef>
-            <a:effectRef idx="1">
-              <a:schemeClr val="accent1"/>
-            </a:effectRef>
-            <a:fontRef idx="minor">
-              <a:schemeClr val="tx1"/>
-            </a:fontRef>
-          </p:style>
-        </p:cxnSp>
-        <p:sp>
-          <p:nvSpPr>
-            <p:cNvPr id="22" name="Rectangle 23"/>
-            <p:cNvSpPr/>
-            <p:nvPr/>
-          </p:nvSpPr>
-          <p:spPr>
-            <a:xfrm>
-              <a:off x="9181476" y="-8467"/>
-              <a:ext cx="3007349" cy="6866467"/>
-            </a:xfrm>
-            <a:custGeom>
-              <a:avLst/>
-              <a:gdLst/>
-              <a:ahLst/>
-              <a:cxnLst/>
-              <a:rect l="l" t="t" r="r" b="b"/>
-              <a:pathLst>
-                <a:path w="3007349" h="6866467">
-                  <a:moveTo>
-                    <a:pt x="2045532" y="0"/>
-                  </a:moveTo>
-                  <a:lnTo>
-                    <a:pt x="3007349" y="0"/>
-                  </a:lnTo>
-                  <a:lnTo>
-                    <a:pt x="3007349" y="6866467"/>
-                  </a:lnTo>
-                  <a:lnTo>
-                    <a:pt x="0" y="6866467"/>
-                  </a:lnTo>
-                  <a:lnTo>
-                    <a:pt x="2045532" y="0"/>
-                  </a:lnTo>
-                  <a:close/>
-                </a:path>
-              </a:pathLst>
-            </a:custGeom>
-            <a:solidFill>
-              <a:schemeClr val="accent1">
-                <a:alpha val="30000"/>
-              </a:schemeClr>
-            </a:solidFill>
-            <a:ln>
-              <a:noFill/>
-            </a:ln>
-            <a:effectLst/>
-          </p:spPr>
-          <p:style>
-            <a:lnRef idx="1">
-              <a:schemeClr val="accent1"/>
-            </a:lnRef>
-            <a:fillRef idx="3">
-              <a:schemeClr val="accent1"/>
-            </a:fillRef>
-            <a:effectRef idx="2">
-              <a:schemeClr val="accent1"/>
-            </a:effectRef>
-            <a:fontRef idx="minor">
-              <a:schemeClr val="lt1"/>
-            </a:fontRef>
-          </p:style>
-        </p:sp>
-        <p:sp>
-          <p:nvSpPr>
-            <p:cNvPr id="23" name="Rectangle 25"/>
-            <p:cNvSpPr/>
-            <p:nvPr/>
-          </p:nvSpPr>
-          <p:spPr>
-            <a:xfrm>
-              <a:off x="9603442" y="-8467"/>
-              <a:ext cx="2588558" cy="6866467"/>
-            </a:xfrm>
-            <a:custGeom>
-              <a:avLst/>
-              <a:gdLst/>
-              <a:ahLst/>
-              <a:cxnLst/>
-              <a:rect l="l" t="t" r="r" b="b"/>
-              <a:pathLst>
-                <a:path w="2573311" h="6866467">
-                  <a:moveTo>
-                    <a:pt x="0" y="0"/>
-                  </a:moveTo>
-                  <a:lnTo>
-                    <a:pt x="2573311" y="0"/>
-                  </a:lnTo>
-                  <a:lnTo>
-                    <a:pt x="2573311" y="6866467"/>
-                  </a:lnTo>
-                  <a:lnTo>
-                    <a:pt x="1202336" y="6866467"/>
-                  </a:lnTo>
-                  <a:lnTo>
-                    <a:pt x="0" y="0"/>
-                  </a:lnTo>
-                  <a:close/>
-                </a:path>
-              </a:pathLst>
-            </a:custGeom>
-            <a:solidFill>
-              <a:schemeClr val="accent1">
-                <a:alpha val="20000"/>
-              </a:schemeClr>
-            </a:solidFill>
-            <a:ln>
-              <a:noFill/>
-            </a:ln>
-            <a:effectLst/>
-          </p:spPr>
-          <p:style>
-            <a:lnRef idx="1">
-              <a:schemeClr val="accent1"/>
-            </a:lnRef>
-            <a:fillRef idx="3">
-              <a:schemeClr val="accent1"/>
-            </a:fillRef>
-            <a:effectRef idx="2">
-              <a:schemeClr val="accent1"/>
-            </a:effectRef>
-            <a:fontRef idx="minor">
-              <a:schemeClr val="lt1"/>
-            </a:fontRef>
-          </p:style>
-        </p:sp>
-        <p:sp>
-          <p:nvSpPr>
-            <p:cNvPr id="24" name="Isosceles Triangle 23"/>
-            <p:cNvSpPr/>
-            <p:nvPr/>
-          </p:nvSpPr>
-          <p:spPr>
-            <a:xfrm>
-              <a:off x="8932333" y="3048000"/>
-              <a:ext cx="3259667" cy="3810000"/>
-            </a:xfrm>
-            <a:prstGeom prst="triangle">
-              <a:avLst>
-                <a:gd name="adj" fmla="val 100000"/>
-              </a:avLst>
-            </a:prstGeom>
-            <a:solidFill>
-              <a:schemeClr val="accent2">
-                <a:alpha val="72000"/>
-              </a:schemeClr>
-            </a:solidFill>
-            <a:ln>
-              <a:noFill/>
-            </a:ln>
-            <a:effectLst/>
-          </p:spPr>
-          <p:style>
-            <a:lnRef idx="1">
-              <a:schemeClr val="accent1"/>
-            </a:lnRef>
-            <a:fillRef idx="3">
-              <a:schemeClr val="accent1"/>
-            </a:fillRef>
-            <a:effectRef idx="2">
-              <a:schemeClr val="accent1"/>
-            </a:effectRef>
-            <a:fontRef idx="minor">
-              <a:schemeClr val="lt1"/>
-            </a:fontRef>
-          </p:style>
-        </p:sp>
-        <p:sp>
-          <p:nvSpPr>
-            <p:cNvPr id="25" name="Rectangle 27"/>
-            <p:cNvSpPr/>
-            <p:nvPr/>
-          </p:nvSpPr>
-          <p:spPr>
-            <a:xfrm>
-              <a:off x="9334500" y="-8467"/>
-              <a:ext cx="2854326" cy="6866467"/>
-            </a:xfrm>
-            <a:custGeom>
-              <a:avLst/>
-              <a:gdLst/>
-              <a:ahLst/>
-              <a:cxnLst/>
-              <a:rect l="l" t="t" r="r" b="b"/>
-              <a:pathLst>
-                <a:path w="2858013" h="6866467">
-                  <a:moveTo>
-                    <a:pt x="0" y="0"/>
-                  </a:moveTo>
-                  <a:lnTo>
-                    <a:pt x="2858013" y="0"/>
-                  </a:lnTo>
-                  <a:lnTo>
-                    <a:pt x="2858013" y="6866467"/>
-                  </a:lnTo>
-                  <a:lnTo>
-                    <a:pt x="2473942" y="6866467"/>
-                  </a:lnTo>
-                  <a:lnTo>
-                    <a:pt x="0" y="0"/>
-                  </a:lnTo>
-                  <a:close/>
-                </a:path>
-              </a:pathLst>
-            </a:custGeom>
-            <a:solidFill>
-              <a:schemeClr val="accent2">
-                <a:lumMod val="75000"/>
-                <a:alpha val="70000"/>
-              </a:schemeClr>
-            </a:solidFill>
-            <a:ln>
-              <a:noFill/>
-            </a:ln>
-            <a:effectLst/>
-          </p:spPr>
-          <p:style>
-            <a:lnRef idx="1">
-              <a:schemeClr val="accent1"/>
-            </a:lnRef>
-            <a:fillRef idx="3">
-              <a:schemeClr val="accent1"/>
-            </a:fillRef>
-            <a:effectRef idx="2">
-              <a:schemeClr val="accent1"/>
-            </a:effectRef>
-            <a:fontRef idx="minor">
-              <a:schemeClr val="lt1"/>
-            </a:fontRef>
-          </p:style>
-        </p:sp>
-        <p:sp>
-          <p:nvSpPr>
-            <p:cNvPr id="26" name="Rectangle 28"/>
-            <p:cNvSpPr/>
-            <p:nvPr/>
-          </p:nvSpPr>
-          <p:spPr>
-            <a:xfrm>
-              <a:off x="10898730" y="-8467"/>
-              <a:ext cx="1290094" cy="6866467"/>
-            </a:xfrm>
-            <a:custGeom>
-              <a:avLst/>
-              <a:gdLst/>
-              <a:ahLst/>
-              <a:cxnLst/>
-              <a:rect l="l" t="t" r="r" b="b"/>
-              <a:pathLst>
-                <a:path w="1290094" h="6858000">
-                  <a:moveTo>
-                    <a:pt x="1019735" y="0"/>
-                  </a:moveTo>
-                  <a:lnTo>
-                    <a:pt x="1290094" y="0"/>
-                  </a:lnTo>
-                  <a:lnTo>
-                    <a:pt x="1290094" y="6858000"/>
-                  </a:lnTo>
-                  <a:lnTo>
-                    <a:pt x="0" y="6858000"/>
-                  </a:lnTo>
-                  <a:lnTo>
-                    <a:pt x="1019735" y="0"/>
-                  </a:lnTo>
-                  <a:close/>
-                </a:path>
-              </a:pathLst>
-            </a:custGeom>
-            <a:solidFill>
-              <a:schemeClr val="accent1">
-                <a:lumMod val="60000"/>
-                <a:lumOff val="40000"/>
-                <a:alpha val="70000"/>
-              </a:schemeClr>
-            </a:solidFill>
-            <a:ln>
-              <a:noFill/>
-            </a:ln>
-            <a:effectLst/>
-          </p:spPr>
-          <p:style>
-            <a:lnRef idx="1">
-              <a:schemeClr val="accent1"/>
-            </a:lnRef>
-            <a:fillRef idx="3">
-              <a:schemeClr val="accent1"/>
-            </a:fillRef>
-            <a:effectRef idx="2">
-              <a:schemeClr val="accent1"/>
-            </a:effectRef>
-            <a:fontRef idx="minor">
-              <a:schemeClr val="lt1"/>
-            </a:fontRef>
-          </p:style>
-        </p:sp>
-        <p:sp>
-          <p:nvSpPr>
-            <p:cNvPr id="27" name="Rectangle 29"/>
-            <p:cNvSpPr/>
-            <p:nvPr/>
-          </p:nvSpPr>
-          <p:spPr>
-            <a:xfrm>
-              <a:off x="10938999" y="-8467"/>
-              <a:ext cx="1249825" cy="6866467"/>
-            </a:xfrm>
-            <a:custGeom>
-              <a:avLst/>
-              <a:gdLst/>
-              <a:ahLst/>
-              <a:cxnLst/>
-              <a:rect l="l" t="t" r="r" b="b"/>
-              <a:pathLst>
-                <a:path w="1249825" h="6858000">
-                  <a:moveTo>
-                    <a:pt x="0" y="0"/>
-                  </a:moveTo>
-                  <a:lnTo>
-                    <a:pt x="1249825" y="0"/>
-                  </a:lnTo>
-                  <a:lnTo>
-                    <a:pt x="1249825" y="6858000"/>
-                  </a:lnTo>
-                  <a:lnTo>
-                    <a:pt x="1109382" y="6858000"/>
-                  </a:lnTo>
-                  <a:lnTo>
-                    <a:pt x="0" y="0"/>
-                  </a:lnTo>
-                  <a:close/>
-                </a:path>
-              </a:pathLst>
-            </a:custGeom>
-            <a:solidFill>
-              <a:schemeClr val="accent1">
-                <a:alpha val="65000"/>
-              </a:schemeClr>
-            </a:solidFill>
-            <a:ln>
-              <a:noFill/>
-            </a:ln>
-            <a:effectLst/>
-          </p:spPr>
-          <p:style>
-            <a:lnRef idx="1">
-              <a:schemeClr val="accent1"/>
-            </a:lnRef>
-            <a:fillRef idx="3">
-              <a:schemeClr val="accent1"/>
-            </a:fillRef>
-            <a:effectRef idx="2">
-              <a:schemeClr val="accent1"/>
-            </a:effectRef>
-            <a:fontRef idx="minor">
-              <a:schemeClr val="lt1"/>
-            </a:fontRef>
-          </p:style>
-        </p:sp>
-        <p:sp>
-          <p:nvSpPr>
-            <p:cNvPr id="28" name="Isosceles Triangle 27"/>
-            <p:cNvSpPr/>
-            <p:nvPr/>
-          </p:nvSpPr>
-          <p:spPr>
-            <a:xfrm>
-              <a:off x="10371666" y="3589867"/>
-              <a:ext cx="1817159" cy="3268133"/>
-            </a:xfrm>
-            <a:prstGeom prst="triangle">
-              <a:avLst>
-                <a:gd name="adj" fmla="val 100000"/>
-              </a:avLst>
-            </a:prstGeom>
-            <a:solidFill>
-              <a:schemeClr val="accent1">
-                <a:alpha val="80000"/>
-              </a:schemeClr>
-            </a:solidFill>
-            <a:ln>
-              <a:noFill/>
-            </a:ln>
-            <a:effectLst/>
-          </p:spPr>
-          <p:style>
-            <a:lnRef idx="1">
-              <a:schemeClr val="accent1"/>
-            </a:lnRef>
-            <a:fillRef idx="3">
-              <a:schemeClr val="accent1"/>
-            </a:fillRef>
-            <a:effectRef idx="2">
-              <a:schemeClr val="accent1"/>
-            </a:effectRef>
-            <a:fontRef idx="minor">
-              <a:schemeClr val="lt1"/>
-            </a:fontRef>
-          </p:style>
-        </p:sp>
-        <p:sp>
-          <p:nvSpPr>
-            <p:cNvPr id="29" name="Isosceles Triangle 28"/>
-            <p:cNvSpPr/>
-            <p:nvPr/>
-          </p:nvSpPr>
-          <p:spPr>
-            <a:xfrm>
-              <a:off x="0" y="4013200"/>
-              <a:ext cx="448733" cy="2844800"/>
-            </a:xfrm>
-            <a:prstGeom prst="triangle">
-              <a:avLst>
-                <a:gd name="adj" fmla="val 0"/>
-              </a:avLst>
-            </a:prstGeom>
-            <a:solidFill>
-              <a:schemeClr val="accent1">
-                <a:alpha val="85000"/>
-              </a:schemeClr>
-            </a:solidFill>
-            <a:ln>
-              <a:noFill/>
-            </a:ln>
-            <a:effectLst/>
-          </p:spPr>
-          <p:style>
-            <a:lnRef idx="1">
-              <a:schemeClr val="accent1"/>
-            </a:lnRef>
-            <a:fillRef idx="3">
-              <a:schemeClr val="accent1"/>
-            </a:fillRef>
-            <a:effectRef idx="2">
-              <a:schemeClr val="accent1"/>
-            </a:effectRef>
-            <a:fontRef idx="minor">
-              <a:schemeClr val="lt1"/>
-            </a:fontRef>
-          </p:style>
-        </p:sp>
-      </p:grpSp>
-      <p:sp>
-        <p:nvSpPr>
-          <p:cNvPr id="2" name="Title Placeholder 1"/>
+      <p:sp>
+        <p:nvSpPr>
+          <p:cNvPr id="2" name="제목 개체 틀 1"/>
           <p:cNvSpPr>
             <a:spLocks noGrp="1"/>
           </p:cNvSpPr>
@@ -5195,15 +2454,15 @@
         </p:nvSpPr>
         <p:spPr>
           <a:xfrm>
-            <a:off x="677334" y="609600"/>
-            <a:ext cx="8596668" cy="1320800"/>
+            <a:off x="838200" y="365125"/>
+            <a:ext cx="10515600" cy="1325563"/>
           </a:xfrm>
           <a:prstGeom prst="rect">
             <a:avLst/>
           </a:prstGeom>
         </p:spPr>
         <p:txBody>
-          <a:bodyPr vert="horz" lIns="91440" tIns="45720" rIns="91440" bIns="45720" rtlCol="0" anchor="t">
+          <a:bodyPr vert="horz" lIns="91440" tIns="45720" rIns="91440" bIns="45720" rtlCol="0" anchor="ctr">
             <a:normAutofit/>
           </a:bodyPr>
           <a:lstStyle/>
@@ -5212,13 +2471,13 @@
               <a:rPr lang="ko-KR" altLang="en-US" smtClean="0"/>
               <a:t>마스터 제목 스타일 편집</a:t>
             </a:r>
-            <a:endParaRPr lang="en-US" dirty="0"/>
-          </a:p>
-        </p:txBody>
-      </p:sp>
-      <p:sp>
-        <p:nvSpPr>
-          <p:cNvPr id="3" name="Text Placeholder 2"/>
+            <a:endParaRPr lang="ko-KR" altLang="en-US"/>
+          </a:p>
+        </p:txBody>
+      </p:sp>
+      <p:sp>
+        <p:nvSpPr>
+          <p:cNvPr id="3" name="텍스트 개체 틀 2"/>
           <p:cNvSpPr>
             <a:spLocks noGrp="1"/>
           </p:cNvSpPr>
@@ -5228,8 +2487,8 @@
         </p:nvSpPr>
         <p:spPr>
           <a:xfrm>
-            <a:off x="677334" y="2160589"/>
-            <a:ext cx="8596668" cy="3880773"/>
+            <a:off x="838200" y="1825625"/>
+            <a:ext cx="10515600" cy="4351338"/>
           </a:xfrm>
           <a:prstGeom prst="rect">
             <a:avLst/>
@@ -5274,13 +2533,13 @@
               <a:rPr lang="ko-KR" altLang="en-US" smtClean="0"/>
               <a:t>다섯째 수준</a:t>
             </a:r>
-            <a:endParaRPr lang="en-US" dirty="0"/>
-          </a:p>
-        </p:txBody>
-      </p:sp>
-      <p:sp>
-        <p:nvSpPr>
-          <p:cNvPr id="4" name="Date Placeholder 3"/>
+            <a:endParaRPr lang="ko-KR" altLang="en-US"/>
+          </a:p>
+        </p:txBody>
+      </p:sp>
+      <p:sp>
+        <p:nvSpPr>
+          <p:cNvPr id="4" name="날짜 개체 틀 3"/>
           <p:cNvSpPr>
             <a:spLocks noGrp="1"/>
           </p:cNvSpPr>
@@ -5290,8 +2549,8 @@
         </p:nvSpPr>
         <p:spPr>
           <a:xfrm>
-            <a:off x="7205133" y="6041362"/>
-            <a:ext cx="911939" cy="365125"/>
+            <a:off x="838200" y="6356350"/>
+            <a:ext cx="2743200" cy="365125"/>
           </a:xfrm>
           <a:prstGeom prst="rect">
             <a:avLst/>
@@ -5300,8 +2559,8 @@
         <p:txBody>
           <a:bodyPr vert="horz" lIns="91440" tIns="45720" rIns="91440" bIns="45720" rtlCol="0" anchor="ctr"/>
           <a:lstStyle>
-            <a:lvl1pPr algn="r">
-              <a:defRPr sz="900">
+            <a:lvl1pPr algn="l">
+              <a:defRPr sz="1200">
                 <a:solidFill>
                   <a:schemeClr val="tx1">
                     <a:tint val="75000"/>
@@ -5321,7 +2580,7 @@
       </p:sp>
       <p:sp>
         <p:nvSpPr>
-          <p:cNvPr id="5" name="Footer Placeholder 4"/>
+          <p:cNvPr id="5" name="바닥글 개체 틀 4"/>
           <p:cNvSpPr>
             <a:spLocks noGrp="1"/>
           </p:cNvSpPr>
@@ -5331,8 +2590,8 @@
         </p:nvSpPr>
         <p:spPr>
           <a:xfrm>
-            <a:off x="677334" y="6041362"/>
-            <a:ext cx="6297612" cy="365125"/>
+            <a:off x="4038600" y="6356350"/>
+            <a:ext cx="4114800" cy="365125"/>
           </a:xfrm>
           <a:prstGeom prst="rect">
             <a:avLst/>
@@ -5341,8 +2600,8 @@
         <p:txBody>
           <a:bodyPr vert="horz" lIns="91440" tIns="45720" rIns="91440" bIns="45720" rtlCol="0" anchor="ctr"/>
           <a:lstStyle>
-            <a:lvl1pPr algn="l">
-              <a:defRPr sz="900">
+            <a:lvl1pPr algn="ctr">
+              <a:defRPr sz="1200">
                 <a:solidFill>
                   <a:schemeClr val="tx1">
                     <a:tint val="75000"/>
@@ -5358,7 +2617,7 @@
       </p:sp>
       <p:sp>
         <p:nvSpPr>
-          <p:cNvPr id="6" name="Slide Number Placeholder 5"/>
+          <p:cNvPr id="6" name="슬라이드 번호 개체 틀 5"/>
           <p:cNvSpPr>
             <a:spLocks noGrp="1"/>
           </p:cNvSpPr>
@@ -5368,8 +2627,8 @@
         </p:nvSpPr>
         <p:spPr>
           <a:xfrm>
-            <a:off x="8590663" y="6041362"/>
-            <a:ext cx="683339" cy="365125"/>
+            <a:off x="8610600" y="6356350"/>
+            <a:ext cx="2743200" cy="365125"/>
           </a:xfrm>
           <a:prstGeom prst="rect">
             <a:avLst/>
@@ -5379,9 +2638,11 @@
           <a:bodyPr vert="horz" lIns="91440" tIns="45720" rIns="91440" bIns="45720" rtlCol="0" anchor="ctr"/>
           <a:lstStyle>
             <a:lvl1pPr algn="r">
-              <a:defRPr sz="900">
-                <a:solidFill>
-                  <a:schemeClr val="accent1"/>
+              <a:defRPr sz="1200">
+                <a:solidFill>
+                  <a:schemeClr val="tx1">
+                    <a:tint val="75000"/>
+                  </a:schemeClr>
                 </a:solidFill>
               </a:defRPr>
             </a:lvl1pPr>
@@ -5398,322 +2659,201 @@
     </p:spTree>
     <p:extLst>
       <p:ext uri="{BB962C8B-B14F-4D97-AF65-F5344CB8AC3E}">
-        <p14:creationId xmlns:p14="http://schemas.microsoft.com/office/powerpoint/2010/main" val="1417538369"/>
+        <p14:creationId xmlns:p14="http://schemas.microsoft.com/office/powerpoint/2010/main" val="740536929"/>
       </p:ext>
     </p:extLst>
   </p:cSld>
   <p:clrMap bg1="lt1" tx1="dk1" bg2="lt2" tx2="dk2" accent1="accent1" accent2="accent2" accent3="accent3" accent4="accent4" accent5="accent5" accent6="accent6" hlink="hlink" folHlink="folHlink"/>
   <p:sldLayoutIdLst>
-    <p:sldLayoutId id="2147483661" r:id="rId1"/>
-    <p:sldLayoutId id="2147483662" r:id="rId2"/>
-    <p:sldLayoutId id="2147483663" r:id="rId3"/>
-    <p:sldLayoutId id="2147483664" r:id="rId4"/>
-    <p:sldLayoutId id="2147483665" r:id="rId5"/>
-    <p:sldLayoutId id="2147483666" r:id="rId6"/>
-    <p:sldLayoutId id="2147483667" r:id="rId7"/>
-    <p:sldLayoutId id="2147483668" r:id="rId8"/>
-    <p:sldLayoutId id="2147483669" r:id="rId9"/>
-    <p:sldLayoutId id="2147483670" r:id="rId10"/>
-    <p:sldLayoutId id="2147483671" r:id="rId11"/>
-    <p:sldLayoutId id="2147483672" r:id="rId12"/>
-    <p:sldLayoutId id="2147483673" r:id="rId13"/>
-    <p:sldLayoutId id="2147483674" r:id="rId14"/>
-    <p:sldLayoutId id="2147483675" r:id="rId15"/>
-    <p:sldLayoutId id="2147483676" r:id="rId16"/>
+    <p:sldLayoutId id="2147483678" r:id="rId1"/>
+    <p:sldLayoutId id="2147483679" r:id="rId2"/>
+    <p:sldLayoutId id="2147483680" r:id="rId3"/>
+    <p:sldLayoutId id="2147483681" r:id="rId4"/>
+    <p:sldLayoutId id="2147483682" r:id="rId5"/>
+    <p:sldLayoutId id="2147483683" r:id="rId6"/>
+    <p:sldLayoutId id="2147483684" r:id="rId7"/>
+    <p:sldLayoutId id="2147483685" r:id="rId8"/>
+    <p:sldLayoutId id="2147483686" r:id="rId9"/>
+    <p:sldLayoutId id="2147483687" r:id="rId10"/>
+    <p:sldLayoutId id="2147483688" r:id="rId11"/>
   </p:sldLayoutIdLst>
   <p:txStyles>
     <p:titleStyle>
-      <a:lvl1pPr algn="l" defTabSz="457200" rtl="0" eaLnBrk="1" latinLnBrk="1" hangingPunct="1">
+      <a:lvl1pPr algn="l" defTabSz="914400" rtl="0" eaLnBrk="1" latinLnBrk="1" hangingPunct="1">
+        <a:lnSpc>
+          <a:spcPct val="90000"/>
+        </a:lnSpc>
         <a:spcBef>
           <a:spcPct val="0"/>
         </a:spcBef>
         <a:buNone/>
-        <a:defRPr sz="3600" kern="1200">
+        <a:defRPr sz="4400" kern="1200">
           <a:solidFill>
-            <a:schemeClr val="accent1"/>
+            <a:schemeClr val="tx1"/>
           </a:solidFill>
           <a:latin typeface="+mj-lt"/>
           <a:ea typeface="+mj-ea"/>
           <a:cs typeface="+mj-cs"/>
         </a:defRPr>
       </a:lvl1pPr>
-      <a:lvl2pPr eaLnBrk="1" latinLnBrk="1" hangingPunct="1">
-        <a:defRPr>
-          <a:solidFill>
-            <a:schemeClr val="tx2"/>
-          </a:solidFill>
-        </a:defRPr>
-      </a:lvl2pPr>
-      <a:lvl3pPr eaLnBrk="1" latinLnBrk="1" hangingPunct="1">
-        <a:defRPr>
-          <a:solidFill>
-            <a:schemeClr val="tx2"/>
-          </a:solidFill>
-        </a:defRPr>
-      </a:lvl3pPr>
-      <a:lvl4pPr eaLnBrk="1" latinLnBrk="1" hangingPunct="1">
-        <a:defRPr>
-          <a:solidFill>
-            <a:schemeClr val="tx2"/>
-          </a:solidFill>
-        </a:defRPr>
-      </a:lvl4pPr>
-      <a:lvl5pPr eaLnBrk="1" latinLnBrk="1" hangingPunct="1">
-        <a:defRPr>
-          <a:solidFill>
-            <a:schemeClr val="tx2"/>
-          </a:solidFill>
-        </a:defRPr>
-      </a:lvl5pPr>
-      <a:lvl6pPr eaLnBrk="1" latinLnBrk="1" hangingPunct="1">
-        <a:defRPr>
-          <a:solidFill>
-            <a:schemeClr val="tx2"/>
-          </a:solidFill>
-        </a:defRPr>
-      </a:lvl6pPr>
-      <a:lvl7pPr eaLnBrk="1" latinLnBrk="1" hangingPunct="1">
-        <a:defRPr>
-          <a:solidFill>
-            <a:schemeClr val="tx2"/>
-          </a:solidFill>
-        </a:defRPr>
-      </a:lvl7pPr>
-      <a:lvl8pPr eaLnBrk="1" latinLnBrk="1" hangingPunct="1">
-        <a:defRPr>
-          <a:solidFill>
-            <a:schemeClr val="tx2"/>
-          </a:solidFill>
-        </a:defRPr>
-      </a:lvl8pPr>
-      <a:lvl9pPr eaLnBrk="1" latinLnBrk="1" hangingPunct="1">
-        <a:defRPr>
-          <a:solidFill>
-            <a:schemeClr val="tx2"/>
-          </a:solidFill>
-        </a:defRPr>
-      </a:lvl9pPr>
     </p:titleStyle>
     <p:bodyStyle>
-      <a:lvl1pPr marL="342900" indent="-342900" algn="l" defTabSz="457200" rtl="0" eaLnBrk="1" latinLnBrk="1" hangingPunct="1">
+      <a:lvl1pPr marL="228600" indent="-228600" algn="l" defTabSz="914400" rtl="0" eaLnBrk="1" latinLnBrk="1" hangingPunct="1">
+        <a:lnSpc>
+          <a:spcPct val="90000"/>
+        </a:lnSpc>
         <a:spcBef>
           <a:spcPts val="1000"/>
         </a:spcBef>
-        <a:spcAft>
-          <a:spcPts val="0"/>
-        </a:spcAft>
-        <a:buClr>
-          <a:schemeClr val="accent1"/>
-        </a:buClr>
-        <a:buSzPct val="80000"/>
-        <a:buFont typeface="Wingdings 3" charset="2"/>
-        <a:buChar char=""/>
-        <a:defRPr sz="1800" kern="1200">
+        <a:buFont typeface="Arial" panose="020B0604020202020204" pitchFamily="34" charset="0"/>
+        <a:buChar char="•"/>
+        <a:defRPr sz="2800" kern="1200">
           <a:solidFill>
-            <a:schemeClr val="tx1">
-              <a:lumMod val="75000"/>
-              <a:lumOff val="25000"/>
-            </a:schemeClr>
+            <a:schemeClr val="tx1"/>
           </a:solidFill>
           <a:latin typeface="+mn-lt"/>
           <a:ea typeface="+mn-ea"/>
           <a:cs typeface="+mn-cs"/>
         </a:defRPr>
       </a:lvl1pPr>
-      <a:lvl2pPr marL="742950" indent="-285750" algn="l" defTabSz="457200" rtl="0" eaLnBrk="1" latinLnBrk="1" hangingPunct="1">
+      <a:lvl2pPr marL="685800" indent="-228600" algn="l" defTabSz="914400" rtl="0" eaLnBrk="1" latinLnBrk="1" hangingPunct="1">
+        <a:lnSpc>
+          <a:spcPct val="90000"/>
+        </a:lnSpc>
         <a:spcBef>
-          <a:spcPts val="1000"/>
+          <a:spcPts val="500"/>
         </a:spcBef>
-        <a:spcAft>
-          <a:spcPts val="0"/>
-        </a:spcAft>
-        <a:buClr>
-          <a:schemeClr val="accent1"/>
-        </a:buClr>
-        <a:buSzPct val="80000"/>
-        <a:buFont typeface="Wingdings 3" charset="2"/>
-        <a:buChar char=""/>
-        <a:defRPr sz="1600" kern="1200">
+        <a:buFont typeface="Arial" panose="020B0604020202020204" pitchFamily="34" charset="0"/>
+        <a:buChar char="•"/>
+        <a:defRPr sz="2400" kern="1200">
           <a:solidFill>
-            <a:schemeClr val="tx1">
-              <a:lumMod val="75000"/>
-              <a:lumOff val="25000"/>
-            </a:schemeClr>
+            <a:schemeClr val="tx1"/>
           </a:solidFill>
           <a:latin typeface="+mn-lt"/>
           <a:ea typeface="+mn-ea"/>
           <a:cs typeface="+mn-cs"/>
         </a:defRPr>
       </a:lvl2pPr>
-      <a:lvl3pPr marL="1143000" indent="-228600" algn="l" defTabSz="457200" rtl="0" eaLnBrk="1" latinLnBrk="1" hangingPunct="1">
+      <a:lvl3pPr marL="1143000" indent="-228600" algn="l" defTabSz="914400" rtl="0" eaLnBrk="1" latinLnBrk="1" hangingPunct="1">
+        <a:lnSpc>
+          <a:spcPct val="90000"/>
+        </a:lnSpc>
         <a:spcBef>
-          <a:spcPts val="1000"/>
+          <a:spcPts val="500"/>
         </a:spcBef>
-        <a:spcAft>
-          <a:spcPts val="0"/>
-        </a:spcAft>
-        <a:buClr>
-          <a:schemeClr val="accent1"/>
-        </a:buClr>
-        <a:buSzPct val="80000"/>
-        <a:buFont typeface="Wingdings 3" charset="2"/>
-        <a:buChar char=""/>
-        <a:defRPr sz="1400" kern="1200">
+        <a:buFont typeface="Arial" panose="020B0604020202020204" pitchFamily="34" charset="0"/>
+        <a:buChar char="•"/>
+        <a:defRPr sz="2000" kern="1200">
           <a:solidFill>
-            <a:schemeClr val="tx1">
-              <a:lumMod val="75000"/>
-              <a:lumOff val="25000"/>
-            </a:schemeClr>
+            <a:schemeClr val="tx1"/>
           </a:solidFill>
           <a:latin typeface="+mn-lt"/>
           <a:ea typeface="+mn-ea"/>
           <a:cs typeface="+mn-cs"/>
         </a:defRPr>
       </a:lvl3pPr>
-      <a:lvl4pPr marL="1600200" indent="-228600" algn="l" defTabSz="457200" rtl="0" eaLnBrk="1" latinLnBrk="1" hangingPunct="1">
+      <a:lvl4pPr marL="1600200" indent="-228600" algn="l" defTabSz="914400" rtl="0" eaLnBrk="1" latinLnBrk="1" hangingPunct="1">
+        <a:lnSpc>
+          <a:spcPct val="90000"/>
+        </a:lnSpc>
         <a:spcBef>
-          <a:spcPts val="1000"/>
+          <a:spcPts val="500"/>
         </a:spcBef>
-        <a:spcAft>
-          <a:spcPts val="0"/>
-        </a:spcAft>
-        <a:buClr>
-          <a:schemeClr val="accent1"/>
-        </a:buClr>
-        <a:buSzPct val="80000"/>
-        <a:buFont typeface="Wingdings 3" charset="2"/>
-        <a:buChar char=""/>
-        <a:defRPr sz="1200" kern="1200">
+        <a:buFont typeface="Arial" panose="020B0604020202020204" pitchFamily="34" charset="0"/>
+        <a:buChar char="•"/>
+        <a:defRPr sz="1800" kern="1200">
           <a:solidFill>
-            <a:schemeClr val="tx1">
-              <a:lumMod val="75000"/>
-              <a:lumOff val="25000"/>
-            </a:schemeClr>
+            <a:schemeClr val="tx1"/>
           </a:solidFill>
           <a:latin typeface="+mn-lt"/>
           <a:ea typeface="+mn-ea"/>
           <a:cs typeface="+mn-cs"/>
         </a:defRPr>
       </a:lvl4pPr>
-      <a:lvl5pPr marL="2057400" indent="-228600" algn="l" defTabSz="457200" rtl="0" eaLnBrk="1" latinLnBrk="1" hangingPunct="1">
+      <a:lvl5pPr marL="2057400" indent="-228600" algn="l" defTabSz="914400" rtl="0" eaLnBrk="1" latinLnBrk="1" hangingPunct="1">
+        <a:lnSpc>
+          <a:spcPct val="90000"/>
+        </a:lnSpc>
         <a:spcBef>
-          <a:spcPts val="1000"/>
+          <a:spcPts val="500"/>
         </a:spcBef>
-        <a:spcAft>
-          <a:spcPts val="0"/>
-        </a:spcAft>
-        <a:buClr>
-          <a:schemeClr val="accent1"/>
-        </a:buClr>
-        <a:buSzPct val="80000"/>
-        <a:buFont typeface="Wingdings 3" charset="2"/>
-        <a:buChar char=""/>
-        <a:defRPr sz="1200" kern="1200">
+        <a:buFont typeface="Arial" panose="020B0604020202020204" pitchFamily="34" charset="0"/>
+        <a:buChar char="•"/>
+        <a:defRPr sz="1800" kern="1200">
           <a:solidFill>
-            <a:schemeClr val="tx1">
-              <a:lumMod val="75000"/>
-              <a:lumOff val="25000"/>
-            </a:schemeClr>
+            <a:schemeClr val="tx1"/>
           </a:solidFill>
           <a:latin typeface="+mn-lt"/>
           <a:ea typeface="+mn-ea"/>
           <a:cs typeface="+mn-cs"/>
         </a:defRPr>
       </a:lvl5pPr>
-      <a:lvl6pPr marL="2514600" indent="-228600" algn="l" defTabSz="457200" rtl="0" eaLnBrk="1" latinLnBrk="1" hangingPunct="1">
+      <a:lvl6pPr marL="2514600" indent="-228600" algn="l" defTabSz="914400" rtl="0" eaLnBrk="1" latinLnBrk="1" hangingPunct="1">
+        <a:lnSpc>
+          <a:spcPct val="90000"/>
+        </a:lnSpc>
         <a:spcBef>
-          <a:spcPts val="1000"/>
+          <a:spcPts val="500"/>
         </a:spcBef>
-        <a:spcAft>
-          <a:spcPts val="0"/>
-        </a:spcAft>
-        <a:buClr>
-          <a:schemeClr val="accent1"/>
-        </a:buClr>
-        <a:buSzPct val="80000"/>
-        <a:buFont typeface="Wingdings 3" charset="2"/>
-        <a:buChar char=""/>
-        <a:defRPr sz="1200" kern="1200">
+        <a:buFont typeface="Arial" panose="020B0604020202020204" pitchFamily="34" charset="0"/>
+        <a:buChar char="•"/>
+        <a:defRPr sz="1800" kern="1200">
           <a:solidFill>
-            <a:schemeClr val="tx1">
-              <a:lumMod val="75000"/>
-              <a:lumOff val="25000"/>
-            </a:schemeClr>
+            <a:schemeClr val="tx1"/>
           </a:solidFill>
           <a:latin typeface="+mn-lt"/>
           <a:ea typeface="+mn-ea"/>
           <a:cs typeface="+mn-cs"/>
         </a:defRPr>
       </a:lvl6pPr>
-      <a:lvl7pPr marL="2971800" indent="-228600" algn="l" defTabSz="457200" rtl="0" eaLnBrk="1" latinLnBrk="1" hangingPunct="1">
+      <a:lvl7pPr marL="2971800" indent="-228600" algn="l" defTabSz="914400" rtl="0" eaLnBrk="1" latinLnBrk="1" hangingPunct="1">
+        <a:lnSpc>
+          <a:spcPct val="90000"/>
+        </a:lnSpc>
         <a:spcBef>
-          <a:spcPts val="1000"/>
+          <a:spcPts val="500"/>
         </a:spcBef>
-        <a:spcAft>
-          <a:spcPts val="0"/>
-        </a:spcAft>
-        <a:buClr>
-          <a:schemeClr val="accent1"/>
-        </a:buClr>
-        <a:buSzPct val="80000"/>
-        <a:buFont typeface="Wingdings 3" charset="2"/>
-        <a:buChar char=""/>
-        <a:defRPr sz="1200" kern="1200">
+        <a:buFont typeface="Arial" panose="020B0604020202020204" pitchFamily="34" charset="0"/>
+        <a:buChar char="•"/>
+        <a:defRPr sz="1800" kern="1200">
           <a:solidFill>
-            <a:schemeClr val="tx1">
-              <a:lumMod val="75000"/>
-              <a:lumOff val="25000"/>
-            </a:schemeClr>
+            <a:schemeClr val="tx1"/>
           </a:solidFill>
           <a:latin typeface="+mn-lt"/>
           <a:ea typeface="+mn-ea"/>
           <a:cs typeface="+mn-cs"/>
         </a:defRPr>
       </a:lvl7pPr>
-      <a:lvl8pPr marL="3429000" indent="-228600" algn="l" defTabSz="457200" rtl="0" eaLnBrk="1" latinLnBrk="1" hangingPunct="1">
+      <a:lvl8pPr marL="3429000" indent="-228600" algn="l" defTabSz="914400" rtl="0" eaLnBrk="1" latinLnBrk="1" hangingPunct="1">
+        <a:lnSpc>
+          <a:spcPct val="90000"/>
+        </a:lnSpc>
         <a:spcBef>
-          <a:spcPts val="1000"/>
+          <a:spcPts val="500"/>
         </a:spcBef>
-        <a:spcAft>
-          <a:spcPts val="0"/>
-        </a:spcAft>
-        <a:buClr>
-          <a:schemeClr val="accent1"/>
-        </a:buClr>
-        <a:buSzPct val="80000"/>
-        <a:buFont typeface="Wingdings 3" charset="2"/>
-        <a:buChar char=""/>
-        <a:defRPr sz="1200" kern="1200">
+        <a:buFont typeface="Arial" panose="020B0604020202020204" pitchFamily="34" charset="0"/>
+        <a:buChar char="•"/>
+        <a:defRPr sz="1800" kern="1200">
           <a:solidFill>
-            <a:schemeClr val="tx1">
-              <a:lumMod val="75000"/>
-              <a:lumOff val="25000"/>
-            </a:schemeClr>
+            <a:schemeClr val="tx1"/>
           </a:solidFill>
           <a:latin typeface="+mn-lt"/>
           <a:ea typeface="+mn-ea"/>
           <a:cs typeface="+mn-cs"/>
         </a:defRPr>
       </a:lvl8pPr>
-      <a:lvl9pPr marL="3886200" indent="-228600" algn="l" defTabSz="457200" rtl="0" eaLnBrk="1" latinLnBrk="1" hangingPunct="1">
+      <a:lvl9pPr marL="3886200" indent="-228600" algn="l" defTabSz="914400" rtl="0" eaLnBrk="1" latinLnBrk="1" hangingPunct="1">
+        <a:lnSpc>
+          <a:spcPct val="90000"/>
+        </a:lnSpc>
         <a:spcBef>
-          <a:spcPts val="1000"/>
+          <a:spcPts val="500"/>
         </a:spcBef>
-        <a:spcAft>
-          <a:spcPts val="0"/>
-        </a:spcAft>
-        <a:buClr>
-          <a:schemeClr val="accent1"/>
-        </a:buClr>
-        <a:buSzPct val="80000"/>
-        <a:buFont typeface="Wingdings 3" charset="2"/>
-        <a:buChar char=""/>
-        <a:defRPr sz="1200" kern="1200">
+        <a:buFont typeface="Arial" panose="020B0604020202020204" pitchFamily="34" charset="0"/>
+        <a:buChar char="•"/>
+        <a:defRPr sz="1800" kern="1200">
           <a:solidFill>
-            <a:schemeClr val="tx1">
-              <a:lumMod val="75000"/>
-              <a:lumOff val="25000"/>
-            </a:schemeClr>
+            <a:schemeClr val="tx1"/>
           </a:solidFill>
           <a:latin typeface="+mn-lt"/>
           <a:ea typeface="+mn-ea"/>
@@ -5723,9 +2863,9 @@
     </p:bodyStyle>
     <p:otherStyle>
       <a:defPPr>
-        <a:defRPr lang="en-US"/>
+        <a:defRPr lang="ko-KR"/>
       </a:defPPr>
-      <a:lvl1pPr marL="0" algn="l" defTabSz="457200" rtl="0" eaLnBrk="1" latinLnBrk="1" hangingPunct="1">
+      <a:lvl1pPr marL="0" algn="l" defTabSz="914400" rtl="0" eaLnBrk="1" latinLnBrk="1" hangingPunct="1">
         <a:defRPr sz="1800" kern="1200">
           <a:solidFill>
             <a:schemeClr val="tx1"/>
@@ -5735,7 +2875,7 @@
           <a:cs typeface="+mn-cs"/>
         </a:defRPr>
       </a:lvl1pPr>
-      <a:lvl2pPr marL="457200" algn="l" defTabSz="457200" rtl="0" eaLnBrk="1" latinLnBrk="1" hangingPunct="1">
+      <a:lvl2pPr marL="457200" algn="l" defTabSz="914400" rtl="0" eaLnBrk="1" latinLnBrk="1" hangingPunct="1">
         <a:defRPr sz="1800" kern="1200">
           <a:solidFill>
             <a:schemeClr val="tx1"/>
@@ -5745,7 +2885,7 @@
           <a:cs typeface="+mn-cs"/>
         </a:defRPr>
       </a:lvl2pPr>
-      <a:lvl3pPr marL="914400" algn="l" defTabSz="457200" rtl="0" eaLnBrk="1" latinLnBrk="1" hangingPunct="1">
+      <a:lvl3pPr marL="914400" algn="l" defTabSz="914400" rtl="0" eaLnBrk="1" latinLnBrk="1" hangingPunct="1">
         <a:defRPr sz="1800" kern="1200">
           <a:solidFill>
             <a:schemeClr val="tx1"/>
@@ -5755,7 +2895,7 @@
           <a:cs typeface="+mn-cs"/>
         </a:defRPr>
       </a:lvl3pPr>
-      <a:lvl4pPr marL="1371600" algn="l" defTabSz="457200" rtl="0" eaLnBrk="1" latinLnBrk="1" hangingPunct="1">
+      <a:lvl4pPr marL="1371600" algn="l" defTabSz="914400" rtl="0" eaLnBrk="1" latinLnBrk="1" hangingPunct="1">
         <a:defRPr sz="1800" kern="1200">
           <a:solidFill>
             <a:schemeClr val="tx1"/>
@@ -5765,7 +2905,7 @@
           <a:cs typeface="+mn-cs"/>
         </a:defRPr>
       </a:lvl4pPr>
-      <a:lvl5pPr marL="1828800" algn="l" defTabSz="457200" rtl="0" eaLnBrk="1" latinLnBrk="1" hangingPunct="1">
+      <a:lvl5pPr marL="1828800" algn="l" defTabSz="914400" rtl="0" eaLnBrk="1" latinLnBrk="1" hangingPunct="1">
         <a:defRPr sz="1800" kern="1200">
           <a:solidFill>
             <a:schemeClr val="tx1"/>
@@ -5775,7 +2915,7 @@
           <a:cs typeface="+mn-cs"/>
         </a:defRPr>
       </a:lvl5pPr>
-      <a:lvl6pPr marL="2286000" algn="l" defTabSz="457200" rtl="0" eaLnBrk="1" latinLnBrk="1" hangingPunct="1">
+      <a:lvl6pPr marL="2286000" algn="l" defTabSz="914400" rtl="0" eaLnBrk="1" latinLnBrk="1" hangingPunct="1">
         <a:defRPr sz="1800" kern="1200">
           <a:solidFill>
             <a:schemeClr val="tx1"/>
@@ -5785,7 +2925,7 @@
           <a:cs typeface="+mn-cs"/>
         </a:defRPr>
       </a:lvl6pPr>
-      <a:lvl7pPr marL="2743200" algn="l" defTabSz="457200" rtl="0" eaLnBrk="1" latinLnBrk="1" hangingPunct="1">
+      <a:lvl7pPr marL="2743200" algn="l" defTabSz="914400" rtl="0" eaLnBrk="1" latinLnBrk="1" hangingPunct="1">
         <a:defRPr sz="1800" kern="1200">
           <a:solidFill>
             <a:schemeClr val="tx1"/>
@@ -5795,7 +2935,7 @@
           <a:cs typeface="+mn-cs"/>
         </a:defRPr>
       </a:lvl7pPr>
-      <a:lvl8pPr marL="3200400" algn="l" defTabSz="457200" rtl="0" eaLnBrk="1" latinLnBrk="1" hangingPunct="1">
+      <a:lvl8pPr marL="3200400" algn="l" defTabSz="914400" rtl="0" eaLnBrk="1" latinLnBrk="1" hangingPunct="1">
         <a:defRPr sz="1800" kern="1200">
           <a:solidFill>
             <a:schemeClr val="tx1"/>
@@ -5805,7 +2945,7 @@
           <a:cs typeface="+mn-cs"/>
         </a:defRPr>
       </a:lvl8pPr>
-      <a:lvl9pPr marL="3657600" algn="l" defTabSz="457200" rtl="0" eaLnBrk="1" latinLnBrk="1" hangingPunct="1">
+      <a:lvl9pPr marL="3657600" algn="l" defTabSz="914400" rtl="0" eaLnBrk="1" latinLnBrk="1" hangingPunct="1">
         <a:defRPr sz="1800" kern="1200">
           <a:solidFill>
             <a:schemeClr val="tx1"/>
@@ -5943,6 +3083,54 @@
           </a:p>
         </p:txBody>
       </p:sp>
+      <p:sp>
+        <p:nvSpPr>
+          <p:cNvPr id="4" name="TextBox 3"/>
+          <p:cNvSpPr txBox="1"/>
+          <p:nvPr/>
+        </p:nvSpPr>
+        <p:spPr>
+          <a:xfrm>
+            <a:off x="261888" y="5407270"/>
+            <a:ext cx="9462403" cy="523220"/>
+          </a:xfrm>
+          <a:prstGeom prst="rect">
+            <a:avLst/>
+          </a:prstGeom>
+          <a:noFill/>
+        </p:spPr>
+        <p:txBody>
+          <a:bodyPr wrap="square" rtlCol="0">
+            <a:spAutoFit/>
+          </a:bodyPr>
+          <a:lstStyle/>
+          <a:p>
+            <a:r>
+              <a:rPr lang="en-US" altLang="ko-KR" sz="1400" dirty="0" err="1" smtClean="0">
+                <a:hlinkClick r:id="rId2"/>
+              </a:rPr>
+              <a:t>Git</a:t>
+            </a:r>
+            <a:r>
+              <a:rPr lang="en-US" altLang="ko-KR" sz="1400" dirty="0">
+                <a:hlinkClick r:id="rId2"/>
+              </a:rPr>
+              <a:t> url</a:t>
+            </a:r>
+            <a:r>
+              <a:rPr lang="en-US" altLang="ko-KR" sz="1400" dirty="0"/>
+              <a:t>: </a:t>
+            </a:r>
+            <a:r>
+              <a:rPr lang="en-US" altLang="ko-KR" sz="1400" dirty="0">
+                <a:hlinkClick r:id="rId2"/>
+              </a:rPr>
+              <a:t>https://github.com/kcmantop/sample7/tree/67c927f697728980a86bf71708b8abbc196e71fe/springboot/ticketing</a:t>
+            </a:r>
+            <a:endParaRPr lang="ko-KR" altLang="en-US" sz="1400" dirty="0"/>
+          </a:p>
+        </p:txBody>
+      </p:sp>
     </p:spTree>
     <p:extLst>
       <p:ext uri="{BB962C8B-B14F-4D97-AF65-F5344CB8AC3E}">
@@ -5953,6 +3141,13 @@
   <p:clrMapOvr>
     <a:masterClrMapping/>
   </p:clrMapOvr>
+  <p:timing>
+    <p:tnLst>
+      <p:par>
+        <p:cTn id="1" dur="indefinite" restart="never" nodeType="tmRoot"/>
+      </p:par>
+    </p:tnLst>
+  </p:timing>
 </p:sld>
 </file>
 
@@ -6164,6 +3359,13 @@
   <p:clrMapOvr>
     <a:masterClrMapping/>
   </p:clrMapOvr>
+  <p:timing>
+    <p:tnLst>
+      <p:par>
+        <p:cTn id="1" dur="indefinite" restart="never" nodeType="tmRoot"/>
+      </p:par>
+    </p:tnLst>
+  </p:timing>
 </p:sld>
 </file>
 
@@ -7493,9 +4695,9 @@
 </file>
 
 <file path=ppt/theme/theme1.xml><?xml version="1.0" encoding="utf-8"?>
-<a:theme xmlns:a="http://schemas.openxmlformats.org/drawingml/2006/main" name="패싯">
+<a:theme xmlns:a="http://schemas.openxmlformats.org/drawingml/2006/main" name="Office 테마">
   <a:themeElements>
-    <a:clrScheme name="패싯">
+    <a:clrScheme name="Office">
       <a:dk1>
         <a:sysClr val="windowText" lastClr="000000"/>
       </a:dk1>
@@ -7503,52 +4705,52 @@
         <a:sysClr val="window" lastClr="FFFFFF"/>
       </a:lt1>
       <a:dk2>
-        <a:srgbClr val="2C3C43"/>
+        <a:srgbClr val="44546A"/>
       </a:dk2>
       <a:lt2>
-        <a:srgbClr val="EBEBEB"/>
+        <a:srgbClr val="E7E6E6"/>
       </a:lt2>
       <a:accent1>
-        <a:srgbClr val="90C226"/>
+        <a:srgbClr val="5B9BD5"/>
       </a:accent1>
       <a:accent2>
-        <a:srgbClr val="54A021"/>
+        <a:srgbClr val="ED7D31"/>
       </a:accent2>
       <a:accent3>
-        <a:srgbClr val="E6B91E"/>
+        <a:srgbClr val="A5A5A5"/>
       </a:accent3>
       <a:accent4>
-        <a:srgbClr val="E76618"/>
+        <a:srgbClr val="FFC000"/>
       </a:accent4>
       <a:accent5>
-        <a:srgbClr val="C42F1A"/>
+        <a:srgbClr val="4472C4"/>
       </a:accent5>
       <a:accent6>
-        <a:srgbClr val="918655"/>
+        <a:srgbClr val="70AD47"/>
       </a:accent6>
       <a:hlink>
-        <a:srgbClr val="99CA3C"/>
+        <a:srgbClr val="0563C1"/>
       </a:hlink>
       <a:folHlink>
-        <a:srgbClr val="B9D181"/>
+        <a:srgbClr val="954F72"/>
       </a:folHlink>
     </a:clrScheme>
-    <a:fontScheme name="패싯">
+    <a:fontScheme name="Office">
       <a:majorFont>
-        <a:latin typeface="Trebuchet MS" panose="020B0603020202020204"/>
+        <a:latin typeface="맑은 고딕" panose="020F0302020204030204"/>
         <a:ea typeface=""/>
         <a:cs typeface=""/>
-        <a:font script="Jpan" typeface="メイリオ"/>
+        <a:font script="Jpan" typeface="ＭＳ Ｐゴシック"/>
         <a:font script="Hang" typeface="맑은 고딕"/>
-        <a:font script="Hans" typeface="方正姚体"/>
-        <a:font script="Hant" typeface="微軟正黑體"/>
-        <a:font script="Arab" typeface="Tahoma"/>
-        <a:font script="Hebr" typeface="Arial"/>
-        <a:font script="Thai" typeface="Cordia New"/>
+        <a:font script="Hans" typeface="宋体"/>
+        <a:font script="Hant" typeface="新細明體"/>
+        <a:font script="Arab" typeface="Times New Roman"/>
+        <a:font script="Hebr" typeface="Times New Roman"/>
+        <a:font script="Thai" typeface="Angsana New"/>
         <a:font script="Ethi" typeface="Nyala"/>
         <a:font script="Beng" typeface="Vrinda"/>
         <a:font script="Gujr" typeface="Shruti"/>
-        <a:font script="Khmr" typeface="DaunPenh"/>
+        <a:font script="Khmr" typeface="MoolBoran"/>
         <a:font script="Knda" typeface="Tunga"/>
         <a:font script="Guru" typeface="Raavi"/>
         <a:font script="Cans" typeface="Euphemia"/>
@@ -7565,21 +4767,21 @@
         <a:font script="Laoo" typeface="DokChampa"/>
         <a:font script="Sinh" typeface="Iskoola Pota"/>
         <a:font script="Mong" typeface="Mongolian Baiti"/>
-        <a:font script="Viet" typeface="Tahoma"/>
+        <a:font script="Viet" typeface="Times New Roman"/>
         <a:font script="Uigh" typeface="Microsoft Uighur"/>
         <a:font script="Geor" typeface="Sylfaen"/>
       </a:majorFont>
       <a:minorFont>
-        <a:latin typeface="Trebuchet MS" panose="020B0603020202020204"/>
+        <a:latin typeface="맑은 고딕" panose="020F0502020204030204"/>
         <a:ea typeface=""/>
         <a:cs typeface=""/>
-        <a:font script="Jpan" typeface="メイリオ"/>
-        <a:font script="Hang" typeface="HY그래픽M"/>
-        <a:font script="Hans" typeface="华文新魏"/>
-        <a:font script="Hant" typeface="微軟正黑體"/>
-        <a:font script="Arab" typeface="Tahoma"/>
-        <a:font script="Hebr" typeface="Gisha"/>
-        <a:font script="Thai" typeface="IrisUPC"/>
+        <a:font script="Jpan" typeface="ＭＳ Ｐゴシック"/>
+        <a:font script="Hang" typeface="맑은 고딕"/>
+        <a:font script="Hans" typeface="宋体"/>
+        <a:font script="Hant" typeface="新細明體"/>
+        <a:font script="Arab" typeface="Arial"/>
+        <a:font script="Hebr" typeface="Arial"/>
+        <a:font script="Thai" typeface="Cordia New"/>
         <a:font script="Ethi" typeface="Nyala"/>
         <a:font script="Beng" typeface="Vrinda"/>
         <a:font script="Gujr" typeface="Shruti"/>
@@ -7605,7 +4807,7 @@
         <a:font script="Geor" typeface="Sylfaen"/>
       </a:minorFont>
     </a:fontScheme>
-    <a:fmtScheme name="패싯">
+    <a:fmtScheme name="Office">
       <a:fillStyleLst>
         <a:solidFill>
           <a:schemeClr val="phClr"/>
@@ -7614,13 +4816,23 @@
           <a:gsLst>
             <a:gs pos="0">
               <a:schemeClr val="phClr">
-                <a:tint val="65000"/>
                 <a:lumMod val="110000"/>
+                <a:satMod val="105000"/>
+                <a:tint val="67000"/>
               </a:schemeClr>
             </a:gs>
-            <a:gs pos="88000">
+            <a:gs pos="50000">
               <a:schemeClr val="phClr">
-                <a:tint val="90000"/>
+                <a:lumMod val="105000"/>
+                <a:satMod val="103000"/>
+                <a:tint val="73000"/>
+              </a:schemeClr>
+            </a:gs>
+            <a:gs pos="100000">
+              <a:schemeClr val="phClr">
+                <a:lumMod val="105000"/>
+                <a:satMod val="109000"/>
+                <a:tint val="81000"/>
               </a:schemeClr>
             </a:gs>
           </a:gsLst>
@@ -7630,14 +4842,23 @@
           <a:gsLst>
             <a:gs pos="0">
               <a:schemeClr val="phClr">
-                <a:tint val="96000"/>
-                <a:lumMod val="100000"/>
+                <a:satMod val="103000"/>
+                <a:lumMod val="102000"/>
+                <a:tint val="94000"/>
               </a:schemeClr>
             </a:gs>
-            <a:gs pos="78000">
+            <a:gs pos="50000">
               <a:schemeClr val="phClr">
-                <a:shade val="94000"/>
-                <a:lumMod val="94000"/>
+                <a:satMod val="110000"/>
+                <a:lumMod val="100000"/>
+                <a:shade val="100000"/>
+              </a:schemeClr>
+            </a:gs>
+            <a:gs pos="100000">
+              <a:schemeClr val="phClr">
+                <a:lumMod val="99000"/>
+                <a:satMod val="120000"/>
+                <a:shade val="78000"/>
               </a:schemeClr>
             </a:gs>
           </a:gsLst>
@@ -7645,23 +4866,26 @@
         </a:gradFill>
       </a:fillStyleLst>
       <a:lnStyleLst>
-        <a:ln w="12700" cap="rnd" cmpd="sng" algn="ctr">
+        <a:ln w="6350" cap="flat" cmpd="sng" algn="ctr">
           <a:solidFill>
             <a:schemeClr val="phClr"/>
           </a:solidFill>
           <a:prstDash val="solid"/>
+          <a:miter lim="800000"/>
         </a:ln>
-        <a:ln w="19050" cap="rnd" cmpd="sng" algn="ctr">
+        <a:ln w="12700" cap="flat" cmpd="sng" algn="ctr">
           <a:solidFill>
             <a:schemeClr val="phClr"/>
           </a:solidFill>
           <a:prstDash val="solid"/>
+          <a:miter lim="800000"/>
         </a:ln>
-        <a:ln w="25400" cap="rnd" cmpd="sng" algn="ctr">
+        <a:ln w="19050" cap="flat" cmpd="sng" algn="ctr">
           <a:solidFill>
             <a:schemeClr val="phClr"/>
           </a:solidFill>
           <a:prstDash val="solid"/>
+          <a:miter lim="800000"/>
         </a:ln>
       </a:lnStyleLst>
       <a:effectStyleLst>
@@ -7669,72 +4893,54 @@
           <a:effectLst/>
         </a:effectStyle>
         <a:effectStyle>
+          <a:effectLst/>
+        </a:effectStyle>
+        <a:effectStyle>
           <a:effectLst>
-            <a:outerShdw blurRad="38100" dist="25400" dir="5400000" rotWithShape="0">
+            <a:outerShdw blurRad="57150" dist="19050" dir="5400000" algn="ctr" rotWithShape="0">
               <a:srgbClr val="000000">
-                <a:alpha val="35000"/>
+                <a:alpha val="63000"/>
               </a:srgbClr>
             </a:outerShdw>
           </a:effectLst>
-        </a:effectStyle>
-        <a:effectStyle>
-          <a:effectLst>
-            <a:outerShdw blurRad="50800" dist="38100" dir="5400000" rotWithShape="0">
-              <a:srgbClr val="000000">
-                <a:alpha val="35000"/>
-              </a:srgbClr>
-            </a:outerShdw>
-          </a:effectLst>
-          <a:scene3d>
-            <a:camera prst="orthographicFront">
-              <a:rot lat="0" lon="0" rev="0"/>
-            </a:camera>
-            <a:lightRig rig="threePt" dir="tl"/>
-          </a:scene3d>
-          <a:sp3d prstMaterial="plastic">
-            <a:bevelT w="0" h="0"/>
-          </a:sp3d>
         </a:effectStyle>
       </a:effectStyleLst>
       <a:bgFillStyleLst>
         <a:solidFill>
           <a:schemeClr val="phClr"/>
         </a:solidFill>
+        <a:solidFill>
+          <a:schemeClr val="phClr">
+            <a:tint val="95000"/>
+            <a:satMod val="170000"/>
+          </a:schemeClr>
+        </a:solidFill>
         <a:gradFill rotWithShape="1">
           <a:gsLst>
             <a:gs pos="0">
               <a:schemeClr val="phClr">
-                <a:tint val="90000"/>
-                <a:lumMod val="104000"/>
+                <a:tint val="93000"/>
+                <a:satMod val="150000"/>
+                <a:shade val="98000"/>
+                <a:lumMod val="102000"/>
               </a:schemeClr>
             </a:gs>
-            <a:gs pos="94000">
+            <a:gs pos="50000">
               <a:schemeClr val="phClr">
-                <a:shade val="96000"/>
-                <a:lumMod val="82000"/>
+                <a:tint val="98000"/>
+                <a:satMod val="130000"/>
+                <a:shade val="90000"/>
+                <a:lumMod val="103000"/>
+              </a:schemeClr>
+            </a:gs>
+            <a:gs pos="100000">
+              <a:schemeClr val="phClr">
+                <a:shade val="63000"/>
+                <a:satMod val="120000"/>
               </a:schemeClr>
             </a:gs>
           </a:gsLst>
           <a:lin ang="5400000" scaled="0"/>
-        </a:gradFill>
-        <a:gradFill rotWithShape="1">
-          <a:gsLst>
-            <a:gs pos="0">
-              <a:schemeClr val="phClr">
-                <a:tint val="90000"/>
-                <a:lumMod val="110000"/>
-              </a:schemeClr>
-            </a:gs>
-            <a:gs pos="100000">
-              <a:schemeClr val="phClr">
-                <a:shade val="94000"/>
-                <a:lumMod val="96000"/>
-              </a:schemeClr>
-            </a:gs>
-          </a:gsLst>
-          <a:path path="circle">
-            <a:fillToRect l="50000" t="50000" r="100000" b="100000"/>
-          </a:path>
         </a:gradFill>
       </a:bgFillStyleLst>
     </a:fmtScheme>
@@ -7743,7 +4949,7 @@
   <a:extraClrSchemeLst/>
   <a:extLst>
     <a:ext uri="{05A4C25C-085E-4340-85A3-A5531E510DB2}">
-      <thm15:themeFamily xmlns:thm15="http://schemas.microsoft.com/office/thememl/2012/main" name="Facet" id="{C0C680CD-088A-49FC-A102-D699147F32B2}" vid="{CFBC31BA-B70F-4F30-BCAA-4F3011E16C4D}"/>
+      <thm15:themeFamily xmlns:thm15="http://schemas.microsoft.com/office/thememl/2012/main" name="Office Theme" id="{62F939B6-93AF-4DB8-9C6B-D6C7DFDC589F}" vid="{4A3C46E8-61CC-4603-A589-7422A47A8E4A}"/>
     </a:ext>
   </a:extLst>
 </a:theme>

--- a/springboot/ticketing/티켓팅 부하 테스트.pptx
+++ b/springboot/ticketing/티켓팅 부하 테스트.pptx
@@ -7,13 +7,14 @@
   <p:sldIdLst>
     <p:sldId id="256" r:id="rId2"/>
     <p:sldId id="257" r:id="rId3"/>
-    <p:sldId id="258" r:id="rId4"/>
-    <p:sldId id="259" r:id="rId5"/>
-    <p:sldId id="260" r:id="rId6"/>
-    <p:sldId id="263" r:id="rId7"/>
-    <p:sldId id="266" r:id="rId8"/>
-    <p:sldId id="267" r:id="rId9"/>
-    <p:sldId id="269" r:id="rId10"/>
+    <p:sldId id="270" r:id="rId4"/>
+    <p:sldId id="258" r:id="rId5"/>
+    <p:sldId id="259" r:id="rId6"/>
+    <p:sldId id="260" r:id="rId7"/>
+    <p:sldId id="263" r:id="rId8"/>
+    <p:sldId id="266" r:id="rId9"/>
+    <p:sldId id="267" r:id="rId10"/>
+    <p:sldId id="269" r:id="rId11"/>
   </p:sldIdLst>
   <p:sldSz cx="12192000" cy="6858000"/>
   <p:notesSz cx="6858000" cy="9144000"/>
@@ -2990,7 +2991,7 @@
         <p:spPr>
           <a:xfrm>
             <a:off x="2228849" y="1587582"/>
-            <a:ext cx="5667375" cy="734320"/>
+            <a:ext cx="6545874" cy="734320"/>
           </a:xfrm>
         </p:spPr>
         <p:style>
@@ -3009,7 +3010,7 @@
         </p:style>
         <p:txBody>
           <a:bodyPr>
-            <a:normAutofit fontScale="90000"/>
+            <a:normAutofit/>
           </a:bodyPr>
           <a:lstStyle/>
           <a:p>
@@ -3148,6 +3149,552 @@
       </p:par>
     </p:tnLst>
   </p:timing>
+</p:sld>
+</file>
+
+<file path=ppt/slides/slide10.xml><?xml version="1.0" encoding="utf-8"?>
+<p:sld xmlns:a="http://schemas.openxmlformats.org/drawingml/2006/main" xmlns:r="http://schemas.openxmlformats.org/officeDocument/2006/relationships" xmlns:p="http://schemas.openxmlformats.org/presentationml/2006/main">
+  <p:cSld>
+    <p:spTree>
+      <p:nvGrpSpPr>
+        <p:cNvPr id="1" name=""/>
+        <p:cNvGrpSpPr/>
+        <p:nvPr/>
+      </p:nvGrpSpPr>
+      <p:grpSpPr>
+        <a:xfrm>
+          <a:off x="0" y="0"/>
+          <a:ext cx="0" cy="0"/>
+          <a:chOff x="0" y="0"/>
+          <a:chExt cx="0" cy="0"/>
+        </a:xfrm>
+      </p:grpSpPr>
+      <p:pic>
+        <p:nvPicPr>
+          <p:cNvPr id="4" name="그림 3"/>
+          <p:cNvPicPr>
+            <a:picLocks noChangeAspect="1"/>
+          </p:cNvPicPr>
+          <p:nvPr/>
+        </p:nvPicPr>
+        <p:blipFill>
+          <a:blip r:embed="rId2"/>
+          <a:stretch>
+            <a:fillRect/>
+          </a:stretch>
+        </p:blipFill>
+        <p:spPr>
+          <a:xfrm>
+            <a:off x="772166" y="513203"/>
+            <a:ext cx="9273723" cy="1669531"/>
+          </a:xfrm>
+          <a:prstGeom prst="rect">
+            <a:avLst/>
+          </a:prstGeom>
+        </p:spPr>
+      </p:pic>
+      <p:sp>
+        <p:nvSpPr>
+          <p:cNvPr id="5" name="제목 1"/>
+          <p:cNvSpPr txBox="1">
+            <a:spLocks/>
+          </p:cNvSpPr>
+          <p:nvPr/>
+        </p:nvSpPr>
+        <p:spPr>
+          <a:xfrm>
+            <a:off x="772167" y="138064"/>
+            <a:ext cx="3604520" cy="375139"/>
+          </a:xfrm>
+          <a:prstGeom prst="rect">
+            <a:avLst/>
+          </a:prstGeom>
+          <a:solidFill>
+            <a:schemeClr val="accent1">
+              <a:lumMod val="20000"/>
+              <a:lumOff val="80000"/>
+            </a:schemeClr>
+          </a:solidFill>
+        </p:spPr>
+        <p:txBody>
+          <a:bodyPr vert="horz" lIns="91440" tIns="45720" rIns="91440" bIns="45720" rtlCol="0" anchor="t">
+            <a:normAutofit/>
+          </a:bodyPr>
+          <a:lstStyle>
+            <a:lvl1pPr algn="l" defTabSz="457200" rtl="0" eaLnBrk="1" latinLnBrk="1" hangingPunct="1">
+              <a:spcBef>
+                <a:spcPct val="0"/>
+              </a:spcBef>
+              <a:buNone/>
+              <a:defRPr sz="3600" kern="1200">
+                <a:solidFill>
+                  <a:schemeClr val="accent1"/>
+                </a:solidFill>
+                <a:latin typeface="+mj-lt"/>
+                <a:ea typeface="+mj-ea"/>
+                <a:cs typeface="+mj-cs"/>
+              </a:defRPr>
+            </a:lvl1pPr>
+            <a:lvl2pPr eaLnBrk="1" latinLnBrk="1" hangingPunct="1">
+              <a:defRPr>
+                <a:solidFill>
+                  <a:schemeClr val="tx2"/>
+                </a:solidFill>
+              </a:defRPr>
+            </a:lvl2pPr>
+            <a:lvl3pPr eaLnBrk="1" latinLnBrk="1" hangingPunct="1">
+              <a:defRPr>
+                <a:solidFill>
+                  <a:schemeClr val="tx2"/>
+                </a:solidFill>
+              </a:defRPr>
+            </a:lvl3pPr>
+            <a:lvl4pPr eaLnBrk="1" latinLnBrk="1" hangingPunct="1">
+              <a:defRPr>
+                <a:solidFill>
+                  <a:schemeClr val="tx2"/>
+                </a:solidFill>
+              </a:defRPr>
+            </a:lvl4pPr>
+            <a:lvl5pPr eaLnBrk="1" latinLnBrk="1" hangingPunct="1">
+              <a:defRPr>
+                <a:solidFill>
+                  <a:schemeClr val="tx2"/>
+                </a:solidFill>
+              </a:defRPr>
+            </a:lvl5pPr>
+            <a:lvl6pPr eaLnBrk="1" latinLnBrk="1" hangingPunct="1">
+              <a:defRPr>
+                <a:solidFill>
+                  <a:schemeClr val="tx2"/>
+                </a:solidFill>
+              </a:defRPr>
+            </a:lvl6pPr>
+            <a:lvl7pPr eaLnBrk="1" latinLnBrk="1" hangingPunct="1">
+              <a:defRPr>
+                <a:solidFill>
+                  <a:schemeClr val="tx2"/>
+                </a:solidFill>
+              </a:defRPr>
+            </a:lvl7pPr>
+            <a:lvl8pPr eaLnBrk="1" latinLnBrk="1" hangingPunct="1">
+              <a:defRPr>
+                <a:solidFill>
+                  <a:schemeClr val="tx2"/>
+                </a:solidFill>
+              </a:defRPr>
+            </a:lvl8pPr>
+            <a:lvl9pPr eaLnBrk="1" latinLnBrk="1" hangingPunct="1">
+              <a:defRPr>
+                <a:solidFill>
+                  <a:schemeClr val="tx2"/>
+                </a:solidFill>
+              </a:defRPr>
+            </a:lvl9pPr>
+          </a:lstStyle>
+          <a:p>
+            <a:r>
+              <a:rPr lang="en-US" altLang="ko-KR" sz="1600" dirty="0" smtClean="0"/>
+              <a:t>1.</a:t>
+            </a:r>
+            <a:r>
+              <a:rPr lang="ko-KR" altLang="en-US" sz="1600" dirty="0" smtClean="0"/>
+              <a:t>단일서버</a:t>
+            </a:r>
+            <a:r>
+              <a:rPr lang="en-US" altLang="ko-KR" sz="1600" dirty="0" smtClean="0"/>
+              <a:t>(Synchronized)</a:t>
+            </a:r>
+            <a:endParaRPr lang="ko-KR" altLang="en-US" sz="1600" dirty="0"/>
+          </a:p>
+        </p:txBody>
+      </p:sp>
+      <p:pic>
+        <p:nvPicPr>
+          <p:cNvPr id="7" name="그림 6"/>
+          <p:cNvPicPr>
+            <a:picLocks noChangeAspect="1"/>
+          </p:cNvPicPr>
+          <p:nvPr/>
+        </p:nvPicPr>
+        <p:blipFill>
+          <a:blip r:embed="rId3"/>
+          <a:stretch>
+            <a:fillRect/>
+          </a:stretch>
+        </p:blipFill>
+        <p:spPr>
+          <a:xfrm>
+            <a:off x="772167" y="2705094"/>
+            <a:ext cx="9273722" cy="578403"/>
+          </a:xfrm>
+          <a:prstGeom prst="rect">
+            <a:avLst/>
+          </a:prstGeom>
+        </p:spPr>
+      </p:pic>
+      <p:pic>
+        <p:nvPicPr>
+          <p:cNvPr id="8" name="그림 7"/>
+          <p:cNvPicPr>
+            <a:picLocks noChangeAspect="1"/>
+          </p:cNvPicPr>
+          <p:nvPr/>
+        </p:nvPicPr>
+        <p:blipFill>
+          <a:blip r:embed="rId4"/>
+          <a:stretch>
+            <a:fillRect/>
+          </a:stretch>
+        </p:blipFill>
+        <p:spPr>
+          <a:xfrm>
+            <a:off x="772166" y="3937171"/>
+            <a:ext cx="9310587" cy="673055"/>
+          </a:xfrm>
+          <a:prstGeom prst="rect">
+            <a:avLst/>
+          </a:prstGeom>
+        </p:spPr>
+      </p:pic>
+      <p:pic>
+        <p:nvPicPr>
+          <p:cNvPr id="9" name="그림 8"/>
+          <p:cNvPicPr>
+            <a:picLocks noChangeAspect="1"/>
+          </p:cNvPicPr>
+          <p:nvPr/>
+        </p:nvPicPr>
+        <p:blipFill>
+          <a:blip r:embed="rId5"/>
+          <a:stretch>
+            <a:fillRect/>
+          </a:stretch>
+        </p:blipFill>
+        <p:spPr>
+          <a:xfrm>
+            <a:off x="851297" y="5225503"/>
+            <a:ext cx="9231456" cy="697936"/>
+          </a:xfrm>
+          <a:prstGeom prst="rect">
+            <a:avLst/>
+          </a:prstGeom>
+        </p:spPr>
+      </p:pic>
+      <p:sp>
+        <p:nvSpPr>
+          <p:cNvPr id="12" name="제목 1"/>
+          <p:cNvSpPr>
+            <a:spLocks noGrp="1"/>
+          </p:cNvSpPr>
+          <p:nvPr>
+            <p:ph type="title"/>
+          </p:nvPr>
+        </p:nvSpPr>
+        <p:spPr>
+          <a:xfrm>
+            <a:off x="772167" y="2329956"/>
+            <a:ext cx="3604520" cy="375139"/>
+          </a:xfrm>
+          <a:solidFill>
+            <a:schemeClr val="accent1">
+              <a:lumMod val="20000"/>
+              <a:lumOff val="80000"/>
+            </a:schemeClr>
+          </a:solidFill>
+        </p:spPr>
+        <p:txBody>
+          <a:bodyPr>
+            <a:normAutofit/>
+          </a:bodyPr>
+          <a:lstStyle/>
+          <a:p>
+            <a:r>
+              <a:rPr lang="en-US" altLang="ko-KR" sz="1600" dirty="0" smtClean="0"/>
+              <a:t>2.</a:t>
+            </a:r>
+            <a:r>
+              <a:rPr lang="ko-KR" altLang="en-US" sz="1600" dirty="0" smtClean="0"/>
+              <a:t>비관적 </a:t>
+            </a:r>
+            <a:r>
+              <a:rPr lang="ko-KR" altLang="en-US" sz="1600" dirty="0" err="1" smtClean="0"/>
+              <a:t>락</a:t>
+            </a:r>
+            <a:r>
+              <a:rPr lang="en-US" altLang="ko-KR" sz="1600" dirty="0" smtClean="0"/>
+              <a:t>(</a:t>
+            </a:r>
+            <a:r>
+              <a:rPr lang="en-US" altLang="ko-KR" sz="1600" dirty="0" err="1" smtClean="0"/>
+              <a:t>Pressimistic</a:t>
+            </a:r>
+            <a:r>
+              <a:rPr lang="en-US" altLang="ko-KR" sz="1600" dirty="0" smtClean="0"/>
+              <a:t> Lock)</a:t>
+            </a:r>
+            <a:endParaRPr lang="ko-KR" altLang="en-US" sz="1600" dirty="0"/>
+          </a:p>
+        </p:txBody>
+      </p:sp>
+      <p:sp>
+        <p:nvSpPr>
+          <p:cNvPr id="13" name="제목 1"/>
+          <p:cNvSpPr txBox="1">
+            <a:spLocks/>
+          </p:cNvSpPr>
+          <p:nvPr/>
+        </p:nvSpPr>
+        <p:spPr>
+          <a:xfrm>
+            <a:off x="772167" y="3588360"/>
+            <a:ext cx="3604520" cy="375139"/>
+          </a:xfrm>
+          <a:prstGeom prst="rect">
+            <a:avLst/>
+          </a:prstGeom>
+          <a:solidFill>
+            <a:schemeClr val="accent1">
+              <a:lumMod val="20000"/>
+              <a:lumOff val="80000"/>
+            </a:schemeClr>
+          </a:solidFill>
+        </p:spPr>
+        <p:txBody>
+          <a:bodyPr vert="horz" lIns="91440" tIns="45720" rIns="91440" bIns="45720" rtlCol="0" anchor="t">
+            <a:normAutofit/>
+          </a:bodyPr>
+          <a:lstStyle>
+            <a:lvl1pPr algn="l" defTabSz="457200" rtl="0" eaLnBrk="1" latinLnBrk="1" hangingPunct="1">
+              <a:spcBef>
+                <a:spcPct val="0"/>
+              </a:spcBef>
+              <a:buNone/>
+              <a:defRPr sz="3600" kern="1200">
+                <a:solidFill>
+                  <a:schemeClr val="accent1"/>
+                </a:solidFill>
+                <a:latin typeface="+mj-lt"/>
+                <a:ea typeface="+mj-ea"/>
+                <a:cs typeface="+mj-cs"/>
+              </a:defRPr>
+            </a:lvl1pPr>
+            <a:lvl2pPr eaLnBrk="1" latinLnBrk="1" hangingPunct="1">
+              <a:defRPr>
+                <a:solidFill>
+                  <a:schemeClr val="tx2"/>
+                </a:solidFill>
+              </a:defRPr>
+            </a:lvl2pPr>
+            <a:lvl3pPr eaLnBrk="1" latinLnBrk="1" hangingPunct="1">
+              <a:defRPr>
+                <a:solidFill>
+                  <a:schemeClr val="tx2"/>
+                </a:solidFill>
+              </a:defRPr>
+            </a:lvl3pPr>
+            <a:lvl4pPr eaLnBrk="1" latinLnBrk="1" hangingPunct="1">
+              <a:defRPr>
+                <a:solidFill>
+                  <a:schemeClr val="tx2"/>
+                </a:solidFill>
+              </a:defRPr>
+            </a:lvl4pPr>
+            <a:lvl5pPr eaLnBrk="1" latinLnBrk="1" hangingPunct="1">
+              <a:defRPr>
+                <a:solidFill>
+                  <a:schemeClr val="tx2"/>
+                </a:solidFill>
+              </a:defRPr>
+            </a:lvl5pPr>
+            <a:lvl6pPr eaLnBrk="1" latinLnBrk="1" hangingPunct="1">
+              <a:defRPr>
+                <a:solidFill>
+                  <a:schemeClr val="tx2"/>
+                </a:solidFill>
+              </a:defRPr>
+            </a:lvl6pPr>
+            <a:lvl7pPr eaLnBrk="1" latinLnBrk="1" hangingPunct="1">
+              <a:defRPr>
+                <a:solidFill>
+                  <a:schemeClr val="tx2"/>
+                </a:solidFill>
+              </a:defRPr>
+            </a:lvl7pPr>
+            <a:lvl8pPr eaLnBrk="1" latinLnBrk="1" hangingPunct="1">
+              <a:defRPr>
+                <a:solidFill>
+                  <a:schemeClr val="tx2"/>
+                </a:solidFill>
+              </a:defRPr>
+            </a:lvl8pPr>
+            <a:lvl9pPr eaLnBrk="1" latinLnBrk="1" hangingPunct="1">
+              <a:defRPr>
+                <a:solidFill>
+                  <a:schemeClr val="tx2"/>
+                </a:solidFill>
+              </a:defRPr>
+            </a:lvl9pPr>
+          </a:lstStyle>
+          <a:p>
+            <a:r>
+              <a:rPr lang="en-US" altLang="ko-KR" sz="1600" dirty="0" smtClean="0"/>
+              <a:t>3.</a:t>
+            </a:r>
+            <a:r>
+              <a:rPr lang="ko-KR" altLang="en-US" sz="1600" dirty="0" smtClean="0"/>
+              <a:t>낙관적 </a:t>
+            </a:r>
+            <a:r>
+              <a:rPr lang="ko-KR" altLang="en-US" sz="1600" dirty="0" err="1" smtClean="0"/>
+              <a:t>락</a:t>
+            </a:r>
+            <a:r>
+              <a:rPr lang="en-US" altLang="ko-KR" sz="1600" dirty="0" smtClean="0"/>
+              <a:t>(Optimistic Lock)</a:t>
+            </a:r>
+            <a:endParaRPr lang="ko-KR" altLang="en-US" sz="1600" dirty="0"/>
+          </a:p>
+        </p:txBody>
+      </p:sp>
+      <p:sp>
+        <p:nvSpPr>
+          <p:cNvPr id="14" name="제목 1"/>
+          <p:cNvSpPr txBox="1">
+            <a:spLocks/>
+          </p:cNvSpPr>
+          <p:nvPr/>
+        </p:nvSpPr>
+        <p:spPr>
+          <a:xfrm>
+            <a:off x="772166" y="4850364"/>
+            <a:ext cx="3604520" cy="375139"/>
+          </a:xfrm>
+          <a:prstGeom prst="rect">
+            <a:avLst/>
+          </a:prstGeom>
+          <a:solidFill>
+            <a:schemeClr val="accent1">
+              <a:lumMod val="20000"/>
+              <a:lumOff val="80000"/>
+            </a:schemeClr>
+          </a:solidFill>
+        </p:spPr>
+        <p:txBody>
+          <a:bodyPr vert="horz" lIns="91440" tIns="45720" rIns="91440" bIns="45720" rtlCol="0" anchor="t">
+            <a:normAutofit/>
+          </a:bodyPr>
+          <a:lstStyle>
+            <a:lvl1pPr algn="l" defTabSz="457200" rtl="0" eaLnBrk="1" latinLnBrk="1" hangingPunct="1">
+              <a:spcBef>
+                <a:spcPct val="0"/>
+              </a:spcBef>
+              <a:buNone/>
+              <a:defRPr sz="3600" kern="1200">
+                <a:solidFill>
+                  <a:schemeClr val="accent1"/>
+                </a:solidFill>
+                <a:latin typeface="+mj-lt"/>
+                <a:ea typeface="+mj-ea"/>
+                <a:cs typeface="+mj-cs"/>
+              </a:defRPr>
+            </a:lvl1pPr>
+            <a:lvl2pPr eaLnBrk="1" latinLnBrk="1" hangingPunct="1">
+              <a:defRPr>
+                <a:solidFill>
+                  <a:schemeClr val="tx2"/>
+                </a:solidFill>
+              </a:defRPr>
+            </a:lvl2pPr>
+            <a:lvl3pPr eaLnBrk="1" latinLnBrk="1" hangingPunct="1">
+              <a:defRPr>
+                <a:solidFill>
+                  <a:schemeClr val="tx2"/>
+                </a:solidFill>
+              </a:defRPr>
+            </a:lvl3pPr>
+            <a:lvl4pPr eaLnBrk="1" latinLnBrk="1" hangingPunct="1">
+              <a:defRPr>
+                <a:solidFill>
+                  <a:schemeClr val="tx2"/>
+                </a:solidFill>
+              </a:defRPr>
+            </a:lvl4pPr>
+            <a:lvl5pPr eaLnBrk="1" latinLnBrk="1" hangingPunct="1">
+              <a:defRPr>
+                <a:solidFill>
+                  <a:schemeClr val="tx2"/>
+                </a:solidFill>
+              </a:defRPr>
+            </a:lvl5pPr>
+            <a:lvl6pPr eaLnBrk="1" latinLnBrk="1" hangingPunct="1">
+              <a:defRPr>
+                <a:solidFill>
+                  <a:schemeClr val="tx2"/>
+                </a:solidFill>
+              </a:defRPr>
+            </a:lvl6pPr>
+            <a:lvl7pPr eaLnBrk="1" latinLnBrk="1" hangingPunct="1">
+              <a:defRPr>
+                <a:solidFill>
+                  <a:schemeClr val="tx2"/>
+                </a:solidFill>
+              </a:defRPr>
+            </a:lvl7pPr>
+            <a:lvl8pPr eaLnBrk="1" latinLnBrk="1" hangingPunct="1">
+              <a:defRPr>
+                <a:solidFill>
+                  <a:schemeClr val="tx2"/>
+                </a:solidFill>
+              </a:defRPr>
+            </a:lvl8pPr>
+            <a:lvl9pPr eaLnBrk="1" latinLnBrk="1" hangingPunct="1">
+              <a:defRPr>
+                <a:solidFill>
+                  <a:schemeClr val="tx2"/>
+                </a:solidFill>
+              </a:defRPr>
+            </a:lvl9pPr>
+          </a:lstStyle>
+          <a:p>
+            <a:r>
+              <a:rPr lang="en-US" altLang="ko-KR" sz="1600" dirty="0" smtClean="0"/>
+              <a:t>4.Redis </a:t>
+            </a:r>
+            <a:r>
+              <a:rPr lang="ko-KR" altLang="en-US" sz="1600" dirty="0" smtClean="0"/>
+              <a:t>분산 </a:t>
+            </a:r>
+            <a:r>
+              <a:rPr lang="ko-KR" altLang="en-US" sz="1600" dirty="0" err="1" smtClean="0"/>
+              <a:t>락</a:t>
+            </a:r>
+            <a:r>
+              <a:rPr lang="en-US" altLang="ko-KR" sz="1600" dirty="0" smtClean="0"/>
+              <a:t>(</a:t>
+            </a:r>
+            <a:r>
+              <a:rPr lang="en-US" altLang="ko-KR" sz="1600" dirty="0" err="1" smtClean="0"/>
+              <a:t>Pressimistic</a:t>
+            </a:r>
+            <a:r>
+              <a:rPr lang="en-US" altLang="ko-KR" sz="1600" dirty="0" smtClean="0"/>
+              <a:t> Lock)</a:t>
+            </a:r>
+            <a:endParaRPr lang="ko-KR" altLang="en-US" sz="1600" dirty="0"/>
+          </a:p>
+        </p:txBody>
+      </p:sp>
+    </p:spTree>
+    <p:extLst>
+      <p:ext uri="{BB962C8B-B14F-4D97-AF65-F5344CB8AC3E}">
+        <p14:creationId xmlns:p14="http://schemas.microsoft.com/office/powerpoint/2010/main" val="3609549141"/>
+      </p:ext>
+    </p:extLst>
+  </p:cSld>
+  <p:clrMapOvr>
+    <a:masterClrMapping/>
+  </p:clrMapOvr>
 </p:sld>
 </file>
 
@@ -3370,6 +3917,154 @@
 </file>
 
 <file path=ppt/slides/slide3.xml><?xml version="1.0" encoding="utf-8"?>
+<p:sld xmlns:a="http://schemas.openxmlformats.org/drawingml/2006/main" xmlns:r="http://schemas.openxmlformats.org/officeDocument/2006/relationships" xmlns:p="http://schemas.openxmlformats.org/presentationml/2006/main">
+  <p:cSld>
+    <p:spTree>
+      <p:nvGrpSpPr>
+        <p:cNvPr id="1" name=""/>
+        <p:cNvGrpSpPr/>
+        <p:nvPr/>
+      </p:nvGrpSpPr>
+      <p:grpSpPr>
+        <a:xfrm>
+          <a:off x="0" y="0"/>
+          <a:ext cx="0" cy="0"/>
+          <a:chOff x="0" y="0"/>
+          <a:chExt cx="0" cy="0"/>
+        </a:xfrm>
+      </p:grpSpPr>
+      <p:sp>
+        <p:nvSpPr>
+          <p:cNvPr id="2" name="제목 1"/>
+          <p:cNvSpPr>
+            <a:spLocks noGrp="1"/>
+          </p:cNvSpPr>
+          <p:nvPr>
+            <p:ph type="title"/>
+          </p:nvPr>
+        </p:nvSpPr>
+        <p:spPr/>
+        <p:txBody>
+          <a:bodyPr/>
+          <a:lstStyle/>
+          <a:p>
+            <a:r>
+              <a:rPr lang="ko-KR" altLang="en-US" b="1" dirty="0" smtClean="0"/>
+              <a:t>사용기술</a:t>
+            </a:r>
+            <a:endParaRPr lang="ko-KR" altLang="en-US" b="1" dirty="0">
+              <a:solidFill>
+                <a:schemeClr val="tx1"/>
+              </a:solidFill>
+            </a:endParaRPr>
+          </a:p>
+        </p:txBody>
+      </p:sp>
+      <p:sp>
+        <p:nvSpPr>
+          <p:cNvPr id="3" name="내용 개체 틀 2"/>
+          <p:cNvSpPr>
+            <a:spLocks noGrp="1"/>
+          </p:cNvSpPr>
+          <p:nvPr>
+            <p:ph idx="1"/>
+          </p:nvPr>
+        </p:nvSpPr>
+        <p:spPr/>
+        <p:txBody>
+          <a:bodyPr>
+            <a:normAutofit/>
+          </a:bodyPr>
+          <a:lstStyle/>
+          <a:p>
+            <a:r>
+              <a:rPr lang="en-US" altLang="ko-KR" b="1" dirty="0" smtClean="0">
+                <a:solidFill>
+                  <a:schemeClr val="tx1"/>
+                </a:solidFill>
+              </a:rPr>
+              <a:t>spring boot</a:t>
+            </a:r>
+          </a:p>
+          <a:p>
+            <a:r>
+              <a:rPr lang="en-US" altLang="ko-KR" b="1" dirty="0" smtClean="0"/>
+              <a:t>JPA</a:t>
+            </a:r>
+          </a:p>
+          <a:p>
+            <a:r>
+              <a:rPr lang="en-US" altLang="ko-KR" b="1" dirty="0" err="1" smtClean="0">
+                <a:solidFill>
+                  <a:schemeClr val="tx1"/>
+                </a:solidFill>
+              </a:rPr>
+              <a:t>Mysql</a:t>
+            </a:r>
+            <a:endParaRPr lang="en-US" altLang="ko-KR" b="1" dirty="0" smtClean="0">
+              <a:solidFill>
+                <a:schemeClr val="tx1"/>
+              </a:solidFill>
+            </a:endParaRPr>
+          </a:p>
+          <a:p>
+            <a:r>
+              <a:rPr lang="en-US" altLang="ko-KR" b="1" dirty="0" err="1" smtClean="0"/>
+              <a:t>Javascript</a:t>
+            </a:r>
+            <a:endParaRPr lang="en-US" altLang="ko-KR" b="1" dirty="0" smtClean="0"/>
+          </a:p>
+          <a:p>
+            <a:r>
+              <a:rPr lang="en-US" altLang="ko-KR" b="1" dirty="0" err="1" smtClean="0"/>
+              <a:t>Jmeter</a:t>
+            </a:r>
+            <a:endParaRPr lang="en-US" altLang="ko-KR" b="1" dirty="0" smtClean="0"/>
+          </a:p>
+          <a:p>
+            <a:r>
+              <a:rPr lang="en-US" altLang="ko-KR" b="1" dirty="0" err="1" smtClean="0"/>
+              <a:t>Thymeleaf</a:t>
+            </a:r>
+            <a:endParaRPr lang="en-US" altLang="ko-KR" b="1" dirty="0" smtClean="0">
+              <a:solidFill>
+                <a:schemeClr val="tx1"/>
+              </a:solidFill>
+            </a:endParaRPr>
+          </a:p>
+          <a:p>
+            <a:r>
+              <a:rPr lang="en-US" altLang="ko-KR" b="1" smtClean="0"/>
+              <a:t>Spring tool</a:t>
+            </a:r>
+            <a:endParaRPr lang="en-US" altLang="ko-KR" b="1" dirty="0" smtClean="0"/>
+          </a:p>
+          <a:p>
+            <a:endParaRPr lang="en-US" altLang="ko-KR" b="1" dirty="0" smtClean="0"/>
+          </a:p>
+        </p:txBody>
+      </p:sp>
+    </p:spTree>
+    <p:extLst>
+      <p:ext uri="{BB962C8B-B14F-4D97-AF65-F5344CB8AC3E}">
+        <p14:creationId xmlns:p14="http://schemas.microsoft.com/office/powerpoint/2010/main" val="4268438960"/>
+      </p:ext>
+    </p:extLst>
+  </p:cSld>
+  <p:clrMapOvr>
+    <a:masterClrMapping/>
+  </p:clrMapOvr>
+  <p:timing>
+    <p:tnLst>
+      <p:par>
+        <p:cTn id="1" dur="indefinite" restart="never" nodeType="tmRoot"/>
+      </p:par>
+    </p:tnLst>
+  </p:timing>
+</p:sld>
+</file>
+
+<file path=ppt/slides/slide4.xml><?xml version="1.0" encoding="utf-8"?>
 <p:sld xmlns:a="http://schemas.openxmlformats.org/drawingml/2006/main" xmlns:r="http://schemas.openxmlformats.org/officeDocument/2006/relationships" xmlns:p="http://schemas.openxmlformats.org/presentationml/2006/main">
   <p:cSld>
     <p:spTree>
@@ -3478,7 +4173,7 @@
 </p:sld>
 </file>
 
-<file path=ppt/slides/slide4.xml><?xml version="1.0" encoding="utf-8"?>
+<file path=ppt/slides/slide5.xml><?xml version="1.0" encoding="utf-8"?>
 <p:sld xmlns:a="http://schemas.openxmlformats.org/drawingml/2006/main" xmlns:r="http://schemas.openxmlformats.org/officeDocument/2006/relationships" xmlns:p="http://schemas.openxmlformats.org/presentationml/2006/main">
   <p:cSld>
     <p:spTree>
@@ -3611,7 +4306,7 @@
 </p:sld>
 </file>
 
-<file path=ppt/slides/slide5.xml><?xml version="1.0" encoding="utf-8"?>
+<file path=ppt/slides/slide6.xml><?xml version="1.0" encoding="utf-8"?>
 <p:sld xmlns:a="http://schemas.openxmlformats.org/drawingml/2006/main" xmlns:r="http://schemas.openxmlformats.org/officeDocument/2006/relationships" xmlns:p="http://schemas.openxmlformats.org/presentationml/2006/main">
   <p:cSld>
     <p:spTree>
@@ -3744,7 +4439,7 @@
 </p:sld>
 </file>
 
-<file path=ppt/slides/slide6.xml><?xml version="1.0" encoding="utf-8"?>
+<file path=ppt/slides/slide7.xml><?xml version="1.0" encoding="utf-8"?>
 <p:sld xmlns:a="http://schemas.openxmlformats.org/drawingml/2006/main" xmlns:r="http://schemas.openxmlformats.org/officeDocument/2006/relationships" xmlns:p="http://schemas.openxmlformats.org/presentationml/2006/main">
   <p:cSld>
     <p:spTree>
@@ -3878,7 +4573,7 @@
 </p:sld>
 </file>
 
-<file path=ppt/slides/slide7.xml><?xml version="1.0" encoding="utf-8"?>
+<file path=ppt/slides/slide8.xml><?xml version="1.0" encoding="utf-8"?>
 <p:sld xmlns:a="http://schemas.openxmlformats.org/drawingml/2006/main" xmlns:r="http://schemas.openxmlformats.org/officeDocument/2006/relationships" xmlns:p="http://schemas.openxmlformats.org/presentationml/2006/main">
   <p:cSld>
     <p:spTree>
@@ -4004,7 +4699,7 @@
 </p:sld>
 </file>
 
-<file path=ppt/slides/slide8.xml><?xml version="1.0" encoding="utf-8"?>
+<file path=ppt/slides/slide9.xml><?xml version="1.0" encoding="utf-8"?>
 <p:sld xmlns:a="http://schemas.openxmlformats.org/drawingml/2006/main" xmlns:r="http://schemas.openxmlformats.org/officeDocument/2006/relationships" xmlns:p="http://schemas.openxmlformats.org/presentationml/2006/main">
   <p:cSld>
     <p:spTree>
@@ -4139,552 +4834,6 @@
     <p:extLst>
       <p:ext uri="{BB962C8B-B14F-4D97-AF65-F5344CB8AC3E}">
         <p14:creationId xmlns:p14="http://schemas.microsoft.com/office/powerpoint/2010/main" val="2551248115"/>
-      </p:ext>
-    </p:extLst>
-  </p:cSld>
-  <p:clrMapOvr>
-    <a:masterClrMapping/>
-  </p:clrMapOvr>
-</p:sld>
-</file>
-
-<file path=ppt/slides/slide9.xml><?xml version="1.0" encoding="utf-8"?>
-<p:sld xmlns:a="http://schemas.openxmlformats.org/drawingml/2006/main" xmlns:r="http://schemas.openxmlformats.org/officeDocument/2006/relationships" xmlns:p="http://schemas.openxmlformats.org/presentationml/2006/main">
-  <p:cSld>
-    <p:spTree>
-      <p:nvGrpSpPr>
-        <p:cNvPr id="1" name=""/>
-        <p:cNvGrpSpPr/>
-        <p:nvPr/>
-      </p:nvGrpSpPr>
-      <p:grpSpPr>
-        <a:xfrm>
-          <a:off x="0" y="0"/>
-          <a:ext cx="0" cy="0"/>
-          <a:chOff x="0" y="0"/>
-          <a:chExt cx="0" cy="0"/>
-        </a:xfrm>
-      </p:grpSpPr>
-      <p:pic>
-        <p:nvPicPr>
-          <p:cNvPr id="4" name="그림 3"/>
-          <p:cNvPicPr>
-            <a:picLocks noChangeAspect="1"/>
-          </p:cNvPicPr>
-          <p:nvPr/>
-        </p:nvPicPr>
-        <p:blipFill>
-          <a:blip r:embed="rId2"/>
-          <a:stretch>
-            <a:fillRect/>
-          </a:stretch>
-        </p:blipFill>
-        <p:spPr>
-          <a:xfrm>
-            <a:off x="772166" y="513203"/>
-            <a:ext cx="9273723" cy="1669531"/>
-          </a:xfrm>
-          <a:prstGeom prst="rect">
-            <a:avLst/>
-          </a:prstGeom>
-        </p:spPr>
-      </p:pic>
-      <p:sp>
-        <p:nvSpPr>
-          <p:cNvPr id="5" name="제목 1"/>
-          <p:cNvSpPr txBox="1">
-            <a:spLocks/>
-          </p:cNvSpPr>
-          <p:nvPr/>
-        </p:nvSpPr>
-        <p:spPr>
-          <a:xfrm>
-            <a:off x="772167" y="138064"/>
-            <a:ext cx="3604520" cy="375139"/>
-          </a:xfrm>
-          <a:prstGeom prst="rect">
-            <a:avLst/>
-          </a:prstGeom>
-          <a:solidFill>
-            <a:schemeClr val="accent1">
-              <a:lumMod val="20000"/>
-              <a:lumOff val="80000"/>
-            </a:schemeClr>
-          </a:solidFill>
-        </p:spPr>
-        <p:txBody>
-          <a:bodyPr vert="horz" lIns="91440" tIns="45720" rIns="91440" bIns="45720" rtlCol="0" anchor="t">
-            <a:normAutofit/>
-          </a:bodyPr>
-          <a:lstStyle>
-            <a:lvl1pPr algn="l" defTabSz="457200" rtl="0" eaLnBrk="1" latinLnBrk="1" hangingPunct="1">
-              <a:spcBef>
-                <a:spcPct val="0"/>
-              </a:spcBef>
-              <a:buNone/>
-              <a:defRPr sz="3600" kern="1200">
-                <a:solidFill>
-                  <a:schemeClr val="accent1"/>
-                </a:solidFill>
-                <a:latin typeface="+mj-lt"/>
-                <a:ea typeface="+mj-ea"/>
-                <a:cs typeface="+mj-cs"/>
-              </a:defRPr>
-            </a:lvl1pPr>
-            <a:lvl2pPr eaLnBrk="1" latinLnBrk="1" hangingPunct="1">
-              <a:defRPr>
-                <a:solidFill>
-                  <a:schemeClr val="tx2"/>
-                </a:solidFill>
-              </a:defRPr>
-            </a:lvl2pPr>
-            <a:lvl3pPr eaLnBrk="1" latinLnBrk="1" hangingPunct="1">
-              <a:defRPr>
-                <a:solidFill>
-                  <a:schemeClr val="tx2"/>
-                </a:solidFill>
-              </a:defRPr>
-            </a:lvl3pPr>
-            <a:lvl4pPr eaLnBrk="1" latinLnBrk="1" hangingPunct="1">
-              <a:defRPr>
-                <a:solidFill>
-                  <a:schemeClr val="tx2"/>
-                </a:solidFill>
-              </a:defRPr>
-            </a:lvl4pPr>
-            <a:lvl5pPr eaLnBrk="1" latinLnBrk="1" hangingPunct="1">
-              <a:defRPr>
-                <a:solidFill>
-                  <a:schemeClr val="tx2"/>
-                </a:solidFill>
-              </a:defRPr>
-            </a:lvl5pPr>
-            <a:lvl6pPr eaLnBrk="1" latinLnBrk="1" hangingPunct="1">
-              <a:defRPr>
-                <a:solidFill>
-                  <a:schemeClr val="tx2"/>
-                </a:solidFill>
-              </a:defRPr>
-            </a:lvl6pPr>
-            <a:lvl7pPr eaLnBrk="1" latinLnBrk="1" hangingPunct="1">
-              <a:defRPr>
-                <a:solidFill>
-                  <a:schemeClr val="tx2"/>
-                </a:solidFill>
-              </a:defRPr>
-            </a:lvl7pPr>
-            <a:lvl8pPr eaLnBrk="1" latinLnBrk="1" hangingPunct="1">
-              <a:defRPr>
-                <a:solidFill>
-                  <a:schemeClr val="tx2"/>
-                </a:solidFill>
-              </a:defRPr>
-            </a:lvl8pPr>
-            <a:lvl9pPr eaLnBrk="1" latinLnBrk="1" hangingPunct="1">
-              <a:defRPr>
-                <a:solidFill>
-                  <a:schemeClr val="tx2"/>
-                </a:solidFill>
-              </a:defRPr>
-            </a:lvl9pPr>
-          </a:lstStyle>
-          <a:p>
-            <a:r>
-              <a:rPr lang="en-US" altLang="ko-KR" sz="1600" dirty="0" smtClean="0"/>
-              <a:t>1.</a:t>
-            </a:r>
-            <a:r>
-              <a:rPr lang="ko-KR" altLang="en-US" sz="1600" dirty="0" smtClean="0"/>
-              <a:t>단일서버</a:t>
-            </a:r>
-            <a:r>
-              <a:rPr lang="en-US" altLang="ko-KR" sz="1600" dirty="0" smtClean="0"/>
-              <a:t>(Synchronized)</a:t>
-            </a:r>
-            <a:endParaRPr lang="ko-KR" altLang="en-US" sz="1600" dirty="0"/>
-          </a:p>
-        </p:txBody>
-      </p:sp>
-      <p:pic>
-        <p:nvPicPr>
-          <p:cNvPr id="7" name="그림 6"/>
-          <p:cNvPicPr>
-            <a:picLocks noChangeAspect="1"/>
-          </p:cNvPicPr>
-          <p:nvPr/>
-        </p:nvPicPr>
-        <p:blipFill>
-          <a:blip r:embed="rId3"/>
-          <a:stretch>
-            <a:fillRect/>
-          </a:stretch>
-        </p:blipFill>
-        <p:spPr>
-          <a:xfrm>
-            <a:off x="772167" y="2705094"/>
-            <a:ext cx="9273722" cy="578403"/>
-          </a:xfrm>
-          <a:prstGeom prst="rect">
-            <a:avLst/>
-          </a:prstGeom>
-        </p:spPr>
-      </p:pic>
-      <p:pic>
-        <p:nvPicPr>
-          <p:cNvPr id="8" name="그림 7"/>
-          <p:cNvPicPr>
-            <a:picLocks noChangeAspect="1"/>
-          </p:cNvPicPr>
-          <p:nvPr/>
-        </p:nvPicPr>
-        <p:blipFill>
-          <a:blip r:embed="rId4"/>
-          <a:stretch>
-            <a:fillRect/>
-          </a:stretch>
-        </p:blipFill>
-        <p:spPr>
-          <a:xfrm>
-            <a:off x="772166" y="3937171"/>
-            <a:ext cx="9310587" cy="673055"/>
-          </a:xfrm>
-          <a:prstGeom prst="rect">
-            <a:avLst/>
-          </a:prstGeom>
-        </p:spPr>
-      </p:pic>
-      <p:pic>
-        <p:nvPicPr>
-          <p:cNvPr id="9" name="그림 8"/>
-          <p:cNvPicPr>
-            <a:picLocks noChangeAspect="1"/>
-          </p:cNvPicPr>
-          <p:nvPr/>
-        </p:nvPicPr>
-        <p:blipFill>
-          <a:blip r:embed="rId5"/>
-          <a:stretch>
-            <a:fillRect/>
-          </a:stretch>
-        </p:blipFill>
-        <p:spPr>
-          <a:xfrm>
-            <a:off x="851297" y="5225503"/>
-            <a:ext cx="9231456" cy="697936"/>
-          </a:xfrm>
-          <a:prstGeom prst="rect">
-            <a:avLst/>
-          </a:prstGeom>
-        </p:spPr>
-      </p:pic>
-      <p:sp>
-        <p:nvSpPr>
-          <p:cNvPr id="12" name="제목 1"/>
-          <p:cNvSpPr>
-            <a:spLocks noGrp="1"/>
-          </p:cNvSpPr>
-          <p:nvPr>
-            <p:ph type="title"/>
-          </p:nvPr>
-        </p:nvSpPr>
-        <p:spPr>
-          <a:xfrm>
-            <a:off x="772167" y="2329956"/>
-            <a:ext cx="3604520" cy="375139"/>
-          </a:xfrm>
-          <a:solidFill>
-            <a:schemeClr val="accent1">
-              <a:lumMod val="20000"/>
-              <a:lumOff val="80000"/>
-            </a:schemeClr>
-          </a:solidFill>
-        </p:spPr>
-        <p:txBody>
-          <a:bodyPr>
-            <a:normAutofit/>
-          </a:bodyPr>
-          <a:lstStyle/>
-          <a:p>
-            <a:r>
-              <a:rPr lang="en-US" altLang="ko-KR" sz="1600" dirty="0" smtClean="0"/>
-              <a:t>2.</a:t>
-            </a:r>
-            <a:r>
-              <a:rPr lang="ko-KR" altLang="en-US" sz="1600" dirty="0" smtClean="0"/>
-              <a:t>비관적 </a:t>
-            </a:r>
-            <a:r>
-              <a:rPr lang="ko-KR" altLang="en-US" sz="1600" dirty="0" err="1" smtClean="0"/>
-              <a:t>락</a:t>
-            </a:r>
-            <a:r>
-              <a:rPr lang="en-US" altLang="ko-KR" sz="1600" dirty="0" smtClean="0"/>
-              <a:t>(</a:t>
-            </a:r>
-            <a:r>
-              <a:rPr lang="en-US" altLang="ko-KR" sz="1600" dirty="0" err="1" smtClean="0"/>
-              <a:t>Pressimistic</a:t>
-            </a:r>
-            <a:r>
-              <a:rPr lang="en-US" altLang="ko-KR" sz="1600" dirty="0" smtClean="0"/>
-              <a:t> Lock)</a:t>
-            </a:r>
-            <a:endParaRPr lang="ko-KR" altLang="en-US" sz="1600" dirty="0"/>
-          </a:p>
-        </p:txBody>
-      </p:sp>
-      <p:sp>
-        <p:nvSpPr>
-          <p:cNvPr id="13" name="제목 1"/>
-          <p:cNvSpPr txBox="1">
-            <a:spLocks/>
-          </p:cNvSpPr>
-          <p:nvPr/>
-        </p:nvSpPr>
-        <p:spPr>
-          <a:xfrm>
-            <a:off x="772167" y="3588360"/>
-            <a:ext cx="3604520" cy="375139"/>
-          </a:xfrm>
-          <a:prstGeom prst="rect">
-            <a:avLst/>
-          </a:prstGeom>
-          <a:solidFill>
-            <a:schemeClr val="accent1">
-              <a:lumMod val="20000"/>
-              <a:lumOff val="80000"/>
-            </a:schemeClr>
-          </a:solidFill>
-        </p:spPr>
-        <p:txBody>
-          <a:bodyPr vert="horz" lIns="91440" tIns="45720" rIns="91440" bIns="45720" rtlCol="0" anchor="t">
-            <a:normAutofit/>
-          </a:bodyPr>
-          <a:lstStyle>
-            <a:lvl1pPr algn="l" defTabSz="457200" rtl="0" eaLnBrk="1" latinLnBrk="1" hangingPunct="1">
-              <a:spcBef>
-                <a:spcPct val="0"/>
-              </a:spcBef>
-              <a:buNone/>
-              <a:defRPr sz="3600" kern="1200">
-                <a:solidFill>
-                  <a:schemeClr val="accent1"/>
-                </a:solidFill>
-                <a:latin typeface="+mj-lt"/>
-                <a:ea typeface="+mj-ea"/>
-                <a:cs typeface="+mj-cs"/>
-              </a:defRPr>
-            </a:lvl1pPr>
-            <a:lvl2pPr eaLnBrk="1" latinLnBrk="1" hangingPunct="1">
-              <a:defRPr>
-                <a:solidFill>
-                  <a:schemeClr val="tx2"/>
-                </a:solidFill>
-              </a:defRPr>
-            </a:lvl2pPr>
-            <a:lvl3pPr eaLnBrk="1" latinLnBrk="1" hangingPunct="1">
-              <a:defRPr>
-                <a:solidFill>
-                  <a:schemeClr val="tx2"/>
-                </a:solidFill>
-              </a:defRPr>
-            </a:lvl3pPr>
-            <a:lvl4pPr eaLnBrk="1" latinLnBrk="1" hangingPunct="1">
-              <a:defRPr>
-                <a:solidFill>
-                  <a:schemeClr val="tx2"/>
-                </a:solidFill>
-              </a:defRPr>
-            </a:lvl4pPr>
-            <a:lvl5pPr eaLnBrk="1" latinLnBrk="1" hangingPunct="1">
-              <a:defRPr>
-                <a:solidFill>
-                  <a:schemeClr val="tx2"/>
-                </a:solidFill>
-              </a:defRPr>
-            </a:lvl5pPr>
-            <a:lvl6pPr eaLnBrk="1" latinLnBrk="1" hangingPunct="1">
-              <a:defRPr>
-                <a:solidFill>
-                  <a:schemeClr val="tx2"/>
-                </a:solidFill>
-              </a:defRPr>
-            </a:lvl6pPr>
-            <a:lvl7pPr eaLnBrk="1" latinLnBrk="1" hangingPunct="1">
-              <a:defRPr>
-                <a:solidFill>
-                  <a:schemeClr val="tx2"/>
-                </a:solidFill>
-              </a:defRPr>
-            </a:lvl7pPr>
-            <a:lvl8pPr eaLnBrk="1" latinLnBrk="1" hangingPunct="1">
-              <a:defRPr>
-                <a:solidFill>
-                  <a:schemeClr val="tx2"/>
-                </a:solidFill>
-              </a:defRPr>
-            </a:lvl8pPr>
-            <a:lvl9pPr eaLnBrk="1" latinLnBrk="1" hangingPunct="1">
-              <a:defRPr>
-                <a:solidFill>
-                  <a:schemeClr val="tx2"/>
-                </a:solidFill>
-              </a:defRPr>
-            </a:lvl9pPr>
-          </a:lstStyle>
-          <a:p>
-            <a:r>
-              <a:rPr lang="en-US" altLang="ko-KR" sz="1600" dirty="0" smtClean="0"/>
-              <a:t>3.</a:t>
-            </a:r>
-            <a:r>
-              <a:rPr lang="ko-KR" altLang="en-US" sz="1600" dirty="0" smtClean="0"/>
-              <a:t>낙관적 </a:t>
-            </a:r>
-            <a:r>
-              <a:rPr lang="ko-KR" altLang="en-US" sz="1600" dirty="0" err="1" smtClean="0"/>
-              <a:t>락</a:t>
-            </a:r>
-            <a:r>
-              <a:rPr lang="en-US" altLang="ko-KR" sz="1600" dirty="0" smtClean="0"/>
-              <a:t>(Optimistic Lock)</a:t>
-            </a:r>
-            <a:endParaRPr lang="ko-KR" altLang="en-US" sz="1600" dirty="0"/>
-          </a:p>
-        </p:txBody>
-      </p:sp>
-      <p:sp>
-        <p:nvSpPr>
-          <p:cNvPr id="14" name="제목 1"/>
-          <p:cNvSpPr txBox="1">
-            <a:spLocks/>
-          </p:cNvSpPr>
-          <p:nvPr/>
-        </p:nvSpPr>
-        <p:spPr>
-          <a:xfrm>
-            <a:off x="772166" y="4850364"/>
-            <a:ext cx="3604520" cy="375139"/>
-          </a:xfrm>
-          <a:prstGeom prst="rect">
-            <a:avLst/>
-          </a:prstGeom>
-          <a:solidFill>
-            <a:schemeClr val="accent1">
-              <a:lumMod val="20000"/>
-              <a:lumOff val="80000"/>
-            </a:schemeClr>
-          </a:solidFill>
-        </p:spPr>
-        <p:txBody>
-          <a:bodyPr vert="horz" lIns="91440" tIns="45720" rIns="91440" bIns="45720" rtlCol="0" anchor="t">
-            <a:normAutofit/>
-          </a:bodyPr>
-          <a:lstStyle>
-            <a:lvl1pPr algn="l" defTabSz="457200" rtl="0" eaLnBrk="1" latinLnBrk="1" hangingPunct="1">
-              <a:spcBef>
-                <a:spcPct val="0"/>
-              </a:spcBef>
-              <a:buNone/>
-              <a:defRPr sz="3600" kern="1200">
-                <a:solidFill>
-                  <a:schemeClr val="accent1"/>
-                </a:solidFill>
-                <a:latin typeface="+mj-lt"/>
-                <a:ea typeface="+mj-ea"/>
-                <a:cs typeface="+mj-cs"/>
-              </a:defRPr>
-            </a:lvl1pPr>
-            <a:lvl2pPr eaLnBrk="1" latinLnBrk="1" hangingPunct="1">
-              <a:defRPr>
-                <a:solidFill>
-                  <a:schemeClr val="tx2"/>
-                </a:solidFill>
-              </a:defRPr>
-            </a:lvl2pPr>
-            <a:lvl3pPr eaLnBrk="1" latinLnBrk="1" hangingPunct="1">
-              <a:defRPr>
-                <a:solidFill>
-                  <a:schemeClr val="tx2"/>
-                </a:solidFill>
-              </a:defRPr>
-            </a:lvl3pPr>
-            <a:lvl4pPr eaLnBrk="1" latinLnBrk="1" hangingPunct="1">
-              <a:defRPr>
-                <a:solidFill>
-                  <a:schemeClr val="tx2"/>
-                </a:solidFill>
-              </a:defRPr>
-            </a:lvl4pPr>
-            <a:lvl5pPr eaLnBrk="1" latinLnBrk="1" hangingPunct="1">
-              <a:defRPr>
-                <a:solidFill>
-                  <a:schemeClr val="tx2"/>
-                </a:solidFill>
-              </a:defRPr>
-            </a:lvl5pPr>
-            <a:lvl6pPr eaLnBrk="1" latinLnBrk="1" hangingPunct="1">
-              <a:defRPr>
-                <a:solidFill>
-                  <a:schemeClr val="tx2"/>
-                </a:solidFill>
-              </a:defRPr>
-            </a:lvl6pPr>
-            <a:lvl7pPr eaLnBrk="1" latinLnBrk="1" hangingPunct="1">
-              <a:defRPr>
-                <a:solidFill>
-                  <a:schemeClr val="tx2"/>
-                </a:solidFill>
-              </a:defRPr>
-            </a:lvl7pPr>
-            <a:lvl8pPr eaLnBrk="1" latinLnBrk="1" hangingPunct="1">
-              <a:defRPr>
-                <a:solidFill>
-                  <a:schemeClr val="tx2"/>
-                </a:solidFill>
-              </a:defRPr>
-            </a:lvl8pPr>
-            <a:lvl9pPr eaLnBrk="1" latinLnBrk="1" hangingPunct="1">
-              <a:defRPr>
-                <a:solidFill>
-                  <a:schemeClr val="tx2"/>
-                </a:solidFill>
-              </a:defRPr>
-            </a:lvl9pPr>
-          </a:lstStyle>
-          <a:p>
-            <a:r>
-              <a:rPr lang="en-US" altLang="ko-KR" sz="1600" dirty="0" smtClean="0"/>
-              <a:t>4.Redis </a:t>
-            </a:r>
-            <a:r>
-              <a:rPr lang="ko-KR" altLang="en-US" sz="1600" dirty="0" smtClean="0"/>
-              <a:t>분산 </a:t>
-            </a:r>
-            <a:r>
-              <a:rPr lang="ko-KR" altLang="en-US" sz="1600" dirty="0" err="1" smtClean="0"/>
-              <a:t>락</a:t>
-            </a:r>
-            <a:r>
-              <a:rPr lang="en-US" altLang="ko-KR" sz="1600" dirty="0" smtClean="0"/>
-              <a:t>(</a:t>
-            </a:r>
-            <a:r>
-              <a:rPr lang="en-US" altLang="ko-KR" sz="1600" dirty="0" err="1" smtClean="0"/>
-              <a:t>Pressimistic</a:t>
-            </a:r>
-            <a:r>
-              <a:rPr lang="en-US" altLang="ko-KR" sz="1600" dirty="0" smtClean="0"/>
-              <a:t> Lock)</a:t>
-            </a:r>
-            <a:endParaRPr lang="ko-KR" altLang="en-US" sz="1600" dirty="0"/>
-          </a:p>
-        </p:txBody>
-      </p:sp>
-    </p:spTree>
-    <p:extLst>
-      <p:ext uri="{BB962C8B-B14F-4D97-AF65-F5344CB8AC3E}">
-        <p14:creationId xmlns:p14="http://schemas.microsoft.com/office/powerpoint/2010/main" val="3609549141"/>
       </p:ext>
     </p:extLst>
   </p:cSld>
